--- a/UVM TLM Introduction.pptx
+++ b/UVM TLM Introduction.pptx
@@ -230,7 +230,7 @@
           <a:p>
             <a:fld id="{88F6225B-796D-41D8-9C9A-35855C549521}" type="datetimeFigureOut">
               <a:rPr lang="zh-TW" altLang="en-US" smtClean="0"/>
-              <a:t>2024/11/3</a:t>
+              <a:t>2026/8/11</a:t>
             </a:fld>
             <a:endParaRPr lang="zh-TW" altLang="en-US"/>
           </a:p>
@@ -525,6 +525,13 @@
           </p:nvPr>
         </p:nvSpPr>
         <p:spPr/>
+        <p:txBody>
+          <a:bodyPr/>
+          <a:lstStyle/>
+          <a:p>
+            <a:endParaRPr lang="zh-TW" altLang="en-US"/>
+          </a:p>
+        </p:txBody>
       </p:sp>
       <p:sp>
         <p:nvSpPr>
@@ -625,6 +632,13 @@
           </p:nvPr>
         </p:nvSpPr>
         <p:spPr/>
+        <p:txBody>
+          <a:bodyPr/>
+          <a:lstStyle/>
+          <a:p>
+            <a:endParaRPr lang="zh-TW" altLang="en-US"/>
+          </a:p>
+        </p:txBody>
       </p:sp>
       <p:sp>
         <p:nvSpPr>
@@ -733,6 +747,13 @@
           </p:nvPr>
         </p:nvSpPr>
         <p:spPr/>
+        <p:txBody>
+          <a:bodyPr/>
+          <a:lstStyle/>
+          <a:p>
+            <a:endParaRPr lang="zh-TW" altLang="en-US"/>
+          </a:p>
+        </p:txBody>
       </p:sp>
       <p:sp>
         <p:nvSpPr>
@@ -841,6 +862,13 @@
           </p:nvPr>
         </p:nvSpPr>
         <p:spPr/>
+        <p:txBody>
+          <a:bodyPr/>
+          <a:lstStyle/>
+          <a:p>
+            <a:endParaRPr lang="zh-TW" altLang="en-US"/>
+          </a:p>
+        </p:txBody>
       </p:sp>
       <p:sp>
         <p:nvSpPr>
@@ -937,6 +965,13 @@
           </p:nvPr>
         </p:nvSpPr>
         <p:spPr/>
+        <p:txBody>
+          <a:bodyPr/>
+          <a:lstStyle/>
+          <a:p>
+            <a:endParaRPr lang="zh-TW" altLang="en-US"/>
+          </a:p>
+        </p:txBody>
       </p:sp>
       <p:sp>
         <p:nvSpPr>
@@ -1033,6 +1068,13 @@
           </p:nvPr>
         </p:nvSpPr>
         <p:spPr/>
+        <p:txBody>
+          <a:bodyPr/>
+          <a:lstStyle/>
+          <a:p>
+            <a:endParaRPr lang="zh-TW" altLang="en-US"/>
+          </a:p>
+        </p:txBody>
       </p:sp>
       <p:sp>
         <p:nvSpPr>
@@ -1141,6 +1183,13 @@
           </p:nvPr>
         </p:nvSpPr>
         <p:spPr/>
+        <p:txBody>
+          <a:bodyPr/>
+          <a:lstStyle/>
+          <a:p>
+            <a:endParaRPr lang="zh-TW" altLang="en-US"/>
+          </a:p>
+        </p:txBody>
       </p:sp>
       <p:sp>
         <p:nvSpPr>
@@ -1249,6 +1298,13 @@
           </p:nvPr>
         </p:nvSpPr>
         <p:spPr/>
+        <p:txBody>
+          <a:bodyPr/>
+          <a:lstStyle/>
+          <a:p>
+            <a:endParaRPr lang="zh-TW" altLang="en-US"/>
+          </a:p>
+        </p:txBody>
       </p:sp>
       <p:sp>
         <p:nvSpPr>
@@ -1357,6 +1413,13 @@
           </p:nvPr>
         </p:nvSpPr>
         <p:spPr/>
+        <p:txBody>
+          <a:bodyPr/>
+          <a:lstStyle/>
+          <a:p>
+            <a:endParaRPr lang="zh-TW" altLang="en-US"/>
+          </a:p>
+        </p:txBody>
       </p:sp>
       <p:sp>
         <p:nvSpPr>
@@ -1465,6 +1528,13 @@
           </p:nvPr>
         </p:nvSpPr>
         <p:spPr/>
+        <p:txBody>
+          <a:bodyPr/>
+          <a:lstStyle/>
+          <a:p>
+            <a:endParaRPr lang="zh-TW" altLang="en-US"/>
+          </a:p>
+        </p:txBody>
       </p:sp>
       <p:sp>
         <p:nvSpPr>
@@ -1573,6 +1643,13 @@
           </p:nvPr>
         </p:nvSpPr>
         <p:spPr/>
+        <p:txBody>
+          <a:bodyPr/>
+          <a:lstStyle/>
+          <a:p>
+            <a:endParaRPr lang="zh-TW" altLang="en-US"/>
+          </a:p>
+        </p:txBody>
       </p:sp>
       <p:sp>
         <p:nvSpPr>
@@ -1681,6 +1758,13 @@
           </p:nvPr>
         </p:nvSpPr>
         <p:spPr/>
+        <p:txBody>
+          <a:bodyPr/>
+          <a:lstStyle/>
+          <a:p>
+            <a:endParaRPr lang="zh-TW" altLang="en-US"/>
+          </a:p>
+        </p:txBody>
       </p:sp>
       <p:sp>
         <p:nvSpPr>
@@ -2134,7 +2218,7 @@
             <a:fld id="{527CA299-82C8-4290-8115-6873732ACE52}" type="datetimeFigureOut">
               <a:rPr lang="zh-TW" altLang="en-US" smtClean="0"/>
               <a:pPr/>
-              <a:t>2024/11/3</a:t>
+              <a:t>2026/8/11</a:t>
             </a:fld>
             <a:endParaRPr lang="zh-TW" altLang="en-US"/>
           </a:p>
@@ -2301,7 +2385,7 @@
             <a:fld id="{527CA299-82C8-4290-8115-6873732ACE52}" type="datetimeFigureOut">
               <a:rPr lang="zh-TW" altLang="en-US" smtClean="0"/>
               <a:pPr/>
-              <a:t>2024/11/3</a:t>
+              <a:t>2026/8/11</a:t>
             </a:fld>
             <a:endParaRPr lang="zh-TW" altLang="en-US"/>
           </a:p>
@@ -2478,7 +2562,7 @@
             <a:fld id="{527CA299-82C8-4290-8115-6873732ACE52}" type="datetimeFigureOut">
               <a:rPr lang="zh-TW" altLang="en-US" smtClean="0"/>
               <a:pPr/>
-              <a:t>2024/11/3</a:t>
+              <a:t>2026/8/11</a:t>
             </a:fld>
             <a:endParaRPr lang="zh-TW" altLang="en-US"/>
           </a:p>
@@ -2649,7 +2733,7 @@
             <a:fld id="{527CA299-82C8-4290-8115-6873732ACE52}" type="datetimeFigureOut">
               <a:rPr lang="zh-TW" altLang="en-US" smtClean="0"/>
               <a:pPr/>
-              <a:t>2024/11/3</a:t>
+              <a:t>2026/8/11</a:t>
             </a:fld>
             <a:endParaRPr lang="zh-TW" altLang="en-US"/>
           </a:p>
@@ -3106,7 +3190,7 @@
             <a:fld id="{527CA299-82C8-4290-8115-6873732ACE52}" type="datetimeFigureOut">
               <a:rPr lang="zh-TW" altLang="en-US" smtClean="0"/>
               <a:pPr/>
-              <a:t>2024/11/3</a:t>
+              <a:t>2026/8/11</a:t>
             </a:fld>
             <a:endParaRPr lang="zh-TW" altLang="en-US"/>
           </a:p>
@@ -3372,7 +3456,7 @@
             <a:fld id="{527CA299-82C8-4290-8115-6873732ACE52}" type="datetimeFigureOut">
               <a:rPr lang="zh-TW" altLang="en-US" smtClean="0"/>
               <a:pPr/>
-              <a:t>2024/11/3</a:t>
+              <a:t>2026/8/11</a:t>
             </a:fld>
             <a:endParaRPr lang="zh-TW" altLang="en-US"/>
           </a:p>
@@ -3748,7 +3832,7 @@
             <a:fld id="{527CA299-82C8-4290-8115-6873732ACE52}" type="datetimeFigureOut">
               <a:rPr lang="zh-TW" altLang="en-US" smtClean="0"/>
               <a:pPr/>
-              <a:t>2024/11/3</a:t>
+              <a:t>2026/8/11</a:t>
             </a:fld>
             <a:endParaRPr lang="zh-TW" altLang="en-US"/>
           </a:p>
@@ -3872,7 +3956,7 @@
             <a:fld id="{527CA299-82C8-4290-8115-6873732ACE52}" type="datetimeFigureOut">
               <a:rPr lang="zh-TW" altLang="en-US" smtClean="0"/>
               <a:pPr/>
-              <a:t>2024/11/3</a:t>
+              <a:t>2026/8/11</a:t>
             </a:fld>
             <a:endParaRPr lang="zh-TW" altLang="en-US"/>
           </a:p>
@@ -3964,7 +4048,7 @@
             <a:fld id="{527CA299-82C8-4290-8115-6873732ACE52}" type="datetimeFigureOut">
               <a:rPr lang="zh-TW" altLang="en-US" smtClean="0"/>
               <a:pPr/>
-              <a:t>2024/11/3</a:t>
+              <a:t>2026/8/11</a:t>
             </a:fld>
             <a:endParaRPr lang="zh-TW" altLang="en-US"/>
           </a:p>
@@ -4215,7 +4299,7 @@
             <a:fld id="{527CA299-82C8-4290-8115-6873732ACE52}" type="datetimeFigureOut">
               <a:rPr lang="zh-TW" altLang="en-US" smtClean="0"/>
               <a:pPr/>
-              <a:t>2024/11/3</a:t>
+              <a:t>2026/8/11</a:t>
             </a:fld>
             <a:endParaRPr lang="zh-TW" altLang="en-US"/>
           </a:p>
@@ -4476,7 +4560,7 @@
             <a:fld id="{527CA299-82C8-4290-8115-6873732ACE52}" type="datetimeFigureOut">
               <a:rPr lang="zh-TW" altLang="en-US" smtClean="0"/>
               <a:pPr/>
-              <a:t>2024/11/3</a:t>
+              <a:t>2026/8/11</a:t>
             </a:fld>
             <a:endParaRPr lang="zh-TW" altLang="en-US"/>
           </a:p>
@@ -4882,7 +4966,7 @@
             <a:fld id="{527CA299-82C8-4290-8115-6873732ACE52}" type="datetimeFigureOut">
               <a:rPr lang="zh-TW" altLang="en-US" smtClean="0"/>
               <a:pPr/>
-              <a:t>2024/11/3</a:t>
+              <a:t>2026/8/11</a:t>
             </a:fld>
             <a:endParaRPr lang="zh-TW" altLang="en-US"/>
           </a:p>
@@ -5357,7 +5441,7 @@
             <a:pPr algn="r"/>
             <a:r>
               <a:rPr lang="en-US" altLang="zh-TW" sz="2400" dirty="0"/>
-              <a:t>2024/10/27</a:t>
+              <a:t>2026/8/10</a:t>
             </a:r>
             <a:endParaRPr lang="zh-TW" altLang="en-US" sz="2400" dirty="0"/>
           </a:p>
@@ -5432,36 +5516,6 @@
       </p:sp>
       <p:pic>
         <p:nvPicPr>
-          <p:cNvPr id="17" name="圖片 16">
-            <a:extLst>
-              <a:ext uri="{FF2B5EF4-FFF2-40B4-BE49-F238E27FC236}">
-                <a16:creationId xmlns:a16="http://schemas.microsoft.com/office/drawing/2014/main" id="{4A2EE1D5-2773-E487-598F-824929E76CB9}"/>
-              </a:ext>
-            </a:extLst>
-          </p:cNvPr>
-          <p:cNvPicPr>
-            <a:picLocks noChangeAspect="1"/>
-          </p:cNvPicPr>
-          <p:nvPr/>
-        </p:nvPicPr>
-        <p:blipFill>
-          <a:blip r:embed="rId2"/>
-          <a:stretch>
-            <a:fillRect/>
-          </a:stretch>
-        </p:blipFill>
-        <p:spPr>
-          <a:xfrm>
-            <a:off x="457200" y="1196752"/>
-            <a:ext cx="6666667" cy="3409524"/>
-          </a:xfrm>
-          <a:prstGeom prst="rect">
-            <a:avLst/>
-          </a:prstGeom>
-        </p:spPr>
-      </p:pic>
-      <p:pic>
-        <p:nvPicPr>
           <p:cNvPr id="20" name="圖片 19">
             <a:extLst>
               <a:ext uri="{FF2B5EF4-FFF2-40B4-BE49-F238E27FC236}">
@@ -5475,11 +5529,11 @@
           <p:nvPr/>
         </p:nvPicPr>
         <p:blipFill>
-          <a:blip r:embed="rId3">
+          <a:blip r:embed="rId2">
             <a:extLst>
               <a:ext uri="{BEBA8EAE-BF5A-486C-A8C5-ECC9F3942E4B}">
                 <a14:imgProps xmlns:a14="http://schemas.microsoft.com/office/drawing/2010/main">
-                  <a14:imgLayer r:embed="rId4">
+                  <a14:imgLayer r:embed="rId3">
                     <a14:imgEffect>
                       <a14:brightnessContrast bright="-20000"/>
                     </a14:imgEffect>
@@ -5502,6 +5556,1077 @@
           </a:prstGeom>
         </p:spPr>
       </p:pic>
+      <p:sp>
+        <p:nvSpPr>
+          <p:cNvPr id="3" name="文字方塊 2">
+            <a:extLst>
+              <a:ext uri="{FF2B5EF4-FFF2-40B4-BE49-F238E27FC236}">
+                <a16:creationId xmlns:a16="http://schemas.microsoft.com/office/drawing/2014/main" id="{843FFA9C-B361-256F-2A92-F6BE78B00135}"/>
+              </a:ext>
+            </a:extLst>
+          </p:cNvPr>
+          <p:cNvSpPr txBox="1"/>
+          <p:nvPr/>
+        </p:nvSpPr>
+        <p:spPr>
+          <a:xfrm>
+            <a:off x="457200" y="1196752"/>
+            <a:ext cx="6840760" cy="3600986"/>
+          </a:xfrm>
+          <a:prstGeom prst="rect">
+            <a:avLst/>
+          </a:prstGeom>
+          <a:noFill/>
+        </p:spPr>
+        <p:txBody>
+          <a:bodyPr wrap="square" rtlCol="0">
+            <a:spAutoFit/>
+          </a:bodyPr>
+          <a:lstStyle/>
+          <a:p>
+            <a:pPr>
+              <a:buNone/>
+            </a:pPr>
+            <a:r>
+              <a:rPr lang="en-US" altLang="zh-TW" sz="1200" dirty="0">
+                <a:solidFill>
+                  <a:srgbClr val="00FF80"/>
+                </a:solidFill>
+                <a:effectLst/>
+                <a:latin typeface="Courier New" panose="02070309020205020404" pitchFamily="49" charset="0"/>
+              </a:rPr>
+              <a:t>// Define two new put interfaces which are compatible with uvm_put_ports</a:t>
+            </a:r>
+          </a:p>
+          <a:p>
+            <a:pPr>
+              <a:buNone/>
+            </a:pPr>
+            <a:r>
+              <a:rPr lang="en-US" altLang="zh-TW" sz="1200" dirty="0">
+                <a:solidFill>
+                  <a:srgbClr val="00FF80"/>
+                </a:solidFill>
+                <a:effectLst/>
+                <a:latin typeface="Courier New" panose="02070309020205020404" pitchFamily="49" charset="0"/>
+              </a:rPr>
+              <a:t>// and uvm_put_exports.</a:t>
+            </a:r>
+          </a:p>
+          <a:p>
+            <a:pPr>
+              <a:buNone/>
+            </a:pPr>
+            <a:endParaRPr lang="en-US" altLang="zh-TW" sz="1200" dirty="0">
+              <a:solidFill>
+                <a:srgbClr val="00FF80"/>
+              </a:solidFill>
+              <a:effectLst/>
+              <a:latin typeface="Courier New" panose="02070309020205020404" pitchFamily="49" charset="0"/>
+            </a:endParaRPr>
+          </a:p>
+          <a:p>
+            <a:pPr>
+              <a:buNone/>
+            </a:pPr>
+            <a:r>
+              <a:rPr lang="en-US" altLang="zh-TW" sz="1200" dirty="0">
+                <a:solidFill>
+                  <a:srgbClr val="FFAA00"/>
+                </a:solidFill>
+                <a:effectLst/>
+                <a:latin typeface="Courier New" panose="02070309020205020404" pitchFamily="49" charset="0"/>
+              </a:rPr>
+              <a:t>`uvm_put_imp_decl(</a:t>
+            </a:r>
+            <a:r>
+              <a:rPr lang="en-US" altLang="zh-TW" sz="1200" dirty="0">
+                <a:solidFill>
+                  <a:srgbClr val="FFFFFF"/>
+                </a:solidFill>
+                <a:effectLst/>
+                <a:latin typeface="Courier New" panose="02070309020205020404" pitchFamily="49" charset="0"/>
+              </a:rPr>
+              <a:t>_1</a:t>
+            </a:r>
+            <a:r>
+              <a:rPr lang="en-US" altLang="zh-TW" sz="1200" dirty="0">
+                <a:solidFill>
+                  <a:srgbClr val="FFAA00"/>
+                </a:solidFill>
+                <a:effectLst/>
+                <a:latin typeface="Courier New" panose="02070309020205020404" pitchFamily="49" charset="0"/>
+              </a:rPr>
+              <a:t>)</a:t>
+            </a:r>
+            <a:endParaRPr lang="en-US" altLang="zh-TW" sz="1200" dirty="0">
+              <a:solidFill>
+                <a:srgbClr val="F8F8F8"/>
+              </a:solidFill>
+              <a:effectLst/>
+              <a:latin typeface="Courier New" panose="02070309020205020404" pitchFamily="49" charset="0"/>
+            </a:endParaRPr>
+          </a:p>
+          <a:p>
+            <a:pPr>
+              <a:buNone/>
+            </a:pPr>
+            <a:r>
+              <a:rPr lang="en-US" altLang="zh-TW" sz="1200" dirty="0">
+                <a:solidFill>
+                  <a:srgbClr val="FFAA00"/>
+                </a:solidFill>
+                <a:effectLst/>
+                <a:latin typeface="Courier New" panose="02070309020205020404" pitchFamily="49" charset="0"/>
+              </a:rPr>
+              <a:t>`uvm_put_imp_decl(</a:t>
+            </a:r>
+            <a:r>
+              <a:rPr lang="en-US" altLang="zh-TW" sz="1200" dirty="0">
+                <a:solidFill>
+                  <a:srgbClr val="FFFFFF"/>
+                </a:solidFill>
+                <a:effectLst/>
+                <a:latin typeface="Courier New" panose="02070309020205020404" pitchFamily="49" charset="0"/>
+              </a:rPr>
+              <a:t>_2</a:t>
+            </a:r>
+            <a:r>
+              <a:rPr lang="en-US" altLang="zh-TW" sz="1200" dirty="0">
+                <a:solidFill>
+                  <a:srgbClr val="FFAA00"/>
+                </a:solidFill>
+                <a:effectLst/>
+                <a:latin typeface="Courier New" panose="02070309020205020404" pitchFamily="49" charset="0"/>
+              </a:rPr>
+              <a:t>)</a:t>
+            </a:r>
+          </a:p>
+          <a:p>
+            <a:pPr>
+              <a:buNone/>
+            </a:pPr>
+            <a:endParaRPr lang="en-US" altLang="zh-TW" sz="1200" dirty="0">
+              <a:solidFill>
+                <a:srgbClr val="F8F8F8"/>
+              </a:solidFill>
+              <a:effectLst/>
+              <a:latin typeface="Courier New" panose="02070309020205020404" pitchFamily="49" charset="0"/>
+            </a:endParaRPr>
+          </a:p>
+          <a:p>
+            <a:pPr>
+              <a:buNone/>
+            </a:pPr>
+            <a:r>
+              <a:rPr lang="en-US" altLang="zh-TW" sz="1200" dirty="0">
+                <a:solidFill>
+                  <a:srgbClr val="F6F080"/>
+                </a:solidFill>
+                <a:effectLst/>
+                <a:latin typeface="Courier New" panose="02070309020205020404" pitchFamily="49" charset="0"/>
+              </a:rPr>
+              <a:t>class</a:t>
+            </a:r>
+            <a:r>
+              <a:rPr lang="en-US" altLang="zh-TW" sz="1200" dirty="0">
+                <a:solidFill>
+                  <a:srgbClr val="F8F8F8"/>
+                </a:solidFill>
+                <a:effectLst/>
+                <a:latin typeface="Courier New" panose="02070309020205020404" pitchFamily="49" charset="0"/>
+              </a:rPr>
+              <a:t> </a:t>
+            </a:r>
+            <a:r>
+              <a:rPr lang="en-US" altLang="zh-TW" sz="1200" dirty="0">
+                <a:solidFill>
+                  <a:srgbClr val="FFFFFF"/>
+                </a:solidFill>
+                <a:effectLst/>
+                <a:latin typeface="Courier New" panose="02070309020205020404" pitchFamily="49" charset="0"/>
+              </a:rPr>
+              <a:t>my_put_imp</a:t>
+            </a:r>
+            <a:r>
+              <a:rPr lang="en-US" altLang="zh-TW" sz="1200" dirty="0">
+                <a:solidFill>
+                  <a:srgbClr val="FFAA00"/>
+                </a:solidFill>
+                <a:effectLst/>
+                <a:latin typeface="Courier New" panose="02070309020205020404" pitchFamily="49" charset="0"/>
+              </a:rPr>
+              <a:t>#(</a:t>
+            </a:r>
+            <a:r>
+              <a:rPr lang="en-US" altLang="zh-TW" sz="1200" dirty="0">
+                <a:solidFill>
+                  <a:srgbClr val="F6F080"/>
+                </a:solidFill>
+                <a:effectLst/>
+                <a:latin typeface="Courier New" panose="02070309020205020404" pitchFamily="49" charset="0"/>
+              </a:rPr>
+              <a:t>type</a:t>
+            </a:r>
+            <a:r>
+              <a:rPr lang="en-US" altLang="zh-TW" sz="1200" dirty="0">
+                <a:solidFill>
+                  <a:srgbClr val="F8F8F8"/>
+                </a:solidFill>
+                <a:effectLst/>
+                <a:latin typeface="Courier New" panose="02070309020205020404" pitchFamily="49" charset="0"/>
+              </a:rPr>
+              <a:t> </a:t>
+            </a:r>
+            <a:r>
+              <a:rPr lang="en-US" altLang="zh-TW" sz="1200" dirty="0">
+                <a:solidFill>
+                  <a:srgbClr val="FFFFFF"/>
+                </a:solidFill>
+                <a:effectLst/>
+                <a:latin typeface="Courier New" panose="02070309020205020404" pitchFamily="49" charset="0"/>
+              </a:rPr>
+              <a:t>T</a:t>
+            </a:r>
+            <a:r>
+              <a:rPr lang="en-US" altLang="zh-TW" sz="1200" dirty="0">
+                <a:solidFill>
+                  <a:srgbClr val="FFAA00"/>
+                </a:solidFill>
+                <a:effectLst/>
+                <a:latin typeface="Courier New" panose="02070309020205020404" pitchFamily="49" charset="0"/>
+              </a:rPr>
+              <a:t>=</a:t>
+            </a:r>
+            <a:r>
+              <a:rPr lang="en-US" altLang="zh-TW" sz="1200" dirty="0">
+                <a:solidFill>
+                  <a:srgbClr val="F6F080"/>
+                </a:solidFill>
+                <a:effectLst/>
+                <a:latin typeface="Courier New" panose="02070309020205020404" pitchFamily="49" charset="0"/>
+              </a:rPr>
+              <a:t>int</a:t>
+            </a:r>
+            <a:r>
+              <a:rPr lang="en-US" altLang="zh-TW" sz="1200" dirty="0">
+                <a:solidFill>
+                  <a:srgbClr val="FFAA00"/>
+                </a:solidFill>
+                <a:effectLst/>
+                <a:latin typeface="Courier New" panose="02070309020205020404" pitchFamily="49" charset="0"/>
+              </a:rPr>
+              <a:t>)</a:t>
+            </a:r>
+            <a:r>
+              <a:rPr lang="en-US" altLang="zh-TW" sz="1200" dirty="0">
+                <a:solidFill>
+                  <a:srgbClr val="F8F8F8"/>
+                </a:solidFill>
+                <a:effectLst/>
+                <a:latin typeface="Courier New" panose="02070309020205020404" pitchFamily="49" charset="0"/>
+              </a:rPr>
+              <a:t> </a:t>
+            </a:r>
+            <a:r>
+              <a:rPr lang="en-US" altLang="zh-TW" sz="1200" dirty="0">
+                <a:solidFill>
+                  <a:srgbClr val="F6F080"/>
+                </a:solidFill>
+                <a:effectLst/>
+                <a:latin typeface="Courier New" panose="02070309020205020404" pitchFamily="49" charset="0"/>
+              </a:rPr>
+              <a:t>extends</a:t>
+            </a:r>
+            <a:r>
+              <a:rPr lang="en-US" altLang="zh-TW" sz="1200" dirty="0">
+                <a:solidFill>
+                  <a:srgbClr val="F8F8F8"/>
+                </a:solidFill>
+                <a:effectLst/>
+                <a:latin typeface="Courier New" panose="02070309020205020404" pitchFamily="49" charset="0"/>
+              </a:rPr>
+              <a:t> </a:t>
+            </a:r>
+            <a:r>
+              <a:rPr lang="en-US" altLang="zh-TW" sz="1200" dirty="0">
+                <a:solidFill>
+                  <a:srgbClr val="FFFFFF"/>
+                </a:solidFill>
+                <a:effectLst/>
+                <a:latin typeface="Courier New" panose="02070309020205020404" pitchFamily="49" charset="0"/>
+              </a:rPr>
+              <a:t>uvm_component</a:t>
+            </a:r>
+            <a:r>
+              <a:rPr lang="en-US" altLang="zh-TW" sz="1200" dirty="0">
+                <a:solidFill>
+                  <a:srgbClr val="FFAA00"/>
+                </a:solidFill>
+                <a:effectLst/>
+                <a:latin typeface="Courier New" panose="02070309020205020404" pitchFamily="49" charset="0"/>
+              </a:rPr>
+              <a:t>;</a:t>
+            </a:r>
+            <a:endParaRPr lang="en-US" altLang="zh-TW" sz="1200" dirty="0">
+              <a:solidFill>
+                <a:srgbClr val="F8F8F8"/>
+              </a:solidFill>
+              <a:effectLst/>
+              <a:latin typeface="Courier New" panose="02070309020205020404" pitchFamily="49" charset="0"/>
+            </a:endParaRPr>
+          </a:p>
+          <a:p>
+            <a:pPr>
+              <a:buNone/>
+            </a:pPr>
+            <a:r>
+              <a:rPr lang="en-US" altLang="zh-TW" sz="1200" dirty="0">
+                <a:solidFill>
+                  <a:srgbClr val="F8F8F8"/>
+                </a:solidFill>
+                <a:effectLst/>
+                <a:latin typeface="Courier New" panose="02070309020205020404" pitchFamily="49" charset="0"/>
+              </a:rPr>
+              <a:t>  </a:t>
+            </a:r>
+            <a:r>
+              <a:rPr lang="en-US" altLang="zh-TW" sz="1200" dirty="0">
+                <a:solidFill>
+                  <a:srgbClr val="FFFFFF"/>
+                </a:solidFill>
+                <a:effectLst/>
+                <a:latin typeface="Courier New" panose="02070309020205020404" pitchFamily="49" charset="0"/>
+              </a:rPr>
+              <a:t>uvm_put_imp_1</a:t>
+            </a:r>
+            <a:r>
+              <a:rPr lang="en-US" altLang="zh-TW" sz="1200" dirty="0">
+                <a:solidFill>
+                  <a:srgbClr val="FFAA00"/>
+                </a:solidFill>
+                <a:effectLst/>
+                <a:latin typeface="Courier New" panose="02070309020205020404" pitchFamily="49" charset="0"/>
+              </a:rPr>
+              <a:t>#(</a:t>
+            </a:r>
+            <a:r>
+              <a:rPr lang="en-US" altLang="zh-TW" sz="1200" dirty="0">
+                <a:solidFill>
+                  <a:srgbClr val="FFFFFF"/>
+                </a:solidFill>
+                <a:effectLst/>
+                <a:latin typeface="Courier New" panose="02070309020205020404" pitchFamily="49" charset="0"/>
+              </a:rPr>
+              <a:t>T</a:t>
+            </a:r>
+            <a:r>
+              <a:rPr lang="en-US" altLang="zh-TW" sz="1200" dirty="0">
+                <a:solidFill>
+                  <a:srgbClr val="FFAA00"/>
+                </a:solidFill>
+                <a:effectLst/>
+                <a:latin typeface="Courier New" panose="02070309020205020404" pitchFamily="49" charset="0"/>
+              </a:rPr>
+              <a:t>,</a:t>
+            </a:r>
+            <a:r>
+              <a:rPr lang="en-US" altLang="zh-TW" sz="1200" dirty="0">
+                <a:solidFill>
+                  <a:srgbClr val="F8F8F8"/>
+                </a:solidFill>
+                <a:effectLst/>
+                <a:latin typeface="Courier New" panose="02070309020205020404" pitchFamily="49" charset="0"/>
+              </a:rPr>
+              <a:t> </a:t>
+            </a:r>
+            <a:r>
+              <a:rPr lang="en-US" altLang="zh-TW" sz="1200" dirty="0">
+                <a:solidFill>
+                  <a:srgbClr val="FFFFFF"/>
+                </a:solidFill>
+                <a:effectLst/>
+                <a:latin typeface="Courier New" panose="02070309020205020404" pitchFamily="49" charset="0"/>
+              </a:rPr>
+              <a:t>my_put_imp</a:t>
+            </a:r>
+            <a:r>
+              <a:rPr lang="en-US" altLang="zh-TW" sz="1200" dirty="0">
+                <a:solidFill>
+                  <a:srgbClr val="FFAA00"/>
+                </a:solidFill>
+                <a:effectLst/>
+                <a:latin typeface="Courier New" panose="02070309020205020404" pitchFamily="49" charset="0"/>
+              </a:rPr>
+              <a:t>#(</a:t>
+            </a:r>
+            <a:r>
+              <a:rPr lang="en-US" altLang="zh-TW" sz="1200" dirty="0">
+                <a:solidFill>
+                  <a:srgbClr val="FFFFFF"/>
+                </a:solidFill>
+                <a:effectLst/>
+                <a:latin typeface="Courier New" panose="02070309020205020404" pitchFamily="49" charset="0"/>
+              </a:rPr>
+              <a:t>T</a:t>
+            </a:r>
+            <a:r>
+              <a:rPr lang="en-US" altLang="zh-TW" sz="1200" dirty="0">
+                <a:solidFill>
+                  <a:srgbClr val="FFAA00"/>
+                </a:solidFill>
+                <a:effectLst/>
+                <a:latin typeface="Courier New" panose="02070309020205020404" pitchFamily="49" charset="0"/>
+              </a:rPr>
+              <a:t>))</a:t>
+            </a:r>
+            <a:r>
+              <a:rPr lang="en-US" altLang="zh-TW" sz="1200" dirty="0">
+                <a:solidFill>
+                  <a:srgbClr val="F8F8F8"/>
+                </a:solidFill>
+                <a:effectLst/>
+                <a:latin typeface="Courier New" panose="02070309020205020404" pitchFamily="49" charset="0"/>
+              </a:rPr>
+              <a:t> p1_</a:t>
+            </a:r>
+            <a:r>
+              <a:rPr lang="en-US" altLang="zh-TW" sz="1200" dirty="0">
+                <a:solidFill>
+                  <a:srgbClr val="FFFFFF"/>
+                </a:solidFill>
+                <a:effectLst/>
+                <a:latin typeface="Courier New" panose="02070309020205020404" pitchFamily="49" charset="0"/>
+              </a:rPr>
+              <a:t>put_export</a:t>
+            </a:r>
+            <a:r>
+              <a:rPr lang="en-US" altLang="zh-TW" sz="1200" dirty="0">
+                <a:solidFill>
+                  <a:srgbClr val="FFAA00"/>
+                </a:solidFill>
+                <a:effectLst/>
+                <a:latin typeface="Courier New" panose="02070309020205020404" pitchFamily="49" charset="0"/>
+              </a:rPr>
+              <a:t>;</a:t>
+            </a:r>
+            <a:endParaRPr lang="en-US" altLang="zh-TW" sz="1200" dirty="0">
+              <a:solidFill>
+                <a:srgbClr val="F8F8F8"/>
+              </a:solidFill>
+              <a:effectLst/>
+              <a:latin typeface="Courier New" panose="02070309020205020404" pitchFamily="49" charset="0"/>
+            </a:endParaRPr>
+          </a:p>
+          <a:p>
+            <a:pPr>
+              <a:buNone/>
+            </a:pPr>
+            <a:r>
+              <a:rPr lang="en-US" altLang="zh-TW" sz="1200" dirty="0">
+                <a:solidFill>
+                  <a:srgbClr val="F8F8F8"/>
+                </a:solidFill>
+                <a:effectLst/>
+                <a:latin typeface="Courier New" panose="02070309020205020404" pitchFamily="49" charset="0"/>
+              </a:rPr>
+              <a:t>  </a:t>
+            </a:r>
+            <a:r>
+              <a:rPr lang="en-US" altLang="zh-TW" sz="1200" dirty="0">
+                <a:solidFill>
+                  <a:srgbClr val="FFFFFF"/>
+                </a:solidFill>
+                <a:effectLst/>
+                <a:latin typeface="Courier New" panose="02070309020205020404" pitchFamily="49" charset="0"/>
+              </a:rPr>
+              <a:t>uvm_put_imp_2</a:t>
+            </a:r>
+            <a:r>
+              <a:rPr lang="en-US" altLang="zh-TW" sz="1200" dirty="0">
+                <a:solidFill>
+                  <a:srgbClr val="FFAA00"/>
+                </a:solidFill>
+                <a:effectLst/>
+                <a:latin typeface="Courier New" panose="02070309020205020404" pitchFamily="49" charset="0"/>
+              </a:rPr>
+              <a:t>#(</a:t>
+            </a:r>
+            <a:r>
+              <a:rPr lang="en-US" altLang="zh-TW" sz="1200" dirty="0">
+                <a:solidFill>
+                  <a:srgbClr val="FFFFFF"/>
+                </a:solidFill>
+                <a:effectLst/>
+                <a:latin typeface="Courier New" panose="02070309020205020404" pitchFamily="49" charset="0"/>
+              </a:rPr>
+              <a:t>T</a:t>
+            </a:r>
+            <a:r>
+              <a:rPr lang="en-US" altLang="zh-TW" sz="1200" dirty="0">
+                <a:solidFill>
+                  <a:srgbClr val="FFAA00"/>
+                </a:solidFill>
+                <a:effectLst/>
+                <a:latin typeface="Courier New" panose="02070309020205020404" pitchFamily="49" charset="0"/>
+              </a:rPr>
+              <a:t>,</a:t>
+            </a:r>
+            <a:r>
+              <a:rPr lang="en-US" altLang="zh-TW" sz="1200" dirty="0">
+                <a:solidFill>
+                  <a:srgbClr val="F8F8F8"/>
+                </a:solidFill>
+                <a:effectLst/>
+                <a:latin typeface="Courier New" panose="02070309020205020404" pitchFamily="49" charset="0"/>
+              </a:rPr>
+              <a:t> </a:t>
+            </a:r>
+            <a:r>
+              <a:rPr lang="en-US" altLang="zh-TW" sz="1200" dirty="0">
+                <a:solidFill>
+                  <a:srgbClr val="FFFFFF"/>
+                </a:solidFill>
+                <a:effectLst/>
+                <a:latin typeface="Courier New" panose="02070309020205020404" pitchFamily="49" charset="0"/>
+              </a:rPr>
+              <a:t>my_put_imp</a:t>
+            </a:r>
+            <a:r>
+              <a:rPr lang="en-US" altLang="zh-TW" sz="1200" dirty="0">
+                <a:solidFill>
+                  <a:srgbClr val="FFAA00"/>
+                </a:solidFill>
+                <a:effectLst/>
+                <a:latin typeface="Courier New" panose="02070309020205020404" pitchFamily="49" charset="0"/>
+              </a:rPr>
+              <a:t>#(</a:t>
+            </a:r>
+            <a:r>
+              <a:rPr lang="en-US" altLang="zh-TW" sz="1200" dirty="0">
+                <a:solidFill>
+                  <a:srgbClr val="FFFFFF"/>
+                </a:solidFill>
+                <a:effectLst/>
+                <a:latin typeface="Courier New" panose="02070309020205020404" pitchFamily="49" charset="0"/>
+              </a:rPr>
+              <a:t>T</a:t>
+            </a:r>
+            <a:r>
+              <a:rPr lang="en-US" altLang="zh-TW" sz="1200" dirty="0">
+                <a:solidFill>
+                  <a:srgbClr val="FFAA00"/>
+                </a:solidFill>
+                <a:effectLst/>
+                <a:latin typeface="Courier New" panose="02070309020205020404" pitchFamily="49" charset="0"/>
+              </a:rPr>
+              <a:t>))</a:t>
+            </a:r>
+            <a:r>
+              <a:rPr lang="en-US" altLang="zh-TW" sz="1200" dirty="0">
+                <a:solidFill>
+                  <a:srgbClr val="F8F8F8"/>
+                </a:solidFill>
+                <a:effectLst/>
+                <a:latin typeface="Courier New" panose="02070309020205020404" pitchFamily="49" charset="0"/>
+              </a:rPr>
+              <a:t> p2_</a:t>
+            </a:r>
+            <a:r>
+              <a:rPr lang="en-US" altLang="zh-TW" sz="1200" dirty="0">
+                <a:solidFill>
+                  <a:srgbClr val="FFFFFF"/>
+                </a:solidFill>
+                <a:effectLst/>
+                <a:latin typeface="Courier New" panose="02070309020205020404" pitchFamily="49" charset="0"/>
+              </a:rPr>
+              <a:t>put_export</a:t>
+            </a:r>
+            <a:r>
+              <a:rPr lang="en-US" altLang="zh-TW" sz="1200" dirty="0">
+                <a:solidFill>
+                  <a:srgbClr val="FFAA00"/>
+                </a:solidFill>
+                <a:effectLst/>
+                <a:latin typeface="Courier New" panose="02070309020205020404" pitchFamily="49" charset="0"/>
+              </a:rPr>
+              <a:t>;</a:t>
+            </a:r>
+            <a:endParaRPr lang="en-US" altLang="zh-TW" sz="1200" dirty="0">
+              <a:solidFill>
+                <a:srgbClr val="F8F8F8"/>
+              </a:solidFill>
+              <a:effectLst/>
+              <a:latin typeface="Courier New" panose="02070309020205020404" pitchFamily="49" charset="0"/>
+            </a:endParaRPr>
+          </a:p>
+          <a:p>
+            <a:pPr>
+              <a:buNone/>
+            </a:pPr>
+            <a:r>
+              <a:rPr lang="en-US" altLang="zh-TW" sz="1200" dirty="0">
+                <a:solidFill>
+                  <a:srgbClr val="F8F8F8"/>
+                </a:solidFill>
+                <a:effectLst/>
+                <a:latin typeface="Courier New" panose="02070309020205020404" pitchFamily="49" charset="0"/>
+              </a:rPr>
+              <a:t>  </a:t>
+            </a:r>
+            <a:r>
+              <a:rPr lang="en-US" altLang="zh-TW" sz="1200" dirty="0">
+                <a:solidFill>
+                  <a:srgbClr val="00FF80"/>
+                </a:solidFill>
+                <a:effectLst/>
+                <a:latin typeface="Courier New" panose="02070309020205020404" pitchFamily="49" charset="0"/>
+              </a:rPr>
+              <a:t>// ...</a:t>
+            </a:r>
+          </a:p>
+          <a:p>
+            <a:pPr>
+              <a:buNone/>
+            </a:pPr>
+            <a:endParaRPr lang="en-US" altLang="zh-TW" sz="1200" dirty="0">
+              <a:solidFill>
+                <a:srgbClr val="00FF80"/>
+              </a:solidFill>
+              <a:effectLst/>
+              <a:latin typeface="Courier New" panose="02070309020205020404" pitchFamily="49" charset="0"/>
+            </a:endParaRPr>
+          </a:p>
+          <a:p>
+            <a:pPr>
+              <a:buNone/>
+            </a:pPr>
+            <a:r>
+              <a:rPr lang="en-US" altLang="zh-TW" sz="1200" dirty="0">
+                <a:solidFill>
+                  <a:srgbClr val="F8F8F8"/>
+                </a:solidFill>
+                <a:effectLst/>
+                <a:latin typeface="Courier New" panose="02070309020205020404" pitchFamily="49" charset="0"/>
+              </a:rPr>
+              <a:t>  </a:t>
+            </a:r>
+            <a:r>
+              <a:rPr lang="en-US" altLang="zh-TW" sz="1200" dirty="0">
+                <a:solidFill>
+                  <a:srgbClr val="F6F080"/>
+                </a:solidFill>
+                <a:effectLst/>
+                <a:latin typeface="Courier New" panose="02070309020205020404" pitchFamily="49" charset="0"/>
+              </a:rPr>
+              <a:t>virtual</a:t>
+            </a:r>
+            <a:r>
+              <a:rPr lang="en-US" altLang="zh-TW" sz="1200" dirty="0">
+                <a:solidFill>
+                  <a:srgbClr val="F8F8F8"/>
+                </a:solidFill>
+                <a:effectLst/>
+                <a:latin typeface="Courier New" panose="02070309020205020404" pitchFamily="49" charset="0"/>
+              </a:rPr>
+              <a:t> </a:t>
+            </a:r>
+            <a:r>
+              <a:rPr lang="en-US" altLang="zh-TW" sz="1200" dirty="0">
+                <a:solidFill>
+                  <a:srgbClr val="F6F080"/>
+                </a:solidFill>
+                <a:effectLst/>
+                <a:latin typeface="Courier New" panose="02070309020205020404" pitchFamily="49" charset="0"/>
+              </a:rPr>
+              <a:t>task</a:t>
+            </a:r>
+            <a:r>
+              <a:rPr lang="en-US" altLang="zh-TW" sz="1200" dirty="0">
+                <a:solidFill>
+                  <a:srgbClr val="F8F8F8"/>
+                </a:solidFill>
+                <a:effectLst/>
+                <a:latin typeface="Courier New" panose="02070309020205020404" pitchFamily="49" charset="0"/>
+              </a:rPr>
+              <a:t> </a:t>
+            </a:r>
+            <a:r>
+              <a:rPr lang="en-US" altLang="zh-TW" sz="1200" dirty="0">
+                <a:solidFill>
+                  <a:srgbClr val="FFFFFF"/>
+                </a:solidFill>
+                <a:effectLst/>
+                <a:latin typeface="Courier New" panose="02070309020205020404" pitchFamily="49" charset="0"/>
+              </a:rPr>
+              <a:t>put_l</a:t>
+            </a:r>
+            <a:r>
+              <a:rPr lang="en-US" altLang="zh-TW" sz="1200" dirty="0">
+                <a:solidFill>
+                  <a:srgbClr val="F8F8F8"/>
+                </a:solidFill>
+                <a:effectLst/>
+                <a:latin typeface="Courier New" panose="02070309020205020404" pitchFamily="49" charset="0"/>
+              </a:rPr>
+              <a:t> </a:t>
+            </a:r>
+            <a:r>
+              <a:rPr lang="en-US" altLang="zh-TW" sz="1200" dirty="0">
+                <a:solidFill>
+                  <a:srgbClr val="FFAA00"/>
+                </a:solidFill>
+                <a:effectLst/>
+                <a:latin typeface="Courier New" panose="02070309020205020404" pitchFamily="49" charset="0"/>
+              </a:rPr>
+              <a:t>(</a:t>
+            </a:r>
+            <a:r>
+              <a:rPr lang="en-US" altLang="zh-TW" sz="1200" dirty="0">
+                <a:solidFill>
+                  <a:srgbClr val="F6F080"/>
+                </a:solidFill>
+                <a:effectLst/>
+                <a:latin typeface="Courier New" panose="02070309020205020404" pitchFamily="49" charset="0"/>
+              </a:rPr>
+              <a:t>input</a:t>
+            </a:r>
+            <a:r>
+              <a:rPr lang="en-US" altLang="zh-TW" sz="1200" dirty="0">
+                <a:solidFill>
+                  <a:srgbClr val="F8F8F8"/>
+                </a:solidFill>
+                <a:effectLst/>
+                <a:latin typeface="Courier New" panose="02070309020205020404" pitchFamily="49" charset="0"/>
+              </a:rPr>
+              <a:t> </a:t>
+            </a:r>
+            <a:r>
+              <a:rPr lang="en-US" altLang="zh-TW" sz="1200" dirty="0">
+                <a:solidFill>
+                  <a:srgbClr val="FFFFFF"/>
+                </a:solidFill>
+                <a:effectLst/>
+                <a:latin typeface="Courier New" panose="02070309020205020404" pitchFamily="49" charset="0"/>
+              </a:rPr>
+              <a:t>T</a:t>
+            </a:r>
+            <a:r>
+              <a:rPr lang="en-US" altLang="zh-TW" sz="1200" dirty="0">
+                <a:solidFill>
+                  <a:srgbClr val="F8F8F8"/>
+                </a:solidFill>
+                <a:effectLst/>
+                <a:latin typeface="Courier New" panose="02070309020205020404" pitchFamily="49" charset="0"/>
+              </a:rPr>
+              <a:t> </a:t>
+            </a:r>
+            <a:r>
+              <a:rPr lang="en-US" altLang="zh-TW" sz="1200" dirty="0">
+                <a:solidFill>
+                  <a:srgbClr val="FFFFFF"/>
+                </a:solidFill>
+                <a:effectLst/>
+                <a:latin typeface="Courier New" panose="02070309020205020404" pitchFamily="49" charset="0"/>
+              </a:rPr>
+              <a:t>t</a:t>
+            </a:r>
+            <a:r>
+              <a:rPr lang="en-US" altLang="zh-TW" sz="1200" dirty="0">
+                <a:solidFill>
+                  <a:srgbClr val="FFAA00"/>
+                </a:solidFill>
+                <a:effectLst/>
+                <a:latin typeface="Courier New" panose="02070309020205020404" pitchFamily="49" charset="0"/>
+              </a:rPr>
+              <a:t>);</a:t>
+            </a:r>
+            <a:endParaRPr lang="en-US" altLang="zh-TW" sz="1200" dirty="0">
+              <a:solidFill>
+                <a:srgbClr val="F8F8F8"/>
+              </a:solidFill>
+              <a:effectLst/>
+              <a:latin typeface="Courier New" panose="02070309020205020404" pitchFamily="49" charset="0"/>
+            </a:endParaRPr>
+          </a:p>
+          <a:p>
+            <a:pPr>
+              <a:buNone/>
+            </a:pPr>
+            <a:r>
+              <a:rPr lang="en-US" altLang="zh-TW" sz="1200" dirty="0">
+                <a:solidFill>
+                  <a:srgbClr val="F8F8F8"/>
+                </a:solidFill>
+                <a:effectLst/>
+                <a:latin typeface="Courier New" panose="02070309020205020404" pitchFamily="49" charset="0"/>
+              </a:rPr>
+              <a:t>    </a:t>
+            </a:r>
+            <a:r>
+              <a:rPr lang="en-US" altLang="zh-TW" sz="1200" dirty="0">
+                <a:solidFill>
+                  <a:srgbClr val="00FF80"/>
+                </a:solidFill>
+                <a:effectLst/>
+                <a:latin typeface="Courier New" panose="02070309020205020404" pitchFamily="49" charset="0"/>
+              </a:rPr>
+              <a:t>// puts coming into put_impl</a:t>
+            </a:r>
+          </a:p>
+          <a:p>
+            <a:pPr>
+              <a:buNone/>
+            </a:pPr>
+            <a:r>
+              <a:rPr lang="en-US" altLang="zh-TW" sz="1200" dirty="0">
+                <a:solidFill>
+                  <a:srgbClr val="F8F8F8"/>
+                </a:solidFill>
+                <a:effectLst/>
+                <a:latin typeface="Courier New" panose="02070309020205020404" pitchFamily="49" charset="0"/>
+              </a:rPr>
+              <a:t>  </a:t>
+            </a:r>
+            <a:r>
+              <a:rPr lang="en-US" altLang="zh-TW" sz="1200" dirty="0">
+                <a:solidFill>
+                  <a:srgbClr val="F6F080"/>
+                </a:solidFill>
+                <a:effectLst/>
+                <a:latin typeface="Courier New" panose="02070309020205020404" pitchFamily="49" charset="0"/>
+              </a:rPr>
+              <a:t>endtask</a:t>
+            </a:r>
+          </a:p>
+          <a:p>
+            <a:pPr>
+              <a:buNone/>
+            </a:pPr>
+            <a:endParaRPr lang="en-US" altLang="zh-TW" sz="1200" dirty="0">
+              <a:solidFill>
+                <a:srgbClr val="F8F8F8"/>
+              </a:solidFill>
+              <a:effectLst/>
+              <a:latin typeface="Courier New" panose="02070309020205020404" pitchFamily="49" charset="0"/>
+            </a:endParaRPr>
+          </a:p>
+          <a:p>
+            <a:pPr>
+              <a:buNone/>
+            </a:pPr>
+            <a:r>
+              <a:rPr lang="en-US" altLang="zh-TW" sz="1200" dirty="0">
+                <a:solidFill>
+                  <a:srgbClr val="F8F8F8"/>
+                </a:solidFill>
+                <a:effectLst/>
+                <a:latin typeface="Courier New" panose="02070309020205020404" pitchFamily="49" charset="0"/>
+              </a:rPr>
+              <a:t>  </a:t>
+            </a:r>
+            <a:r>
+              <a:rPr lang="en-US" altLang="zh-TW" sz="1200" dirty="0">
+                <a:solidFill>
+                  <a:srgbClr val="F6F080"/>
+                </a:solidFill>
+                <a:effectLst/>
+                <a:latin typeface="Courier New" panose="02070309020205020404" pitchFamily="49" charset="0"/>
+              </a:rPr>
+              <a:t>virtual</a:t>
+            </a:r>
+            <a:r>
+              <a:rPr lang="en-US" altLang="zh-TW" sz="1200" dirty="0">
+                <a:solidFill>
+                  <a:srgbClr val="F8F8F8"/>
+                </a:solidFill>
+                <a:effectLst/>
+                <a:latin typeface="Courier New" panose="02070309020205020404" pitchFamily="49" charset="0"/>
+              </a:rPr>
+              <a:t> </a:t>
+            </a:r>
+            <a:r>
+              <a:rPr lang="en-US" altLang="zh-TW" sz="1200" dirty="0">
+                <a:solidFill>
+                  <a:srgbClr val="F6F080"/>
+                </a:solidFill>
+                <a:effectLst/>
+                <a:latin typeface="Courier New" panose="02070309020205020404" pitchFamily="49" charset="0"/>
+              </a:rPr>
+              <a:t>task</a:t>
+            </a:r>
+            <a:r>
+              <a:rPr lang="en-US" altLang="zh-TW" sz="1200" dirty="0">
+                <a:solidFill>
+                  <a:srgbClr val="F8F8F8"/>
+                </a:solidFill>
+                <a:effectLst/>
+                <a:latin typeface="Courier New" panose="02070309020205020404" pitchFamily="49" charset="0"/>
+              </a:rPr>
+              <a:t> </a:t>
+            </a:r>
+            <a:r>
+              <a:rPr lang="en-US" altLang="zh-TW" sz="1200" dirty="0">
+                <a:solidFill>
+                  <a:srgbClr val="FFFFFF"/>
+                </a:solidFill>
+                <a:effectLst/>
+                <a:latin typeface="Courier New" panose="02070309020205020404" pitchFamily="49" charset="0"/>
+              </a:rPr>
+              <a:t>put_2</a:t>
+            </a:r>
+            <a:r>
+              <a:rPr lang="en-US" altLang="zh-TW" sz="1200" dirty="0">
+                <a:solidFill>
+                  <a:srgbClr val="FFAA00"/>
+                </a:solidFill>
+                <a:effectLst/>
+                <a:latin typeface="Courier New" panose="02070309020205020404" pitchFamily="49" charset="0"/>
+              </a:rPr>
+              <a:t>(</a:t>
+            </a:r>
+            <a:r>
+              <a:rPr lang="en-US" altLang="zh-TW" sz="1200" dirty="0">
+                <a:solidFill>
+                  <a:srgbClr val="F6F080"/>
+                </a:solidFill>
+                <a:effectLst/>
+                <a:latin typeface="Courier New" panose="02070309020205020404" pitchFamily="49" charset="0"/>
+              </a:rPr>
+              <a:t>input</a:t>
+            </a:r>
+            <a:r>
+              <a:rPr lang="en-US" altLang="zh-TW" sz="1200" dirty="0">
+                <a:solidFill>
+                  <a:srgbClr val="F8F8F8"/>
+                </a:solidFill>
+                <a:effectLst/>
+                <a:latin typeface="Courier New" panose="02070309020205020404" pitchFamily="49" charset="0"/>
+              </a:rPr>
+              <a:t> </a:t>
+            </a:r>
+            <a:r>
+              <a:rPr lang="en-US" altLang="zh-TW" sz="1200" dirty="0">
+                <a:solidFill>
+                  <a:srgbClr val="FFFFFF"/>
+                </a:solidFill>
+                <a:effectLst/>
+                <a:latin typeface="Courier New" panose="02070309020205020404" pitchFamily="49" charset="0"/>
+              </a:rPr>
+              <a:t>T</a:t>
+            </a:r>
+            <a:r>
+              <a:rPr lang="en-US" altLang="zh-TW" sz="1200" dirty="0">
+                <a:solidFill>
+                  <a:srgbClr val="F8F8F8"/>
+                </a:solidFill>
+                <a:effectLst/>
+                <a:latin typeface="Courier New" panose="02070309020205020404" pitchFamily="49" charset="0"/>
+              </a:rPr>
+              <a:t> </a:t>
+            </a:r>
+            <a:r>
+              <a:rPr lang="en-US" altLang="zh-TW" sz="1200" dirty="0">
+                <a:solidFill>
+                  <a:srgbClr val="FFFFFF"/>
+                </a:solidFill>
+                <a:effectLst/>
+                <a:latin typeface="Courier New" panose="02070309020205020404" pitchFamily="49" charset="0"/>
+              </a:rPr>
+              <a:t>t</a:t>
+            </a:r>
+            <a:r>
+              <a:rPr lang="en-US" altLang="zh-TW" sz="1200" dirty="0">
+                <a:solidFill>
+                  <a:srgbClr val="FFAA00"/>
+                </a:solidFill>
+                <a:effectLst/>
+                <a:latin typeface="Courier New" panose="02070309020205020404" pitchFamily="49" charset="0"/>
+              </a:rPr>
+              <a:t>);</a:t>
+            </a:r>
+            <a:endParaRPr lang="en-US" altLang="zh-TW" sz="1200" dirty="0">
+              <a:solidFill>
+                <a:srgbClr val="F8F8F8"/>
+              </a:solidFill>
+              <a:effectLst/>
+              <a:latin typeface="Courier New" panose="02070309020205020404" pitchFamily="49" charset="0"/>
+            </a:endParaRPr>
+          </a:p>
+          <a:p>
+            <a:pPr>
+              <a:buNone/>
+            </a:pPr>
+            <a:r>
+              <a:rPr lang="en-US" altLang="zh-TW" sz="1200" dirty="0">
+                <a:solidFill>
+                  <a:srgbClr val="F8F8F8"/>
+                </a:solidFill>
+                <a:effectLst/>
+                <a:latin typeface="Courier New" panose="02070309020205020404" pitchFamily="49" charset="0"/>
+              </a:rPr>
+              <a:t>    </a:t>
+            </a:r>
+            <a:r>
+              <a:rPr lang="en-US" altLang="zh-TW" sz="1200" dirty="0">
+                <a:solidFill>
+                  <a:srgbClr val="00FF80"/>
+                </a:solidFill>
+                <a:effectLst/>
+                <a:latin typeface="Courier New" panose="02070309020205020404" pitchFamily="49" charset="0"/>
+              </a:rPr>
+              <a:t>// puts coming into put_imp2</a:t>
+            </a:r>
+          </a:p>
+          <a:p>
+            <a:pPr>
+              <a:buNone/>
+            </a:pPr>
+            <a:r>
+              <a:rPr lang="en-US" altLang="zh-TW" sz="1200" dirty="0">
+                <a:solidFill>
+                  <a:srgbClr val="F8F8F8"/>
+                </a:solidFill>
+                <a:effectLst/>
+                <a:latin typeface="Courier New" panose="02070309020205020404" pitchFamily="49" charset="0"/>
+              </a:rPr>
+              <a:t>  </a:t>
+            </a:r>
+            <a:r>
+              <a:rPr lang="en-US" altLang="zh-TW" sz="1200" dirty="0">
+                <a:solidFill>
+                  <a:srgbClr val="F6F080"/>
+                </a:solidFill>
+                <a:effectLst/>
+                <a:latin typeface="Courier New" panose="02070309020205020404" pitchFamily="49" charset="0"/>
+              </a:rPr>
+              <a:t>endtask</a:t>
+            </a:r>
+            <a:endParaRPr lang="en-US" altLang="zh-TW" sz="1200" dirty="0">
+              <a:solidFill>
+                <a:srgbClr val="F8F8F8"/>
+              </a:solidFill>
+              <a:effectLst/>
+              <a:latin typeface="Courier New" panose="02070309020205020404" pitchFamily="49" charset="0"/>
+            </a:endParaRPr>
+          </a:p>
+          <a:p>
+            <a:pPr>
+              <a:buNone/>
+            </a:pPr>
+            <a:r>
+              <a:rPr lang="en-US" altLang="zh-TW" sz="1200" dirty="0">
+                <a:solidFill>
+                  <a:srgbClr val="F6F080"/>
+                </a:solidFill>
+                <a:effectLst/>
+                <a:latin typeface="Courier New" panose="02070309020205020404" pitchFamily="49" charset="0"/>
+              </a:rPr>
+              <a:t>endclass</a:t>
+            </a:r>
+          </a:p>
+        </p:txBody>
+      </p:sp>
     </p:spTree>
     <p:extLst>
       <p:ext uri="{BB962C8B-B14F-4D97-AF65-F5344CB8AC3E}">
@@ -5574,36 +6699,1833 @@
           </a:p>
         </p:txBody>
       </p:sp>
-      <p:pic>
-        <p:nvPicPr>
-          <p:cNvPr id="7" name="圖片 6">
+      <p:sp>
+        <p:nvSpPr>
+          <p:cNvPr id="5" name="文字方塊 4">
             <a:extLst>
               <a:ext uri="{FF2B5EF4-FFF2-40B4-BE49-F238E27FC236}">
-                <a16:creationId xmlns:a16="http://schemas.microsoft.com/office/drawing/2014/main" id="{014EFDA1-F5E7-1E92-EFE7-A8187FF7ADC3}"/>
+                <a16:creationId xmlns:a16="http://schemas.microsoft.com/office/drawing/2014/main" id="{7FACEE4F-C872-6906-3953-7BD564F526C5}"/>
               </a:ext>
             </a:extLst>
           </p:cNvPr>
-          <p:cNvPicPr>
-            <a:picLocks noChangeAspect="1"/>
-          </p:cNvPicPr>
+          <p:cNvSpPr txBox="1"/>
           <p:nvPr/>
-        </p:nvPicPr>
-        <p:blipFill>
-          <a:blip r:embed="rId2"/>
-          <a:stretch>
-            <a:fillRect/>
-          </a:stretch>
-        </p:blipFill>
+        </p:nvSpPr>
         <p:spPr>
           <a:xfrm>
-            <a:off x="1786286" y="1340768"/>
-            <a:ext cx="5571429" cy="4952381"/>
+            <a:off x="1098000" y="1196752"/>
+            <a:ext cx="6948000" cy="5078313"/>
           </a:xfrm>
           <a:prstGeom prst="rect">
             <a:avLst/>
           </a:prstGeom>
+          <a:noFill/>
         </p:spPr>
-      </p:pic>
+        <p:txBody>
+          <a:bodyPr wrap="square" rtlCol="0">
+            <a:spAutoFit/>
+          </a:bodyPr>
+          <a:lstStyle/>
+          <a:p>
+            <a:pPr>
+              <a:buNone/>
+            </a:pPr>
+            <a:r>
+              <a:rPr lang="en-US" altLang="zh-TW" sz="1200" dirty="0">
+                <a:solidFill>
+                  <a:srgbClr val="FFAA00"/>
+                </a:solidFill>
+                <a:effectLst/>
+                <a:latin typeface="Courier New" panose="02070309020205020404" pitchFamily="49" charset="0"/>
+              </a:rPr>
+              <a:t>`uvm_analysis_imp_decl(</a:t>
+            </a:r>
+            <a:r>
+              <a:rPr lang="en-US" altLang="zh-TW" sz="1200" dirty="0">
+                <a:solidFill>
+                  <a:srgbClr val="FFFFFF"/>
+                </a:solidFill>
+                <a:effectLst/>
+                <a:latin typeface="Courier New" panose="02070309020205020404" pitchFamily="49" charset="0"/>
+              </a:rPr>
+              <a:t>_ingress</a:t>
+            </a:r>
+            <a:r>
+              <a:rPr lang="en-US" altLang="zh-TW" sz="1200" dirty="0">
+                <a:solidFill>
+                  <a:srgbClr val="FFAA00"/>
+                </a:solidFill>
+                <a:effectLst/>
+                <a:latin typeface="Courier New" panose="02070309020205020404" pitchFamily="49" charset="0"/>
+              </a:rPr>
+              <a:t>)</a:t>
+            </a:r>
+            <a:endParaRPr lang="en-US" altLang="zh-TW" sz="1200" dirty="0">
+              <a:solidFill>
+                <a:srgbClr val="F8F8F8"/>
+              </a:solidFill>
+              <a:effectLst/>
+              <a:latin typeface="Courier New" panose="02070309020205020404" pitchFamily="49" charset="0"/>
+            </a:endParaRPr>
+          </a:p>
+          <a:p>
+            <a:pPr>
+              <a:buNone/>
+            </a:pPr>
+            <a:r>
+              <a:rPr lang="en-US" altLang="zh-TW" sz="1200" dirty="0">
+                <a:solidFill>
+                  <a:srgbClr val="FFAA00"/>
+                </a:solidFill>
+                <a:effectLst/>
+                <a:latin typeface="Courier New" panose="02070309020205020404" pitchFamily="49" charset="0"/>
+              </a:rPr>
+              <a:t>`uvm_analysis_imp_decl(</a:t>
+            </a:r>
+            <a:r>
+              <a:rPr lang="en-US" altLang="zh-TW" sz="1200" dirty="0">
+                <a:solidFill>
+                  <a:srgbClr val="FFFFFF"/>
+                </a:solidFill>
+                <a:effectLst/>
+                <a:latin typeface="Courier New" panose="02070309020205020404" pitchFamily="49" charset="0"/>
+              </a:rPr>
+              <a:t>_egress</a:t>
+            </a:r>
+            <a:r>
+              <a:rPr lang="en-US" altLang="zh-TW" sz="1200" dirty="0">
+                <a:solidFill>
+                  <a:srgbClr val="FFAA00"/>
+                </a:solidFill>
+                <a:effectLst/>
+                <a:latin typeface="Courier New" panose="02070309020205020404" pitchFamily="49" charset="0"/>
+              </a:rPr>
+              <a:t>)</a:t>
+            </a:r>
+          </a:p>
+          <a:p>
+            <a:pPr>
+              <a:buNone/>
+            </a:pPr>
+            <a:endParaRPr lang="en-US" altLang="zh-TW" sz="1200" dirty="0">
+              <a:solidFill>
+                <a:srgbClr val="F8F8F8"/>
+              </a:solidFill>
+              <a:effectLst/>
+              <a:latin typeface="Courier New" panose="02070309020205020404" pitchFamily="49" charset="0"/>
+            </a:endParaRPr>
+          </a:p>
+          <a:p>
+            <a:pPr>
+              <a:buNone/>
+            </a:pPr>
+            <a:r>
+              <a:rPr lang="en-US" altLang="zh-TW" sz="1200" dirty="0">
+                <a:solidFill>
+                  <a:srgbClr val="F6F080"/>
+                </a:solidFill>
+                <a:effectLst/>
+                <a:latin typeface="Courier New" panose="02070309020205020404" pitchFamily="49" charset="0"/>
+              </a:rPr>
+              <a:t>class</a:t>
+            </a:r>
+            <a:r>
+              <a:rPr lang="en-US" altLang="zh-TW" sz="1200" dirty="0">
+                <a:solidFill>
+                  <a:srgbClr val="F8F8F8"/>
+                </a:solidFill>
+                <a:effectLst/>
+                <a:latin typeface="Courier New" panose="02070309020205020404" pitchFamily="49" charset="0"/>
+              </a:rPr>
+              <a:t> </a:t>
+            </a:r>
+            <a:r>
+              <a:rPr lang="en-US" altLang="zh-TW" sz="1200" dirty="0">
+                <a:solidFill>
+                  <a:srgbClr val="FFFFFF"/>
+                </a:solidFill>
+                <a:effectLst/>
+                <a:latin typeface="Courier New" panose="02070309020205020404" pitchFamily="49" charset="0"/>
+              </a:rPr>
+              <a:t>myscoreboard</a:t>
+            </a:r>
+            <a:r>
+              <a:rPr lang="en-US" altLang="zh-TW" sz="1200" dirty="0">
+                <a:solidFill>
+                  <a:srgbClr val="F8F8F8"/>
+                </a:solidFill>
+                <a:effectLst/>
+                <a:latin typeface="Courier New" panose="02070309020205020404" pitchFamily="49" charset="0"/>
+              </a:rPr>
+              <a:t> </a:t>
+            </a:r>
+            <a:r>
+              <a:rPr lang="en-US" altLang="zh-TW" sz="1200" dirty="0">
+                <a:solidFill>
+                  <a:srgbClr val="F6F080"/>
+                </a:solidFill>
+                <a:effectLst/>
+                <a:latin typeface="Courier New" panose="02070309020205020404" pitchFamily="49" charset="0"/>
+              </a:rPr>
+              <a:t>extends</a:t>
+            </a:r>
+            <a:r>
+              <a:rPr lang="en-US" altLang="zh-TW" sz="1200" dirty="0">
+                <a:solidFill>
+                  <a:srgbClr val="F8F8F8"/>
+                </a:solidFill>
+                <a:effectLst/>
+                <a:latin typeface="Courier New" panose="02070309020205020404" pitchFamily="49" charset="0"/>
+              </a:rPr>
+              <a:t> </a:t>
+            </a:r>
+            <a:r>
+              <a:rPr lang="en-US" altLang="zh-TW" sz="1200" dirty="0">
+                <a:solidFill>
+                  <a:srgbClr val="FFFFFF"/>
+                </a:solidFill>
+                <a:effectLst/>
+                <a:latin typeface="Courier New" panose="02070309020205020404" pitchFamily="49" charset="0"/>
+              </a:rPr>
+              <a:t>uvm_component</a:t>
+            </a:r>
+            <a:r>
+              <a:rPr lang="en-US" altLang="zh-TW" sz="1200" dirty="0">
+                <a:solidFill>
+                  <a:srgbClr val="FFAA00"/>
+                </a:solidFill>
+                <a:effectLst/>
+                <a:latin typeface="Courier New" panose="02070309020205020404" pitchFamily="49" charset="0"/>
+              </a:rPr>
+              <a:t>;</a:t>
+            </a:r>
+            <a:endParaRPr lang="en-US" altLang="zh-TW" sz="1200" dirty="0">
+              <a:solidFill>
+                <a:srgbClr val="F8F8F8"/>
+              </a:solidFill>
+              <a:effectLst/>
+              <a:latin typeface="Courier New" panose="02070309020205020404" pitchFamily="49" charset="0"/>
+            </a:endParaRPr>
+          </a:p>
+          <a:p>
+            <a:pPr>
+              <a:buNone/>
+            </a:pPr>
+            <a:r>
+              <a:rPr lang="en-US" altLang="zh-TW" sz="1200" dirty="0">
+                <a:solidFill>
+                  <a:srgbClr val="F8F8F8"/>
+                </a:solidFill>
+                <a:effectLst/>
+                <a:latin typeface="Courier New" panose="02070309020205020404" pitchFamily="49" charset="0"/>
+              </a:rPr>
+              <a:t>  </a:t>
+            </a:r>
+            <a:r>
+              <a:rPr lang="en-US" altLang="zh-TW" sz="1200" dirty="0">
+                <a:solidFill>
+                  <a:srgbClr val="FFFFFF"/>
+                </a:solidFill>
+                <a:effectLst/>
+                <a:latin typeface="Courier New" panose="02070309020205020404" pitchFamily="49" charset="0"/>
+              </a:rPr>
+              <a:t>uvm_analysis_imp_ingress</a:t>
+            </a:r>
+            <a:r>
+              <a:rPr lang="en-US" altLang="zh-TW" sz="1200" dirty="0">
+                <a:solidFill>
+                  <a:srgbClr val="FFAA00"/>
+                </a:solidFill>
+                <a:effectLst/>
+                <a:latin typeface="Courier New" panose="02070309020205020404" pitchFamily="49" charset="0"/>
+              </a:rPr>
+              <a:t>#(</a:t>
+            </a:r>
+            <a:r>
+              <a:rPr lang="en-US" altLang="zh-TW" sz="1200" dirty="0">
+                <a:solidFill>
+                  <a:srgbClr val="FFFFFF"/>
+                </a:solidFill>
+                <a:effectLst/>
+                <a:latin typeface="Courier New" panose="02070309020205020404" pitchFamily="49" charset="0"/>
+              </a:rPr>
+              <a:t>mydata</a:t>
+            </a:r>
+            <a:r>
+              <a:rPr lang="en-US" altLang="zh-TW" sz="1200" dirty="0">
+                <a:solidFill>
+                  <a:srgbClr val="FFAA00"/>
+                </a:solidFill>
+                <a:effectLst/>
+                <a:latin typeface="Courier New" panose="02070309020205020404" pitchFamily="49" charset="0"/>
+              </a:rPr>
+              <a:t>,</a:t>
+            </a:r>
+            <a:r>
+              <a:rPr lang="en-US" altLang="zh-TW" sz="1200" dirty="0">
+                <a:solidFill>
+                  <a:srgbClr val="F8F8F8"/>
+                </a:solidFill>
+                <a:effectLst/>
+                <a:latin typeface="Courier New" panose="02070309020205020404" pitchFamily="49" charset="0"/>
+              </a:rPr>
+              <a:t> </a:t>
+            </a:r>
+            <a:r>
+              <a:rPr lang="en-US" altLang="zh-TW" sz="1200" dirty="0">
+                <a:solidFill>
+                  <a:srgbClr val="FFFFFF"/>
+                </a:solidFill>
+                <a:effectLst/>
+                <a:latin typeface="Courier New" panose="02070309020205020404" pitchFamily="49" charset="0"/>
+              </a:rPr>
+              <a:t>myscoreboard</a:t>
+            </a:r>
+            <a:r>
+              <a:rPr lang="en-US" altLang="zh-TW" sz="1200" dirty="0">
+                <a:solidFill>
+                  <a:srgbClr val="FFAA00"/>
+                </a:solidFill>
+                <a:effectLst/>
+                <a:latin typeface="Courier New" panose="02070309020205020404" pitchFamily="49" charset="0"/>
+              </a:rPr>
+              <a:t>)</a:t>
+            </a:r>
+            <a:r>
+              <a:rPr lang="en-US" altLang="zh-TW" sz="1200" dirty="0">
+                <a:solidFill>
+                  <a:srgbClr val="F8F8F8"/>
+                </a:solidFill>
+                <a:effectLst/>
+                <a:latin typeface="Courier New" panose="02070309020205020404" pitchFamily="49" charset="0"/>
+              </a:rPr>
+              <a:t> </a:t>
+            </a:r>
+            <a:r>
+              <a:rPr lang="en-US" altLang="zh-TW" sz="1200" dirty="0">
+                <a:solidFill>
+                  <a:srgbClr val="FFFFFF"/>
+                </a:solidFill>
+                <a:effectLst/>
+                <a:latin typeface="Courier New" panose="02070309020205020404" pitchFamily="49" charset="0"/>
+              </a:rPr>
+              <a:t>ingress_analysis_export</a:t>
+            </a:r>
+            <a:r>
+              <a:rPr lang="en-US" altLang="zh-TW" sz="1200" dirty="0">
+                <a:solidFill>
+                  <a:srgbClr val="FFAA00"/>
+                </a:solidFill>
+                <a:effectLst/>
+                <a:latin typeface="Courier New" panose="02070309020205020404" pitchFamily="49" charset="0"/>
+              </a:rPr>
+              <a:t>;</a:t>
+            </a:r>
+            <a:endParaRPr lang="en-US" altLang="zh-TW" sz="1200" dirty="0">
+              <a:solidFill>
+                <a:srgbClr val="F8F8F8"/>
+              </a:solidFill>
+              <a:effectLst/>
+              <a:latin typeface="Courier New" panose="02070309020205020404" pitchFamily="49" charset="0"/>
+            </a:endParaRPr>
+          </a:p>
+          <a:p>
+            <a:pPr>
+              <a:buNone/>
+            </a:pPr>
+            <a:r>
+              <a:rPr lang="en-US" altLang="zh-TW" sz="1200" dirty="0">
+                <a:solidFill>
+                  <a:srgbClr val="F8F8F8"/>
+                </a:solidFill>
+                <a:effectLst/>
+                <a:latin typeface="Courier New" panose="02070309020205020404" pitchFamily="49" charset="0"/>
+              </a:rPr>
+              <a:t>  </a:t>
+            </a:r>
+            <a:r>
+              <a:rPr lang="en-US" altLang="zh-TW" sz="1200" dirty="0">
+                <a:solidFill>
+                  <a:srgbClr val="FFFFFF"/>
+                </a:solidFill>
+                <a:effectLst/>
+                <a:latin typeface="Courier New" panose="02070309020205020404" pitchFamily="49" charset="0"/>
+              </a:rPr>
+              <a:t>uvm_analysis_imp_egress </a:t>
+            </a:r>
+            <a:r>
+              <a:rPr lang="en-US" altLang="zh-TW" sz="1200" dirty="0">
+                <a:solidFill>
+                  <a:srgbClr val="FFAA00"/>
+                </a:solidFill>
+                <a:effectLst/>
+                <a:latin typeface="Courier New" panose="02070309020205020404" pitchFamily="49" charset="0"/>
+              </a:rPr>
+              <a:t>#(</a:t>
+            </a:r>
+            <a:r>
+              <a:rPr lang="en-US" altLang="zh-TW" sz="1200" dirty="0">
+                <a:solidFill>
+                  <a:srgbClr val="FFFFFF"/>
+                </a:solidFill>
+                <a:effectLst/>
+                <a:latin typeface="Courier New" panose="02070309020205020404" pitchFamily="49" charset="0"/>
+              </a:rPr>
+              <a:t>mydata</a:t>
+            </a:r>
+            <a:r>
+              <a:rPr lang="en-US" altLang="zh-TW" sz="1200" dirty="0">
+                <a:solidFill>
+                  <a:srgbClr val="FFAA00"/>
+                </a:solidFill>
+                <a:effectLst/>
+                <a:latin typeface="Courier New" panose="02070309020205020404" pitchFamily="49" charset="0"/>
+              </a:rPr>
+              <a:t>,</a:t>
+            </a:r>
+            <a:r>
+              <a:rPr lang="en-US" altLang="zh-TW" sz="1200" dirty="0">
+                <a:solidFill>
+                  <a:srgbClr val="F8F8F8"/>
+                </a:solidFill>
+                <a:effectLst/>
+                <a:latin typeface="Courier New" panose="02070309020205020404" pitchFamily="49" charset="0"/>
+              </a:rPr>
+              <a:t> </a:t>
+            </a:r>
+            <a:r>
+              <a:rPr lang="en-US" altLang="zh-TW" sz="1200" dirty="0">
+                <a:solidFill>
+                  <a:srgbClr val="FFFFFF"/>
+                </a:solidFill>
+                <a:effectLst/>
+                <a:latin typeface="Courier New" panose="02070309020205020404" pitchFamily="49" charset="0"/>
+              </a:rPr>
+              <a:t>myscoreboard</a:t>
+            </a:r>
+            <a:r>
+              <a:rPr lang="en-US" altLang="zh-TW" sz="1200" dirty="0">
+                <a:solidFill>
+                  <a:srgbClr val="FFAA00"/>
+                </a:solidFill>
+                <a:effectLst/>
+                <a:latin typeface="Courier New" panose="02070309020205020404" pitchFamily="49" charset="0"/>
+              </a:rPr>
+              <a:t>)</a:t>
+            </a:r>
+            <a:r>
+              <a:rPr lang="en-US" altLang="zh-TW" sz="1200" dirty="0">
+                <a:solidFill>
+                  <a:srgbClr val="F8F8F8"/>
+                </a:solidFill>
+                <a:effectLst/>
+                <a:latin typeface="Courier New" panose="02070309020205020404" pitchFamily="49" charset="0"/>
+              </a:rPr>
+              <a:t> </a:t>
+            </a:r>
+            <a:r>
+              <a:rPr lang="en-US" altLang="zh-TW" sz="1200" dirty="0">
+                <a:solidFill>
+                  <a:srgbClr val="FFFFFF"/>
+                </a:solidFill>
+                <a:latin typeface="Courier New" panose="02070309020205020404" pitchFamily="49" charset="0"/>
+              </a:rPr>
+              <a:t>egress_analysis_export</a:t>
+            </a:r>
+            <a:r>
+              <a:rPr lang="en-US" altLang="zh-TW" sz="1200" dirty="0">
+                <a:solidFill>
+                  <a:srgbClr val="FFAA00"/>
+                </a:solidFill>
+                <a:effectLst/>
+                <a:latin typeface="Courier New" panose="02070309020205020404" pitchFamily="49" charset="0"/>
+              </a:rPr>
+              <a:t>;</a:t>
+            </a:r>
+            <a:endParaRPr lang="en-US" altLang="zh-TW" sz="1200" dirty="0">
+              <a:solidFill>
+                <a:srgbClr val="F8F8F8"/>
+              </a:solidFill>
+              <a:effectLst/>
+              <a:latin typeface="Courier New" panose="02070309020205020404" pitchFamily="49" charset="0"/>
+            </a:endParaRPr>
+          </a:p>
+          <a:p>
+            <a:pPr>
+              <a:buNone/>
+            </a:pPr>
+            <a:r>
+              <a:rPr lang="en-US" altLang="zh-TW" sz="1200" dirty="0">
+                <a:solidFill>
+                  <a:srgbClr val="F8F8F8"/>
+                </a:solidFill>
+                <a:effectLst/>
+                <a:latin typeface="Courier New" panose="02070309020205020404" pitchFamily="49" charset="0"/>
+              </a:rPr>
+              <a:t>  </a:t>
+            </a:r>
+            <a:r>
+              <a:rPr lang="en-US" altLang="zh-TW" sz="1200" dirty="0">
+                <a:solidFill>
+                  <a:srgbClr val="FFFFFF"/>
+                </a:solidFill>
+                <a:effectLst/>
+                <a:latin typeface="Courier New" panose="02070309020205020404" pitchFamily="49" charset="0"/>
+              </a:rPr>
+              <a:t>mydata</a:t>
+            </a:r>
+            <a:r>
+              <a:rPr lang="en-US" altLang="zh-TW" sz="1200" dirty="0">
+                <a:solidFill>
+                  <a:srgbClr val="F8F8F8"/>
+                </a:solidFill>
+                <a:effectLst/>
+                <a:latin typeface="Courier New" panose="02070309020205020404" pitchFamily="49" charset="0"/>
+              </a:rPr>
+              <a:t> </a:t>
+            </a:r>
+            <a:r>
+              <a:rPr lang="en-US" altLang="zh-TW" sz="1200" dirty="0">
+                <a:solidFill>
+                  <a:srgbClr val="FFFFFF"/>
+                </a:solidFill>
+                <a:effectLst/>
+                <a:latin typeface="Courier New" panose="02070309020205020404" pitchFamily="49" charset="0"/>
+              </a:rPr>
+              <a:t>ingress_list</a:t>
+            </a:r>
+            <a:r>
+              <a:rPr lang="en-US" altLang="zh-TW" sz="1200" dirty="0">
+                <a:solidFill>
+                  <a:srgbClr val="FFAA00"/>
+                </a:solidFill>
+                <a:effectLst/>
+                <a:latin typeface="Courier New" panose="02070309020205020404" pitchFamily="49" charset="0"/>
+              </a:rPr>
+              <a:t>[</a:t>
+            </a:r>
+            <a:r>
+              <a:rPr lang="en-US" altLang="zh-TW" sz="1200" dirty="0">
+                <a:solidFill>
+                  <a:srgbClr val="FFFFFF"/>
+                </a:solidFill>
+                <a:effectLst/>
+                <a:latin typeface="Courier New" panose="02070309020205020404" pitchFamily="49" charset="0"/>
+              </a:rPr>
+              <a:t>$</a:t>
+            </a:r>
+            <a:r>
+              <a:rPr lang="en-US" altLang="zh-TW" sz="1200" dirty="0">
+                <a:solidFill>
+                  <a:srgbClr val="FFAA00"/>
+                </a:solidFill>
+                <a:effectLst/>
+                <a:latin typeface="Courier New" panose="02070309020205020404" pitchFamily="49" charset="0"/>
+              </a:rPr>
+              <a:t>];</a:t>
+            </a:r>
+          </a:p>
+          <a:p>
+            <a:pPr>
+              <a:buNone/>
+            </a:pPr>
+            <a:r>
+              <a:rPr lang="en-US" altLang="zh-TW" sz="1200" dirty="0">
+                <a:solidFill>
+                  <a:srgbClr val="FFAA00"/>
+                </a:solidFill>
+                <a:latin typeface="Courier New" panose="02070309020205020404" pitchFamily="49" charset="0"/>
+              </a:rPr>
+              <a:t>  </a:t>
+            </a:r>
+            <a:r>
+              <a:rPr lang="en-US" altLang="zh-TW" sz="1200" dirty="0">
+                <a:solidFill>
+                  <a:srgbClr val="00FF80"/>
+                </a:solidFill>
+                <a:latin typeface="Courier New" panose="02070309020205020404" pitchFamily="49" charset="0"/>
+              </a:rPr>
+              <a:t>// ...</a:t>
+            </a:r>
+          </a:p>
+          <a:p>
+            <a:pPr>
+              <a:buNone/>
+            </a:pPr>
+            <a:endParaRPr lang="en-US" altLang="zh-TW" sz="1200" dirty="0">
+              <a:solidFill>
+                <a:srgbClr val="F8F8F8"/>
+              </a:solidFill>
+              <a:effectLst/>
+              <a:latin typeface="Courier New" panose="02070309020205020404" pitchFamily="49" charset="0"/>
+            </a:endParaRPr>
+          </a:p>
+          <a:p>
+            <a:pPr>
+              <a:buNone/>
+            </a:pPr>
+            <a:r>
+              <a:rPr lang="en-US" altLang="zh-TW" sz="1200" dirty="0">
+                <a:solidFill>
+                  <a:srgbClr val="F8F8F8"/>
+                </a:solidFill>
+                <a:effectLst/>
+                <a:latin typeface="Courier New" panose="02070309020205020404" pitchFamily="49" charset="0"/>
+              </a:rPr>
+              <a:t>  </a:t>
+            </a:r>
+            <a:r>
+              <a:rPr lang="en-US" altLang="zh-TW" sz="1200" dirty="0">
+                <a:solidFill>
+                  <a:srgbClr val="F6F080"/>
+                </a:solidFill>
+                <a:effectLst/>
+                <a:latin typeface="Courier New" panose="02070309020205020404" pitchFamily="49" charset="0"/>
+              </a:rPr>
+              <a:t>function</a:t>
+            </a:r>
+            <a:r>
+              <a:rPr lang="en-US" altLang="zh-TW" sz="1200" dirty="0">
+                <a:solidFill>
+                  <a:srgbClr val="F8F8F8"/>
+                </a:solidFill>
+                <a:effectLst/>
+                <a:latin typeface="Courier New" panose="02070309020205020404" pitchFamily="49" charset="0"/>
+              </a:rPr>
+              <a:t> </a:t>
+            </a:r>
+            <a:r>
+              <a:rPr lang="en-US" altLang="zh-TW" sz="1200" dirty="0">
+                <a:solidFill>
+                  <a:srgbClr val="F6F080"/>
+                </a:solidFill>
+                <a:effectLst/>
+                <a:latin typeface="Courier New" panose="02070309020205020404" pitchFamily="49" charset="0"/>
+              </a:rPr>
+              <a:t>new</a:t>
+            </a:r>
+            <a:r>
+              <a:rPr lang="en-US" altLang="zh-TW" sz="1200" dirty="0">
+                <a:solidFill>
+                  <a:srgbClr val="F8F8F8"/>
+                </a:solidFill>
+                <a:effectLst/>
+                <a:latin typeface="Courier New" panose="02070309020205020404" pitchFamily="49" charset="0"/>
+              </a:rPr>
+              <a:t> </a:t>
+            </a:r>
+            <a:r>
+              <a:rPr lang="en-US" altLang="zh-TW" sz="1200" dirty="0">
+                <a:solidFill>
+                  <a:srgbClr val="FFAA00"/>
+                </a:solidFill>
+                <a:effectLst/>
+                <a:latin typeface="Courier New" panose="02070309020205020404" pitchFamily="49" charset="0"/>
+              </a:rPr>
+              <a:t>(</a:t>
+            </a:r>
+            <a:r>
+              <a:rPr lang="en-US" altLang="zh-TW" sz="1200" dirty="0">
+                <a:solidFill>
+                  <a:srgbClr val="F6F080"/>
+                </a:solidFill>
+                <a:effectLst/>
+                <a:latin typeface="Courier New" panose="02070309020205020404" pitchFamily="49" charset="0"/>
+              </a:rPr>
+              <a:t>string</a:t>
+            </a:r>
+            <a:r>
+              <a:rPr lang="en-US" altLang="zh-TW" sz="1200" dirty="0">
+                <a:solidFill>
+                  <a:srgbClr val="F8F8F8"/>
+                </a:solidFill>
+                <a:effectLst/>
+                <a:latin typeface="Courier New" panose="02070309020205020404" pitchFamily="49" charset="0"/>
+              </a:rPr>
+              <a:t> </a:t>
+            </a:r>
+            <a:r>
+              <a:rPr lang="en-US" altLang="zh-TW" sz="1200" dirty="0">
+                <a:solidFill>
+                  <a:srgbClr val="FFFFFF"/>
+                </a:solidFill>
+                <a:effectLst/>
+                <a:latin typeface="Courier New" panose="02070309020205020404" pitchFamily="49" charset="0"/>
+              </a:rPr>
+              <a:t>name</a:t>
+            </a:r>
+            <a:r>
+              <a:rPr lang="en-US" altLang="zh-TW" sz="1200" dirty="0">
+                <a:solidFill>
+                  <a:srgbClr val="FFAA00"/>
+                </a:solidFill>
+                <a:effectLst/>
+                <a:latin typeface="Courier New" panose="02070309020205020404" pitchFamily="49" charset="0"/>
+              </a:rPr>
+              <a:t>,</a:t>
+            </a:r>
+            <a:r>
+              <a:rPr lang="en-US" altLang="zh-TW" sz="1200" dirty="0">
+                <a:solidFill>
+                  <a:srgbClr val="F8F8F8"/>
+                </a:solidFill>
+                <a:effectLst/>
+                <a:latin typeface="Courier New" panose="02070309020205020404" pitchFamily="49" charset="0"/>
+              </a:rPr>
+              <a:t> </a:t>
+            </a:r>
+            <a:r>
+              <a:rPr lang="en-US" altLang="zh-TW" sz="1200" dirty="0">
+                <a:solidFill>
+                  <a:srgbClr val="FFFFFF"/>
+                </a:solidFill>
+                <a:effectLst/>
+                <a:latin typeface="Courier New" panose="02070309020205020404" pitchFamily="49" charset="0"/>
+              </a:rPr>
+              <a:t>uvm_component</a:t>
+            </a:r>
+            <a:r>
+              <a:rPr lang="en-US" altLang="zh-TW" sz="1200" dirty="0">
+                <a:solidFill>
+                  <a:srgbClr val="F8F8F8"/>
+                </a:solidFill>
+                <a:effectLst/>
+                <a:latin typeface="Courier New" panose="02070309020205020404" pitchFamily="49" charset="0"/>
+              </a:rPr>
+              <a:t> </a:t>
+            </a:r>
+            <a:r>
+              <a:rPr lang="en-US" altLang="zh-TW" sz="1200" dirty="0">
+                <a:solidFill>
+                  <a:srgbClr val="FFFFFF"/>
+                </a:solidFill>
+                <a:effectLst/>
+                <a:latin typeface="Courier New" panose="02070309020205020404" pitchFamily="49" charset="0"/>
+              </a:rPr>
+              <a:t>parent</a:t>
+            </a:r>
+            <a:r>
+              <a:rPr lang="en-US" altLang="zh-TW" sz="1200" dirty="0">
+                <a:solidFill>
+                  <a:srgbClr val="FFAA00"/>
+                </a:solidFill>
+                <a:effectLst/>
+                <a:latin typeface="Courier New" panose="02070309020205020404" pitchFamily="49" charset="0"/>
+              </a:rPr>
+              <a:t>);</a:t>
+            </a:r>
+            <a:endParaRPr lang="en-US" altLang="zh-TW" sz="1200" dirty="0">
+              <a:solidFill>
+                <a:srgbClr val="F8F8F8"/>
+              </a:solidFill>
+              <a:effectLst/>
+              <a:latin typeface="Courier New" panose="02070309020205020404" pitchFamily="49" charset="0"/>
+            </a:endParaRPr>
+          </a:p>
+          <a:p>
+            <a:pPr>
+              <a:buNone/>
+            </a:pPr>
+            <a:r>
+              <a:rPr lang="en-US" altLang="zh-TW" sz="1200" dirty="0">
+                <a:solidFill>
+                  <a:srgbClr val="F8F8F8"/>
+                </a:solidFill>
+                <a:effectLst/>
+                <a:latin typeface="Courier New" panose="02070309020205020404" pitchFamily="49" charset="0"/>
+              </a:rPr>
+              <a:t>    </a:t>
+            </a:r>
+            <a:r>
+              <a:rPr lang="en-US" altLang="zh-TW" sz="1200" dirty="0">
+                <a:solidFill>
+                  <a:srgbClr val="F6F080"/>
+                </a:solidFill>
+                <a:effectLst/>
+                <a:latin typeface="Courier New" panose="02070309020205020404" pitchFamily="49" charset="0"/>
+              </a:rPr>
+              <a:t>super</a:t>
+            </a:r>
+            <a:r>
+              <a:rPr lang="en-US" altLang="zh-TW" sz="1200" dirty="0">
+                <a:solidFill>
+                  <a:srgbClr val="FFAA00"/>
+                </a:solidFill>
+                <a:effectLst/>
+                <a:latin typeface="Courier New" panose="02070309020205020404" pitchFamily="49" charset="0"/>
+              </a:rPr>
+              <a:t>.</a:t>
+            </a:r>
+            <a:r>
+              <a:rPr lang="en-US" altLang="zh-TW" sz="1200" dirty="0">
+                <a:solidFill>
+                  <a:srgbClr val="FFFFFF"/>
+                </a:solidFill>
+                <a:effectLst/>
+                <a:latin typeface="Courier New" panose="02070309020205020404" pitchFamily="49" charset="0"/>
+              </a:rPr>
+              <a:t>new</a:t>
+            </a:r>
+            <a:r>
+              <a:rPr lang="en-US" altLang="zh-TW" sz="1200" dirty="0">
+                <a:solidFill>
+                  <a:srgbClr val="FFAA00"/>
+                </a:solidFill>
+                <a:effectLst/>
+                <a:latin typeface="Courier New" panose="02070309020205020404" pitchFamily="49" charset="0"/>
+              </a:rPr>
+              <a:t>(</a:t>
+            </a:r>
+            <a:r>
+              <a:rPr lang="en-US" altLang="zh-TW" sz="1200" dirty="0">
+                <a:solidFill>
+                  <a:srgbClr val="FFFFFF"/>
+                </a:solidFill>
+                <a:effectLst/>
+                <a:latin typeface="Courier New" panose="02070309020205020404" pitchFamily="49" charset="0"/>
+              </a:rPr>
+              <a:t>name</a:t>
+            </a:r>
+            <a:r>
+              <a:rPr lang="en-US" altLang="zh-TW" sz="1200" dirty="0">
+                <a:solidFill>
+                  <a:srgbClr val="FFAA00"/>
+                </a:solidFill>
+                <a:effectLst/>
+                <a:latin typeface="Courier New" panose="02070309020205020404" pitchFamily="49" charset="0"/>
+              </a:rPr>
+              <a:t>,</a:t>
+            </a:r>
+            <a:r>
+              <a:rPr lang="en-US" altLang="zh-TW" sz="1200" dirty="0">
+                <a:solidFill>
+                  <a:srgbClr val="F8F8F8"/>
+                </a:solidFill>
+                <a:effectLst/>
+                <a:latin typeface="Courier New" panose="02070309020205020404" pitchFamily="49" charset="0"/>
+              </a:rPr>
+              <a:t> </a:t>
+            </a:r>
+            <a:r>
+              <a:rPr lang="en-US" altLang="zh-TW" sz="1200" dirty="0">
+                <a:solidFill>
+                  <a:srgbClr val="FFFFFF"/>
+                </a:solidFill>
+                <a:effectLst/>
+                <a:latin typeface="Courier New" panose="02070309020205020404" pitchFamily="49" charset="0"/>
+              </a:rPr>
+              <a:t>parent</a:t>
+            </a:r>
+            <a:r>
+              <a:rPr lang="en-US" altLang="zh-TW" sz="1200" dirty="0">
+                <a:solidFill>
+                  <a:srgbClr val="FFAA00"/>
+                </a:solidFill>
+                <a:effectLst/>
+                <a:latin typeface="Courier New" panose="02070309020205020404" pitchFamily="49" charset="0"/>
+              </a:rPr>
+              <a:t>);</a:t>
+            </a:r>
+            <a:endParaRPr lang="en-US" altLang="zh-TW" sz="1200" dirty="0">
+              <a:solidFill>
+                <a:srgbClr val="F8F8F8"/>
+              </a:solidFill>
+              <a:effectLst/>
+              <a:latin typeface="Courier New" panose="02070309020205020404" pitchFamily="49" charset="0"/>
+            </a:endParaRPr>
+          </a:p>
+          <a:p>
+            <a:pPr>
+              <a:buNone/>
+            </a:pPr>
+            <a:r>
+              <a:rPr lang="en-US" altLang="zh-TW" sz="1200" dirty="0">
+                <a:solidFill>
+                  <a:srgbClr val="F8F8F8"/>
+                </a:solidFill>
+                <a:effectLst/>
+                <a:latin typeface="Courier New" panose="02070309020205020404" pitchFamily="49" charset="0"/>
+              </a:rPr>
+              <a:t>    </a:t>
+            </a:r>
+            <a:r>
+              <a:rPr lang="en-US" altLang="zh-TW" sz="1200" dirty="0">
+                <a:solidFill>
+                  <a:srgbClr val="FFFFFF"/>
+                </a:solidFill>
+                <a:latin typeface="Courier New" panose="02070309020205020404" pitchFamily="49" charset="0"/>
+              </a:rPr>
+              <a:t>ingress_analysis_export</a:t>
+            </a:r>
+            <a:r>
+              <a:rPr lang="en-US" altLang="zh-TW" sz="1200" dirty="0">
+                <a:solidFill>
+                  <a:srgbClr val="F8F8F8"/>
+                </a:solidFill>
+                <a:effectLst/>
+                <a:latin typeface="Courier New" panose="02070309020205020404" pitchFamily="49" charset="0"/>
+              </a:rPr>
+              <a:t> </a:t>
+            </a:r>
+            <a:r>
+              <a:rPr lang="en-US" altLang="zh-TW" sz="1200" dirty="0">
+                <a:solidFill>
+                  <a:srgbClr val="FFAA00"/>
+                </a:solidFill>
+                <a:effectLst/>
+                <a:latin typeface="Courier New" panose="02070309020205020404" pitchFamily="49" charset="0"/>
+              </a:rPr>
+              <a:t>=</a:t>
+            </a:r>
+            <a:r>
+              <a:rPr lang="en-US" altLang="zh-TW" sz="1200" dirty="0">
+                <a:solidFill>
+                  <a:srgbClr val="F8F8F8"/>
+                </a:solidFill>
+                <a:effectLst/>
+                <a:latin typeface="Courier New" panose="02070309020205020404" pitchFamily="49" charset="0"/>
+              </a:rPr>
+              <a:t> </a:t>
+            </a:r>
+            <a:r>
+              <a:rPr lang="en-US" altLang="zh-TW" sz="1200" dirty="0">
+                <a:solidFill>
+                  <a:srgbClr val="F6F080"/>
+                </a:solidFill>
+                <a:effectLst/>
+                <a:latin typeface="Courier New" panose="02070309020205020404" pitchFamily="49" charset="0"/>
+              </a:rPr>
+              <a:t>new</a:t>
+            </a:r>
+            <a:r>
+              <a:rPr lang="en-US" altLang="zh-TW" sz="1200" dirty="0">
+                <a:solidFill>
+                  <a:srgbClr val="FFAA00"/>
+                </a:solidFill>
+                <a:effectLst/>
+                <a:latin typeface="Courier New" panose="02070309020205020404" pitchFamily="49" charset="0"/>
+              </a:rPr>
+              <a:t>(</a:t>
+            </a:r>
+            <a:r>
+              <a:rPr lang="en-US" altLang="zh-TW" sz="1200" dirty="0">
+                <a:solidFill>
+                  <a:srgbClr val="FF80C0"/>
+                </a:solidFill>
+                <a:latin typeface="Courier New" panose="02070309020205020404" pitchFamily="49" charset="0"/>
+              </a:rPr>
+              <a:t>"ingress_analysis_export"</a:t>
+            </a:r>
+            <a:r>
+              <a:rPr lang="en-US" altLang="zh-TW" sz="1200" dirty="0">
+                <a:solidFill>
+                  <a:srgbClr val="FFAA00"/>
+                </a:solidFill>
+                <a:effectLst/>
+                <a:latin typeface="Courier New" panose="02070309020205020404" pitchFamily="49" charset="0"/>
+              </a:rPr>
+              <a:t>,</a:t>
+            </a:r>
+            <a:r>
+              <a:rPr lang="en-US" altLang="zh-TW" sz="1200" dirty="0">
+                <a:solidFill>
+                  <a:srgbClr val="F8F8F8"/>
+                </a:solidFill>
+                <a:effectLst/>
+                <a:latin typeface="Courier New" panose="02070309020205020404" pitchFamily="49" charset="0"/>
+              </a:rPr>
+              <a:t> </a:t>
+            </a:r>
+            <a:r>
+              <a:rPr lang="en-US" altLang="zh-TW" sz="1200" dirty="0">
+                <a:solidFill>
+                  <a:srgbClr val="F6F080"/>
+                </a:solidFill>
+                <a:effectLst/>
+                <a:latin typeface="Courier New" panose="02070309020205020404" pitchFamily="49" charset="0"/>
+              </a:rPr>
+              <a:t>this</a:t>
+            </a:r>
+            <a:r>
+              <a:rPr lang="en-US" altLang="zh-TW" sz="1200" dirty="0">
+                <a:solidFill>
+                  <a:srgbClr val="FFAA00"/>
+                </a:solidFill>
+                <a:effectLst/>
+                <a:latin typeface="Courier New" panose="02070309020205020404" pitchFamily="49" charset="0"/>
+              </a:rPr>
+              <a:t>);</a:t>
+            </a:r>
+            <a:endParaRPr lang="en-US" altLang="zh-TW" sz="1200" dirty="0">
+              <a:solidFill>
+                <a:srgbClr val="F8F8F8"/>
+              </a:solidFill>
+              <a:effectLst/>
+              <a:latin typeface="Courier New" panose="02070309020205020404" pitchFamily="49" charset="0"/>
+            </a:endParaRPr>
+          </a:p>
+          <a:p>
+            <a:pPr>
+              <a:buNone/>
+            </a:pPr>
+            <a:r>
+              <a:rPr lang="en-US" altLang="zh-TW" sz="1200" dirty="0">
+                <a:solidFill>
+                  <a:srgbClr val="F8F8F8"/>
+                </a:solidFill>
+                <a:effectLst/>
+                <a:latin typeface="Courier New" panose="02070309020205020404" pitchFamily="49" charset="0"/>
+              </a:rPr>
+              <a:t>    </a:t>
+            </a:r>
+            <a:r>
+              <a:rPr lang="en-US" altLang="zh-TW" sz="1200" dirty="0">
+                <a:solidFill>
+                  <a:srgbClr val="FFFFFF"/>
+                </a:solidFill>
+                <a:latin typeface="Courier New" panose="02070309020205020404" pitchFamily="49" charset="0"/>
+              </a:rPr>
+              <a:t>egress_analysis_export</a:t>
+            </a:r>
+            <a:r>
+              <a:rPr lang="en-US" altLang="zh-TW" sz="1200" dirty="0">
+                <a:solidFill>
+                  <a:srgbClr val="F8F8F8"/>
+                </a:solidFill>
+                <a:effectLst/>
+                <a:latin typeface="Courier New" panose="02070309020205020404" pitchFamily="49" charset="0"/>
+              </a:rPr>
+              <a:t>  </a:t>
+            </a:r>
+            <a:r>
+              <a:rPr lang="en-US" altLang="zh-TW" sz="1200" dirty="0">
+                <a:solidFill>
+                  <a:srgbClr val="FFAA00"/>
+                </a:solidFill>
+                <a:effectLst/>
+                <a:latin typeface="Courier New" panose="02070309020205020404" pitchFamily="49" charset="0"/>
+              </a:rPr>
+              <a:t>=</a:t>
+            </a:r>
+            <a:r>
+              <a:rPr lang="en-US" altLang="zh-TW" sz="1200" dirty="0">
+                <a:solidFill>
+                  <a:srgbClr val="F8F8F8"/>
+                </a:solidFill>
+                <a:effectLst/>
+                <a:latin typeface="Courier New" panose="02070309020205020404" pitchFamily="49" charset="0"/>
+              </a:rPr>
+              <a:t> </a:t>
+            </a:r>
+            <a:r>
+              <a:rPr lang="en-US" altLang="zh-TW" sz="1200" dirty="0">
+                <a:solidFill>
+                  <a:srgbClr val="F6F080"/>
+                </a:solidFill>
+                <a:effectLst/>
+                <a:latin typeface="Courier New" panose="02070309020205020404" pitchFamily="49" charset="0"/>
+              </a:rPr>
+              <a:t>new</a:t>
+            </a:r>
+            <a:r>
+              <a:rPr lang="en-US" altLang="zh-TW" sz="1200" dirty="0">
+                <a:solidFill>
+                  <a:srgbClr val="FFAA00"/>
+                </a:solidFill>
+                <a:effectLst/>
+                <a:latin typeface="Courier New" panose="02070309020205020404" pitchFamily="49" charset="0"/>
+              </a:rPr>
+              <a:t>(</a:t>
+            </a:r>
+            <a:r>
+              <a:rPr lang="en-US" altLang="zh-TW" sz="1200" dirty="0">
+                <a:solidFill>
+                  <a:srgbClr val="FF80C0"/>
+                </a:solidFill>
+                <a:latin typeface="Courier New" panose="02070309020205020404" pitchFamily="49" charset="0"/>
+              </a:rPr>
+              <a:t>"egress_analysis_export"</a:t>
+            </a:r>
+            <a:r>
+              <a:rPr lang="en-US" altLang="zh-TW" sz="1200" dirty="0">
+                <a:solidFill>
+                  <a:srgbClr val="FFAA00"/>
+                </a:solidFill>
+                <a:effectLst/>
+                <a:latin typeface="Courier New" panose="02070309020205020404" pitchFamily="49" charset="0"/>
+              </a:rPr>
+              <a:t>,</a:t>
+            </a:r>
+            <a:r>
+              <a:rPr lang="en-US" altLang="zh-TW" sz="1200" dirty="0">
+                <a:solidFill>
+                  <a:srgbClr val="F8F8F8"/>
+                </a:solidFill>
+                <a:effectLst/>
+                <a:latin typeface="Courier New" panose="02070309020205020404" pitchFamily="49" charset="0"/>
+              </a:rPr>
+              <a:t> </a:t>
+            </a:r>
+            <a:r>
+              <a:rPr lang="en-US" altLang="zh-TW" sz="1200" dirty="0">
+                <a:solidFill>
+                  <a:srgbClr val="F6F080"/>
+                </a:solidFill>
+                <a:effectLst/>
+                <a:latin typeface="Courier New" panose="02070309020205020404" pitchFamily="49" charset="0"/>
+              </a:rPr>
+              <a:t>this</a:t>
+            </a:r>
+            <a:r>
+              <a:rPr lang="en-US" altLang="zh-TW" sz="1200" dirty="0">
+                <a:solidFill>
+                  <a:srgbClr val="FFAA00"/>
+                </a:solidFill>
+                <a:effectLst/>
+                <a:latin typeface="Courier New" panose="02070309020205020404" pitchFamily="49" charset="0"/>
+              </a:rPr>
+              <a:t>);</a:t>
+            </a:r>
+            <a:endParaRPr lang="en-US" altLang="zh-TW" sz="1200" dirty="0">
+              <a:solidFill>
+                <a:srgbClr val="F8F8F8"/>
+              </a:solidFill>
+              <a:effectLst/>
+              <a:latin typeface="Courier New" panose="02070309020205020404" pitchFamily="49" charset="0"/>
+            </a:endParaRPr>
+          </a:p>
+          <a:p>
+            <a:pPr>
+              <a:buNone/>
+            </a:pPr>
+            <a:r>
+              <a:rPr lang="en-US" altLang="zh-TW" sz="1200" dirty="0">
+                <a:solidFill>
+                  <a:srgbClr val="F8F8F8"/>
+                </a:solidFill>
+                <a:effectLst/>
+                <a:latin typeface="Courier New" panose="02070309020205020404" pitchFamily="49" charset="0"/>
+              </a:rPr>
+              <a:t>  </a:t>
+            </a:r>
+            <a:r>
+              <a:rPr lang="en-US" altLang="zh-TW" sz="1200" dirty="0">
+                <a:solidFill>
+                  <a:srgbClr val="F6F080"/>
+                </a:solidFill>
+                <a:effectLst/>
+                <a:latin typeface="Courier New" panose="02070309020205020404" pitchFamily="49" charset="0"/>
+              </a:rPr>
+              <a:t>endfunction</a:t>
+            </a:r>
+          </a:p>
+          <a:p>
+            <a:pPr>
+              <a:buNone/>
+            </a:pPr>
+            <a:endParaRPr lang="en-US" altLang="zh-TW" sz="1200" dirty="0">
+              <a:solidFill>
+                <a:srgbClr val="F8F8F8"/>
+              </a:solidFill>
+              <a:effectLst/>
+              <a:latin typeface="Courier New" panose="02070309020205020404" pitchFamily="49" charset="0"/>
+            </a:endParaRPr>
+          </a:p>
+          <a:p>
+            <a:pPr>
+              <a:buNone/>
+            </a:pPr>
+            <a:r>
+              <a:rPr lang="en-US" altLang="zh-TW" sz="1200" dirty="0">
+                <a:solidFill>
+                  <a:srgbClr val="F8F8F8"/>
+                </a:solidFill>
+                <a:effectLst/>
+                <a:latin typeface="Courier New" panose="02070309020205020404" pitchFamily="49" charset="0"/>
+              </a:rPr>
+              <a:t>  </a:t>
+            </a:r>
+            <a:r>
+              <a:rPr lang="en-US" altLang="zh-TW" sz="1200" dirty="0">
+                <a:solidFill>
+                  <a:srgbClr val="F6F080"/>
+                </a:solidFill>
+                <a:effectLst/>
+                <a:latin typeface="Courier New" panose="02070309020205020404" pitchFamily="49" charset="0"/>
+              </a:rPr>
+              <a:t>function</a:t>
+            </a:r>
+            <a:r>
+              <a:rPr lang="en-US" altLang="zh-TW" sz="1200" dirty="0">
+                <a:solidFill>
+                  <a:srgbClr val="F8F8F8"/>
+                </a:solidFill>
+                <a:effectLst/>
+                <a:latin typeface="Courier New" panose="02070309020205020404" pitchFamily="49" charset="0"/>
+              </a:rPr>
+              <a:t> </a:t>
+            </a:r>
+            <a:r>
+              <a:rPr lang="en-US" altLang="zh-TW" sz="1200" dirty="0">
+                <a:solidFill>
+                  <a:srgbClr val="F6F080"/>
+                </a:solidFill>
+                <a:effectLst/>
+                <a:latin typeface="Courier New" panose="02070309020205020404" pitchFamily="49" charset="0"/>
+              </a:rPr>
+              <a:t>void</a:t>
+            </a:r>
+            <a:r>
+              <a:rPr lang="en-US" altLang="zh-TW" sz="1200" dirty="0">
+                <a:solidFill>
+                  <a:srgbClr val="F8F8F8"/>
+                </a:solidFill>
+                <a:effectLst/>
+                <a:latin typeface="Courier New" panose="02070309020205020404" pitchFamily="49" charset="0"/>
+              </a:rPr>
+              <a:t> </a:t>
+            </a:r>
+            <a:r>
+              <a:rPr lang="en-US" altLang="zh-TW" sz="1200" dirty="0">
+                <a:solidFill>
+                  <a:srgbClr val="FFFFFF"/>
+                </a:solidFill>
+                <a:effectLst/>
+                <a:latin typeface="Courier New" panose="02070309020205020404" pitchFamily="49" charset="0"/>
+              </a:rPr>
+              <a:t>write_ingress</a:t>
+            </a:r>
+            <a:r>
+              <a:rPr lang="en-US" altLang="zh-TW" sz="1200" dirty="0">
+                <a:solidFill>
+                  <a:srgbClr val="F8F8F8"/>
+                </a:solidFill>
+                <a:effectLst/>
+                <a:latin typeface="Courier New" panose="02070309020205020404" pitchFamily="49" charset="0"/>
+              </a:rPr>
+              <a:t> </a:t>
+            </a:r>
+            <a:r>
+              <a:rPr lang="en-US" altLang="zh-TW" sz="1200" dirty="0">
+                <a:solidFill>
+                  <a:srgbClr val="FFAA00"/>
+                </a:solidFill>
+                <a:effectLst/>
+                <a:latin typeface="Courier New" panose="02070309020205020404" pitchFamily="49" charset="0"/>
+              </a:rPr>
+              <a:t>(</a:t>
+            </a:r>
+            <a:r>
+              <a:rPr lang="en-US" altLang="zh-TW" sz="1200" dirty="0">
+                <a:solidFill>
+                  <a:srgbClr val="FFFFFF"/>
+                </a:solidFill>
+                <a:effectLst/>
+                <a:latin typeface="Courier New" panose="02070309020205020404" pitchFamily="49" charset="0"/>
+              </a:rPr>
+              <a:t>mydata</a:t>
+            </a:r>
+            <a:r>
+              <a:rPr lang="en-US" altLang="zh-TW" sz="1200" dirty="0">
+                <a:solidFill>
+                  <a:srgbClr val="F8F8F8"/>
+                </a:solidFill>
+                <a:effectLst/>
+                <a:latin typeface="Courier New" panose="02070309020205020404" pitchFamily="49" charset="0"/>
+              </a:rPr>
+              <a:t> </a:t>
+            </a:r>
+            <a:r>
+              <a:rPr lang="en-US" altLang="zh-TW" sz="1200" dirty="0">
+                <a:solidFill>
+                  <a:srgbClr val="FFFFFF"/>
+                </a:solidFill>
+                <a:effectLst/>
+                <a:latin typeface="Courier New" panose="02070309020205020404" pitchFamily="49" charset="0"/>
+              </a:rPr>
+              <a:t>t</a:t>
+            </a:r>
+            <a:r>
+              <a:rPr lang="en-US" altLang="zh-TW" sz="1200" dirty="0">
+                <a:solidFill>
+                  <a:srgbClr val="FFAA00"/>
+                </a:solidFill>
+                <a:effectLst/>
+                <a:latin typeface="Courier New" panose="02070309020205020404" pitchFamily="49" charset="0"/>
+              </a:rPr>
+              <a:t>);</a:t>
+            </a:r>
+            <a:endParaRPr lang="en-US" altLang="zh-TW" sz="1200" dirty="0">
+              <a:solidFill>
+                <a:srgbClr val="F8F8F8"/>
+              </a:solidFill>
+              <a:effectLst/>
+              <a:latin typeface="Courier New" panose="02070309020205020404" pitchFamily="49" charset="0"/>
+            </a:endParaRPr>
+          </a:p>
+          <a:p>
+            <a:pPr>
+              <a:buNone/>
+            </a:pPr>
+            <a:r>
+              <a:rPr lang="en-US" altLang="zh-TW" sz="1200" dirty="0">
+                <a:solidFill>
+                  <a:srgbClr val="F8F8F8"/>
+                </a:solidFill>
+                <a:effectLst/>
+                <a:latin typeface="Courier New" panose="02070309020205020404" pitchFamily="49" charset="0"/>
+              </a:rPr>
+              <a:t>    </a:t>
+            </a:r>
+            <a:r>
+              <a:rPr lang="en-US" altLang="zh-TW" sz="1200" dirty="0">
+                <a:solidFill>
+                  <a:srgbClr val="FFFFFF"/>
+                </a:solidFill>
+                <a:effectLst/>
+                <a:latin typeface="Courier New" panose="02070309020205020404" pitchFamily="49" charset="0"/>
+              </a:rPr>
+              <a:t>ingress_list</a:t>
+            </a:r>
+            <a:r>
+              <a:rPr lang="en-US" altLang="zh-TW" sz="1200" dirty="0">
+                <a:solidFill>
+                  <a:srgbClr val="FFAA00"/>
+                </a:solidFill>
+                <a:effectLst/>
+                <a:latin typeface="Courier New" panose="02070309020205020404" pitchFamily="49" charset="0"/>
+              </a:rPr>
+              <a:t>.</a:t>
+            </a:r>
+            <a:r>
+              <a:rPr lang="en-US" altLang="zh-TW" sz="1200" dirty="0">
+                <a:solidFill>
+                  <a:srgbClr val="FFFFFF"/>
+                </a:solidFill>
+                <a:effectLst/>
+                <a:latin typeface="Courier New" panose="02070309020205020404" pitchFamily="49" charset="0"/>
+              </a:rPr>
+              <a:t>push_back</a:t>
+            </a:r>
+            <a:r>
+              <a:rPr lang="en-US" altLang="zh-TW" sz="1200" dirty="0">
+                <a:solidFill>
+                  <a:srgbClr val="FFAA00"/>
+                </a:solidFill>
+                <a:effectLst/>
+                <a:latin typeface="Courier New" panose="02070309020205020404" pitchFamily="49" charset="0"/>
+              </a:rPr>
+              <a:t>(</a:t>
+            </a:r>
+            <a:r>
+              <a:rPr lang="en-US" altLang="zh-TW" sz="1200" dirty="0">
+                <a:solidFill>
+                  <a:srgbClr val="FFFFFF"/>
+                </a:solidFill>
+                <a:effectLst/>
+                <a:latin typeface="Courier New" panose="02070309020205020404" pitchFamily="49" charset="0"/>
+              </a:rPr>
+              <a:t>t</a:t>
+            </a:r>
+            <a:r>
+              <a:rPr lang="en-US" altLang="zh-TW" sz="1200" dirty="0">
+                <a:solidFill>
+                  <a:srgbClr val="FFAA00"/>
+                </a:solidFill>
+                <a:effectLst/>
+                <a:latin typeface="Courier New" panose="02070309020205020404" pitchFamily="49" charset="0"/>
+              </a:rPr>
+              <a:t>);</a:t>
+            </a:r>
+            <a:endParaRPr lang="en-US" altLang="zh-TW" sz="1200" dirty="0">
+              <a:solidFill>
+                <a:srgbClr val="F8F8F8"/>
+              </a:solidFill>
+              <a:effectLst/>
+              <a:latin typeface="Courier New" panose="02070309020205020404" pitchFamily="49" charset="0"/>
+            </a:endParaRPr>
+          </a:p>
+          <a:p>
+            <a:pPr>
+              <a:buNone/>
+            </a:pPr>
+            <a:r>
+              <a:rPr lang="en-US" altLang="zh-TW" sz="1200" dirty="0">
+                <a:solidFill>
+                  <a:srgbClr val="F8F8F8"/>
+                </a:solidFill>
+                <a:effectLst/>
+                <a:latin typeface="Courier New" panose="02070309020205020404" pitchFamily="49" charset="0"/>
+              </a:rPr>
+              <a:t>  </a:t>
+            </a:r>
+            <a:r>
+              <a:rPr lang="en-US" altLang="zh-TW" sz="1200" dirty="0">
+                <a:solidFill>
+                  <a:srgbClr val="F6F080"/>
+                </a:solidFill>
+                <a:effectLst/>
+                <a:latin typeface="Courier New" panose="02070309020205020404" pitchFamily="49" charset="0"/>
+              </a:rPr>
+              <a:t>endfunction</a:t>
+            </a:r>
+          </a:p>
+          <a:p>
+            <a:pPr>
+              <a:buNone/>
+            </a:pPr>
+            <a:endParaRPr lang="en-US" altLang="zh-TW" sz="1200" dirty="0">
+              <a:solidFill>
+                <a:srgbClr val="F8F8F8"/>
+              </a:solidFill>
+              <a:effectLst/>
+              <a:latin typeface="Courier New" panose="02070309020205020404" pitchFamily="49" charset="0"/>
+            </a:endParaRPr>
+          </a:p>
+          <a:p>
+            <a:pPr>
+              <a:buNone/>
+            </a:pPr>
+            <a:r>
+              <a:rPr lang="en-US" altLang="zh-TW" sz="1200" dirty="0">
+                <a:solidFill>
+                  <a:srgbClr val="F8F8F8"/>
+                </a:solidFill>
+                <a:effectLst/>
+                <a:latin typeface="Courier New" panose="02070309020205020404" pitchFamily="49" charset="0"/>
+              </a:rPr>
+              <a:t>  </a:t>
+            </a:r>
+            <a:r>
+              <a:rPr lang="en-US" altLang="zh-TW" sz="1200" dirty="0">
+                <a:solidFill>
+                  <a:srgbClr val="F6F080"/>
+                </a:solidFill>
+                <a:effectLst/>
+                <a:latin typeface="Courier New" panose="02070309020205020404" pitchFamily="49" charset="0"/>
+              </a:rPr>
+              <a:t>function</a:t>
+            </a:r>
+            <a:r>
+              <a:rPr lang="en-US" altLang="zh-TW" sz="1200" dirty="0">
+                <a:solidFill>
+                  <a:srgbClr val="F8F8F8"/>
+                </a:solidFill>
+                <a:effectLst/>
+                <a:latin typeface="Courier New" panose="02070309020205020404" pitchFamily="49" charset="0"/>
+              </a:rPr>
+              <a:t> </a:t>
+            </a:r>
+            <a:r>
+              <a:rPr lang="en-US" altLang="zh-TW" sz="1200" dirty="0">
+                <a:solidFill>
+                  <a:srgbClr val="F6F080"/>
+                </a:solidFill>
+                <a:effectLst/>
+                <a:latin typeface="Courier New" panose="02070309020205020404" pitchFamily="49" charset="0"/>
+              </a:rPr>
+              <a:t>void</a:t>
+            </a:r>
+            <a:r>
+              <a:rPr lang="en-US" altLang="zh-TW" sz="1200" dirty="0">
+                <a:solidFill>
+                  <a:srgbClr val="F8F8F8"/>
+                </a:solidFill>
+                <a:effectLst/>
+                <a:latin typeface="Courier New" panose="02070309020205020404" pitchFamily="49" charset="0"/>
+              </a:rPr>
+              <a:t> </a:t>
+            </a:r>
+            <a:r>
+              <a:rPr lang="en-US" altLang="zh-TW" sz="1200" dirty="0">
+                <a:solidFill>
+                  <a:srgbClr val="FFFFFF"/>
+                </a:solidFill>
+                <a:effectLst/>
+                <a:latin typeface="Courier New" panose="02070309020205020404" pitchFamily="49" charset="0"/>
+              </a:rPr>
+              <a:t>write_egress</a:t>
+            </a:r>
+            <a:r>
+              <a:rPr lang="en-US" altLang="zh-TW" sz="1200" dirty="0">
+                <a:solidFill>
+                  <a:srgbClr val="F8F8F8"/>
+                </a:solidFill>
+                <a:effectLst/>
+                <a:latin typeface="Courier New" panose="02070309020205020404" pitchFamily="49" charset="0"/>
+              </a:rPr>
+              <a:t> </a:t>
+            </a:r>
+            <a:r>
+              <a:rPr lang="en-US" altLang="zh-TW" sz="1200" dirty="0">
+                <a:solidFill>
+                  <a:srgbClr val="FFAA00"/>
+                </a:solidFill>
+                <a:effectLst/>
+                <a:latin typeface="Courier New" panose="02070309020205020404" pitchFamily="49" charset="0"/>
+              </a:rPr>
+              <a:t>(</a:t>
+            </a:r>
+            <a:r>
+              <a:rPr lang="en-US" altLang="zh-TW" sz="1200" dirty="0">
+                <a:solidFill>
+                  <a:srgbClr val="FFFFFF"/>
+                </a:solidFill>
+                <a:effectLst/>
+                <a:latin typeface="Courier New" panose="02070309020205020404" pitchFamily="49" charset="0"/>
+              </a:rPr>
+              <a:t>mydata</a:t>
+            </a:r>
+            <a:r>
+              <a:rPr lang="en-US" altLang="zh-TW" sz="1200" dirty="0">
+                <a:solidFill>
+                  <a:srgbClr val="F8F8F8"/>
+                </a:solidFill>
+                <a:effectLst/>
+                <a:latin typeface="Courier New" panose="02070309020205020404" pitchFamily="49" charset="0"/>
+              </a:rPr>
+              <a:t> </a:t>
+            </a:r>
+            <a:r>
+              <a:rPr lang="en-US" altLang="zh-TW" sz="1200" dirty="0">
+                <a:solidFill>
+                  <a:srgbClr val="FFFFFF"/>
+                </a:solidFill>
+                <a:effectLst/>
+                <a:latin typeface="Courier New" panose="02070309020205020404" pitchFamily="49" charset="0"/>
+              </a:rPr>
+              <a:t>t</a:t>
+            </a:r>
+            <a:r>
+              <a:rPr lang="en-US" altLang="zh-TW" sz="1200" dirty="0">
+                <a:solidFill>
+                  <a:srgbClr val="FFAA00"/>
+                </a:solidFill>
+                <a:effectLst/>
+                <a:latin typeface="Courier New" panose="02070309020205020404" pitchFamily="49" charset="0"/>
+              </a:rPr>
+              <a:t>);</a:t>
+            </a:r>
+            <a:endParaRPr lang="en-US" altLang="zh-TW" sz="1200" dirty="0">
+              <a:solidFill>
+                <a:srgbClr val="F8F8F8"/>
+              </a:solidFill>
+              <a:effectLst/>
+              <a:latin typeface="Courier New" panose="02070309020205020404" pitchFamily="49" charset="0"/>
+            </a:endParaRPr>
+          </a:p>
+          <a:p>
+            <a:pPr>
+              <a:buNone/>
+            </a:pPr>
+            <a:r>
+              <a:rPr lang="en-US" altLang="zh-TW" sz="1200" dirty="0">
+                <a:solidFill>
+                  <a:srgbClr val="F8F8F8"/>
+                </a:solidFill>
+                <a:effectLst/>
+                <a:latin typeface="Courier New" panose="02070309020205020404" pitchFamily="49" charset="0"/>
+              </a:rPr>
+              <a:t>    </a:t>
+            </a:r>
+            <a:r>
+              <a:rPr lang="en-US" altLang="zh-TW" sz="1200" dirty="0">
+                <a:solidFill>
+                  <a:srgbClr val="FFFFFF"/>
+                </a:solidFill>
+                <a:effectLst/>
+                <a:latin typeface="Courier New" panose="02070309020205020404" pitchFamily="49" charset="0"/>
+              </a:rPr>
+              <a:t>find_match_in_ingress_list</a:t>
+            </a:r>
+            <a:r>
+              <a:rPr lang="en-US" altLang="zh-TW" sz="1200" dirty="0">
+                <a:solidFill>
+                  <a:srgbClr val="FFAA00"/>
+                </a:solidFill>
+                <a:effectLst/>
+                <a:latin typeface="Courier New" panose="02070309020205020404" pitchFamily="49" charset="0"/>
+              </a:rPr>
+              <a:t>(</a:t>
+            </a:r>
+            <a:r>
+              <a:rPr lang="en-US" altLang="zh-TW" sz="1200" dirty="0">
+                <a:solidFill>
+                  <a:srgbClr val="FFFFFF"/>
+                </a:solidFill>
+                <a:effectLst/>
+                <a:latin typeface="Courier New" panose="02070309020205020404" pitchFamily="49" charset="0"/>
+              </a:rPr>
+              <a:t>t</a:t>
+            </a:r>
+            <a:r>
+              <a:rPr lang="en-US" altLang="zh-TW" sz="1200" dirty="0">
+                <a:solidFill>
+                  <a:srgbClr val="FFAA00"/>
+                </a:solidFill>
+                <a:effectLst/>
+                <a:latin typeface="Courier New" panose="02070309020205020404" pitchFamily="49" charset="0"/>
+              </a:rPr>
+              <a:t>);</a:t>
+            </a:r>
+            <a:endParaRPr lang="en-US" altLang="zh-TW" sz="1200" dirty="0">
+              <a:solidFill>
+                <a:srgbClr val="F8F8F8"/>
+              </a:solidFill>
+              <a:effectLst/>
+              <a:latin typeface="Courier New" panose="02070309020205020404" pitchFamily="49" charset="0"/>
+            </a:endParaRPr>
+          </a:p>
+          <a:p>
+            <a:pPr>
+              <a:buNone/>
+            </a:pPr>
+            <a:r>
+              <a:rPr lang="en-US" altLang="zh-TW" sz="1200" dirty="0">
+                <a:solidFill>
+                  <a:srgbClr val="F8F8F8"/>
+                </a:solidFill>
+                <a:effectLst/>
+                <a:latin typeface="Courier New" panose="02070309020205020404" pitchFamily="49" charset="0"/>
+              </a:rPr>
+              <a:t>  </a:t>
+            </a:r>
+            <a:r>
+              <a:rPr lang="en-US" altLang="zh-TW" sz="1200" dirty="0">
+                <a:solidFill>
+                  <a:srgbClr val="F6F080"/>
+                </a:solidFill>
+                <a:effectLst/>
+                <a:latin typeface="Courier New" panose="02070309020205020404" pitchFamily="49" charset="0"/>
+              </a:rPr>
+              <a:t>endfunction</a:t>
+            </a:r>
+          </a:p>
+          <a:p>
+            <a:pPr>
+              <a:buNone/>
+            </a:pPr>
+            <a:endParaRPr lang="en-US" altLang="zh-TW" sz="1200" dirty="0">
+              <a:solidFill>
+                <a:srgbClr val="F8F8F8"/>
+              </a:solidFill>
+              <a:effectLst/>
+              <a:latin typeface="Courier New" panose="02070309020205020404" pitchFamily="49" charset="0"/>
+            </a:endParaRPr>
+          </a:p>
+          <a:p>
+            <a:pPr>
+              <a:buNone/>
+            </a:pPr>
+            <a:r>
+              <a:rPr lang="en-US" altLang="zh-TW" sz="1200" dirty="0">
+                <a:solidFill>
+                  <a:srgbClr val="F8F8F8"/>
+                </a:solidFill>
+                <a:effectLst/>
+                <a:latin typeface="Courier New" panose="02070309020205020404" pitchFamily="49" charset="0"/>
+              </a:rPr>
+              <a:t>  </a:t>
+            </a:r>
+            <a:r>
+              <a:rPr lang="en-US" altLang="zh-TW" sz="1200" dirty="0">
+                <a:solidFill>
+                  <a:srgbClr val="F6F080"/>
+                </a:solidFill>
+                <a:effectLst/>
+                <a:latin typeface="Courier New" panose="02070309020205020404" pitchFamily="49" charset="0"/>
+              </a:rPr>
+              <a:t>function</a:t>
+            </a:r>
+            <a:r>
+              <a:rPr lang="en-US" altLang="zh-TW" sz="1200" dirty="0">
+                <a:solidFill>
+                  <a:srgbClr val="F8F8F8"/>
+                </a:solidFill>
+                <a:effectLst/>
+                <a:latin typeface="Courier New" panose="02070309020205020404" pitchFamily="49" charset="0"/>
+              </a:rPr>
+              <a:t> </a:t>
+            </a:r>
+            <a:r>
+              <a:rPr lang="en-US" altLang="zh-TW" sz="1200" dirty="0">
+                <a:solidFill>
+                  <a:srgbClr val="F6F080"/>
+                </a:solidFill>
+                <a:effectLst/>
+                <a:latin typeface="Courier New" panose="02070309020205020404" pitchFamily="49" charset="0"/>
+              </a:rPr>
+              <a:t>void</a:t>
+            </a:r>
+            <a:r>
+              <a:rPr lang="en-US" altLang="zh-TW" sz="1200" dirty="0">
+                <a:solidFill>
+                  <a:srgbClr val="F8F8F8"/>
+                </a:solidFill>
+                <a:effectLst/>
+                <a:latin typeface="Courier New" panose="02070309020205020404" pitchFamily="49" charset="0"/>
+              </a:rPr>
+              <a:t> </a:t>
+            </a:r>
+            <a:r>
+              <a:rPr lang="en-US" altLang="zh-TW" sz="1200" dirty="0">
+                <a:solidFill>
+                  <a:srgbClr val="FFFFFF"/>
+                </a:solidFill>
+                <a:effectLst/>
+                <a:latin typeface="Courier New" panose="02070309020205020404" pitchFamily="49" charset="0"/>
+              </a:rPr>
+              <a:t>find_match_in_ingress_list</a:t>
+            </a:r>
+            <a:r>
+              <a:rPr lang="en-US" altLang="zh-TW" sz="1200" dirty="0">
+                <a:solidFill>
+                  <a:srgbClr val="F8F8F8"/>
+                </a:solidFill>
+                <a:effectLst/>
+                <a:latin typeface="Courier New" panose="02070309020205020404" pitchFamily="49" charset="0"/>
+              </a:rPr>
+              <a:t> </a:t>
+            </a:r>
+            <a:r>
+              <a:rPr lang="en-US" altLang="zh-TW" sz="1200" dirty="0">
+                <a:solidFill>
+                  <a:srgbClr val="FFAA00"/>
+                </a:solidFill>
+                <a:effectLst/>
+                <a:latin typeface="Courier New" panose="02070309020205020404" pitchFamily="49" charset="0"/>
+              </a:rPr>
+              <a:t>(</a:t>
+            </a:r>
+            <a:r>
+              <a:rPr lang="en-US" altLang="zh-TW" sz="1200" dirty="0">
+                <a:solidFill>
+                  <a:srgbClr val="FFFFFF"/>
+                </a:solidFill>
+                <a:effectLst/>
+                <a:latin typeface="Courier New" panose="02070309020205020404" pitchFamily="49" charset="0"/>
+              </a:rPr>
+              <a:t>mydata</a:t>
+            </a:r>
+            <a:r>
+              <a:rPr lang="en-US" altLang="zh-TW" sz="1200" dirty="0">
+                <a:solidFill>
+                  <a:srgbClr val="F8F8F8"/>
+                </a:solidFill>
+                <a:effectLst/>
+                <a:latin typeface="Courier New" panose="02070309020205020404" pitchFamily="49" charset="0"/>
+              </a:rPr>
+              <a:t> </a:t>
+            </a:r>
+            <a:r>
+              <a:rPr lang="en-US" altLang="zh-TW" sz="1200" dirty="0">
+                <a:solidFill>
+                  <a:srgbClr val="FFFFFF"/>
+                </a:solidFill>
+                <a:effectLst/>
+                <a:latin typeface="Courier New" panose="02070309020205020404" pitchFamily="49" charset="0"/>
+              </a:rPr>
+              <a:t>t</a:t>
+            </a:r>
+            <a:r>
+              <a:rPr lang="en-US" altLang="zh-TW" sz="1200" dirty="0">
+                <a:solidFill>
+                  <a:srgbClr val="FFAA00"/>
+                </a:solidFill>
+                <a:effectLst/>
+                <a:latin typeface="Courier New" panose="02070309020205020404" pitchFamily="49" charset="0"/>
+              </a:rPr>
+              <a:t>);</a:t>
+            </a:r>
+            <a:endParaRPr lang="en-US" altLang="zh-TW" sz="1200" dirty="0">
+              <a:solidFill>
+                <a:srgbClr val="F8F8F8"/>
+              </a:solidFill>
+              <a:effectLst/>
+              <a:latin typeface="Courier New" panose="02070309020205020404" pitchFamily="49" charset="0"/>
+            </a:endParaRPr>
+          </a:p>
+          <a:p>
+            <a:pPr>
+              <a:buNone/>
+            </a:pPr>
+            <a:r>
+              <a:rPr lang="en-US" altLang="zh-TW" sz="1200" dirty="0">
+                <a:solidFill>
+                  <a:srgbClr val="F8F8F8"/>
+                </a:solidFill>
+                <a:effectLst/>
+                <a:latin typeface="Courier New" panose="02070309020205020404" pitchFamily="49" charset="0"/>
+              </a:rPr>
+              <a:t>    </a:t>
+            </a:r>
+            <a:r>
+              <a:rPr lang="en-US" altLang="zh-TW" sz="1200" dirty="0">
+                <a:solidFill>
+                  <a:srgbClr val="00FF80"/>
+                </a:solidFill>
+                <a:effectLst/>
+                <a:latin typeface="Courier New" panose="02070309020205020404" pitchFamily="49" charset="0"/>
+              </a:rPr>
+              <a:t>// implement scoreboarding for this particular dut</a:t>
+            </a:r>
+          </a:p>
+          <a:p>
+            <a:pPr>
+              <a:buNone/>
+            </a:pPr>
+            <a:r>
+              <a:rPr lang="en-US" altLang="zh-TW" sz="1200" dirty="0">
+                <a:solidFill>
+                  <a:srgbClr val="F8F8F8"/>
+                </a:solidFill>
+                <a:effectLst/>
+                <a:latin typeface="Courier New" panose="02070309020205020404" pitchFamily="49" charset="0"/>
+              </a:rPr>
+              <a:t>  </a:t>
+            </a:r>
+            <a:r>
+              <a:rPr lang="en-US" altLang="zh-TW" sz="1200" dirty="0">
+                <a:solidFill>
+                  <a:srgbClr val="F6F080"/>
+                </a:solidFill>
+                <a:effectLst/>
+                <a:latin typeface="Courier New" panose="02070309020205020404" pitchFamily="49" charset="0"/>
+              </a:rPr>
+              <a:t>endfunction</a:t>
+            </a:r>
+            <a:endParaRPr lang="en-US" altLang="zh-TW" sz="1200" dirty="0">
+              <a:solidFill>
+                <a:srgbClr val="F8F8F8"/>
+              </a:solidFill>
+              <a:effectLst/>
+              <a:latin typeface="Courier New" panose="02070309020205020404" pitchFamily="49" charset="0"/>
+            </a:endParaRPr>
+          </a:p>
+          <a:p>
+            <a:pPr>
+              <a:buNone/>
+            </a:pPr>
+            <a:r>
+              <a:rPr lang="en-US" altLang="zh-TW" sz="1200" dirty="0">
+                <a:solidFill>
+                  <a:srgbClr val="F6F080"/>
+                </a:solidFill>
+                <a:effectLst/>
+                <a:latin typeface="Courier New" panose="02070309020205020404" pitchFamily="49" charset="0"/>
+              </a:rPr>
+              <a:t>endclass</a:t>
+            </a:r>
+            <a:endParaRPr lang="en-US" altLang="zh-TW" sz="1200" dirty="0">
+              <a:solidFill>
+                <a:srgbClr val="BDAE9D"/>
+              </a:solidFill>
+              <a:effectLst/>
+              <a:latin typeface="Courier New" panose="02070309020205020404" pitchFamily="49" charset="0"/>
+            </a:endParaRPr>
+          </a:p>
+        </p:txBody>
+      </p:sp>
     </p:spTree>
     <p:extLst>
       <p:ext uri="{BB962C8B-B14F-4D97-AF65-F5344CB8AC3E}">
@@ -16335,7 +19257,13 @@
           <p:cNvGraphicFramePr>
             <a:graphicFrameLocks noGrp="1"/>
           </p:cNvGraphicFramePr>
-          <p:nvPr/>
+          <p:nvPr>
+            <p:extLst>
+              <p:ext uri="{D42A27DB-BD31-4B8C-83A1-F6EECF244321}">
+                <p14:modId xmlns:p14="http://schemas.microsoft.com/office/powerpoint/2010/main" val="1560571834"/>
+              </p:ext>
+            </p:extLst>
+          </p:nvPr>
         </p:nvGraphicFramePr>
         <p:xfrm>
           <a:off x="270000" y="2281828"/>
@@ -16496,10 +19424,10 @@
                     <a:p>
                       <a:pPr algn="ctr" fontAlgn="ctr"/>
                       <a:r>
-                        <a:rPr lang="en-US" sz="1100" b="1" u="none" strike="noStrike" dirty="0">
+                        <a:rPr lang="en-US" sz="1100" b="1" u="none" strike="noStrike" dirty="0" err="1">
                           <a:effectLst/>
                         </a:rPr>
-                        <a:t>try_ put</a:t>
+                        <a:t>try_put</a:t>
                       </a:r>
                       <a:endParaRPr lang="en-US" sz="1100" b="1" i="0" u="none" strike="noStrike" dirty="0">
                         <a:solidFill>
@@ -16527,10 +19455,10 @@
                     <a:p>
                       <a:pPr algn="ctr" fontAlgn="ctr"/>
                       <a:r>
-                        <a:rPr lang="en-US" sz="1100" b="1" u="none" strike="noStrike" dirty="0">
+                        <a:rPr lang="en-US" sz="1100" b="1" u="none" strike="noStrike" dirty="0" err="1">
                           <a:effectLst/>
                         </a:rPr>
-                        <a:t>can_ put</a:t>
+                        <a:t>can_put</a:t>
                       </a:r>
                       <a:endParaRPr lang="en-US" sz="1100" b="1" i="0" u="none" strike="noStrike" dirty="0">
                         <a:solidFill>
@@ -16589,10 +19517,10 @@
                     <a:p>
                       <a:pPr algn="ctr" fontAlgn="ctr"/>
                       <a:r>
-                        <a:rPr lang="en-US" sz="1100" b="1" u="none" strike="noStrike" dirty="0">
+                        <a:rPr lang="en-US" sz="1100" b="1" u="none" strike="noStrike" dirty="0" err="1">
                           <a:effectLst/>
                         </a:rPr>
-                        <a:t>try_ get</a:t>
+                        <a:t>try_get</a:t>
                       </a:r>
                       <a:endParaRPr lang="en-US" sz="1100" b="1" i="0" u="none" strike="noStrike" dirty="0">
                         <a:solidFill>
@@ -16620,10 +19548,10 @@
                     <a:p>
                       <a:pPr algn="ctr" fontAlgn="ctr"/>
                       <a:r>
-                        <a:rPr lang="en-US" sz="1100" b="1" u="none" strike="noStrike" dirty="0">
+                        <a:rPr lang="en-US" sz="1100" b="1" u="none" strike="noStrike" dirty="0" err="1">
                           <a:effectLst/>
                         </a:rPr>
-                        <a:t>can_ get</a:t>
+                        <a:t>can_get</a:t>
                       </a:r>
                       <a:endParaRPr lang="en-US" sz="1100" b="1" i="0" u="none" strike="noStrike" dirty="0">
                         <a:solidFill>
@@ -16685,7 +19613,7 @@
                         <a:rPr lang="en-US" sz="1100" b="1" u="none" strike="noStrike" dirty="0">
                           <a:effectLst/>
                         </a:rPr>
-                        <a:t>try_ peek</a:t>
+                        <a:t>try_peek</a:t>
                       </a:r>
                       <a:endParaRPr lang="en-US" sz="1100" b="1" i="0" u="none" strike="noStrike" dirty="0">
                         <a:solidFill>
@@ -16713,10 +19641,10 @@
                     <a:p>
                       <a:pPr algn="ctr" fontAlgn="ctr"/>
                       <a:r>
-                        <a:rPr lang="en-US" sz="1100" b="1" u="none" strike="noStrike" dirty="0">
+                        <a:rPr lang="en-US" sz="1100" b="1" u="none" strike="noStrike" dirty="0" err="1">
                           <a:effectLst/>
                         </a:rPr>
-                        <a:t>can_ peek</a:t>
+                        <a:t>can_peek</a:t>
                       </a:r>
                       <a:endParaRPr lang="en-US" sz="1100" b="1" i="0" u="none" strike="noStrike" dirty="0">
                         <a:solidFill>
@@ -16782,22 +19710,10 @@
                     <a:p>
                       <a:pPr algn="l" fontAlgn="ctr"/>
                       <a:r>
-                        <a:rPr lang="en-US" sz="1100" u="none" strike="noStrike" dirty="0" err="1">
-                          <a:effectLst/>
-                        </a:rPr>
-                        <a:t>uvm_blocking</a:t>
-                      </a:r>
-                      <a:r>
                         <a:rPr lang="en-US" sz="1100" u="none" strike="noStrike" dirty="0">
                           <a:effectLst/>
                         </a:rPr>
-                        <a:t>_ </a:t>
-                      </a:r>
-                      <a:r>
-                        <a:rPr lang="en-US" sz="1100" u="none" strike="noStrike" dirty="0" err="1">
-                          <a:effectLst/>
-                        </a:rPr>
-                        <a:t>put_port</a:t>
+                        <a:t>uvm_blocking_put_port</a:t>
                       </a:r>
                       <a:endParaRPr lang="en-US" sz="1100" b="0" i="0" u="none" strike="noStrike" dirty="0">
                         <a:solidFill>
@@ -16828,7 +19744,7 @@
                         <a:rPr lang="en-US" sz="1100" u="none" strike="noStrike" dirty="0">
                           <a:effectLst/>
                         </a:rPr>
-                        <a:t>X</a:t>
+                        <a:t>V</a:t>
                       </a:r>
                       <a:endParaRPr lang="en-US" sz="1100" b="0" i="0" u="none" strike="noStrike" dirty="0">
                         <a:solidFill>
@@ -17088,22 +20004,10 @@
                     <a:p>
                       <a:pPr algn="l" fontAlgn="ctr"/>
                       <a:r>
-                        <a:rPr lang="en-US" sz="1100" u="none" strike="noStrike" dirty="0" err="1">
-                          <a:effectLst/>
-                        </a:rPr>
-                        <a:t>uvm_nonblocking</a:t>
-                      </a:r>
-                      <a:r>
                         <a:rPr lang="en-US" sz="1100" u="none" strike="noStrike" dirty="0">
                           <a:effectLst/>
                         </a:rPr>
-                        <a:t>_ </a:t>
-                      </a:r>
-                      <a:r>
-                        <a:rPr lang="en-US" sz="1100" u="none" strike="noStrike" dirty="0" err="1">
-                          <a:effectLst/>
-                        </a:rPr>
-                        <a:t>put_port</a:t>
+                        <a:t>uvm_nonblocking_put_port</a:t>
                       </a:r>
                       <a:endParaRPr lang="en-US" sz="1100" b="0" i="0" u="none" strike="noStrike" dirty="0">
                         <a:solidFill>
@@ -17156,12 +20060,12 @@
                     <a:p>
                       <a:pPr algn="ctr" fontAlgn="ctr"/>
                       <a:r>
-                        <a:rPr lang="en-US" sz="1100" u="none" strike="noStrike">
+                        <a:rPr lang="en-US" sz="1100" u="none" strike="noStrike" dirty="0">
                           <a:effectLst/>
                         </a:rPr>
-                        <a:t>X</a:t>
+                        <a:t>V</a:t>
                       </a:r>
-                      <a:endParaRPr lang="en-US" sz="1100" b="0" i="0" u="none" strike="noStrike">
+                      <a:endParaRPr lang="en-US" sz="1100" b="0" i="0" u="none" strike="noStrike" dirty="0">
                         <a:solidFill>
                           <a:srgbClr val="000000"/>
                         </a:solidFill>
@@ -17187,12 +20091,12 @@
                     <a:p>
                       <a:pPr algn="ctr" fontAlgn="ctr"/>
                       <a:r>
-                        <a:rPr lang="en-US" sz="1100" u="none" strike="noStrike">
+                        <a:rPr lang="en-US" sz="1100" u="none" strike="noStrike" dirty="0">
                           <a:effectLst/>
                         </a:rPr>
-                        <a:t>X</a:t>
+                        <a:t>V</a:t>
                       </a:r>
-                      <a:endParaRPr lang="en-US" sz="1100" b="0" i="0" u="none" strike="noStrike">
+                      <a:endParaRPr lang="en-US" sz="1100" b="0" i="0" u="none" strike="noStrike" dirty="0">
                         <a:solidFill>
                           <a:srgbClr val="000000"/>
                         </a:solidFill>
@@ -17400,7 +20304,7 @@
                     <a:p>
                       <a:pPr algn="l" fontAlgn="ctr"/>
                       <a:r>
-                        <a:rPr lang="en-US" sz="1100" u="none" strike="noStrike" dirty="0" err="1">
+                        <a:rPr lang="en-US" sz="1100" u="none" strike="noStrike" dirty="0">
                           <a:effectLst/>
                         </a:rPr>
                         <a:t>uvm_put_port</a:t>
@@ -17434,7 +20338,7 @@
                         <a:rPr lang="en-US" sz="1100" u="none" strike="noStrike" dirty="0">
                           <a:effectLst/>
                         </a:rPr>
-                        <a:t>X</a:t>
+                        <a:t>V</a:t>
                       </a:r>
                       <a:endParaRPr lang="en-US" sz="1100" b="0" i="0" u="none" strike="noStrike" dirty="0">
                         <a:solidFill>
@@ -17462,12 +20366,12 @@
                     <a:p>
                       <a:pPr algn="ctr" fontAlgn="ctr"/>
                       <a:r>
-                        <a:rPr lang="en-US" sz="1100" u="none" strike="noStrike">
+                        <a:rPr lang="en-US" sz="1100" u="none" strike="noStrike" dirty="0">
                           <a:effectLst/>
                         </a:rPr>
-                        <a:t>X</a:t>
+                        <a:t>V</a:t>
                       </a:r>
-                      <a:endParaRPr lang="en-US" sz="1100" b="0" i="0" u="none" strike="noStrike">
+                      <a:endParaRPr lang="en-US" sz="1100" b="0" i="0" u="none" strike="noStrike" dirty="0">
                         <a:solidFill>
                           <a:srgbClr val="000000"/>
                         </a:solidFill>
@@ -17493,12 +20397,12 @@
                     <a:p>
                       <a:pPr algn="ctr" fontAlgn="ctr"/>
                       <a:r>
-                        <a:rPr lang="en-US" sz="1100" u="none" strike="noStrike">
+                        <a:rPr lang="en-US" sz="1100" u="none" strike="noStrike" dirty="0">
                           <a:effectLst/>
                         </a:rPr>
-                        <a:t>X</a:t>
+                        <a:t>V</a:t>
                       </a:r>
-                      <a:endParaRPr lang="en-US" sz="1100" b="0" i="0" u="none" strike="noStrike">
+                      <a:endParaRPr lang="en-US" sz="1100" b="0" i="0" u="none" strike="noStrike" dirty="0">
                         <a:solidFill>
                           <a:srgbClr val="000000"/>
                         </a:solidFill>
@@ -17706,12 +20610,12 @@
                     <a:p>
                       <a:pPr algn="l" fontAlgn="ctr"/>
                       <a:r>
-                        <a:rPr lang="en-US" sz="1100" u="none" strike="noStrike">
+                        <a:rPr lang="en-US" sz="1100" u="none" strike="noStrike" dirty="0" err="1">
                           <a:effectLst/>
                         </a:rPr>
-                        <a:t>uvm_blocking_ get_port</a:t>
+                        <a:t>uvm_blocking_get_port</a:t>
                       </a:r>
-                      <a:endParaRPr lang="en-US" sz="1100" b="0" i="0" u="none" strike="noStrike">
+                      <a:endParaRPr lang="en-US" sz="1100" b="0" i="0" u="none" strike="noStrike" dirty="0">
                         <a:solidFill>
                           <a:srgbClr val="000000"/>
                         </a:solidFill>
@@ -17812,12 +20716,12 @@
                     <a:p>
                       <a:pPr algn="ctr" fontAlgn="ctr"/>
                       <a:r>
-                        <a:rPr lang="en-US" sz="1100" u="none" strike="noStrike">
+                        <a:rPr lang="en-US" sz="1100" u="none" strike="noStrike" dirty="0">
                           <a:effectLst/>
                         </a:rPr>
-                        <a:t>X</a:t>
+                        <a:t>V</a:t>
                       </a:r>
-                      <a:endParaRPr lang="en-US" sz="1100" b="0" i="0" u="none" strike="noStrike">
+                      <a:endParaRPr lang="en-US" sz="1100" b="0" i="0" u="none" strike="noStrike" dirty="0">
                         <a:solidFill>
                           <a:srgbClr val="000000"/>
                         </a:solidFill>
@@ -18000,12 +20904,12 @@
                     <a:p>
                       <a:pPr algn="l" fontAlgn="ctr"/>
                       <a:r>
-                        <a:rPr lang="en-US" sz="1100" u="none" strike="noStrike">
+                        <a:rPr lang="en-US" sz="1100" u="none" strike="noStrike" dirty="0" err="1">
                           <a:effectLst/>
                         </a:rPr>
-                        <a:t>uvm_nonblocking_ get_port</a:t>
+                        <a:t>uvm_nonblocking_get_port</a:t>
                       </a:r>
-                      <a:endParaRPr lang="en-US" sz="1100" b="0" i="0" u="none" strike="noStrike">
+                      <a:endParaRPr lang="en-US" sz="1100" b="0" i="0" u="none" strike="noStrike" dirty="0">
                         <a:solidFill>
                           <a:srgbClr val="000000"/>
                         </a:solidFill>
@@ -18134,7 +21038,7 @@
                         <a:rPr lang="en-US" sz="1100" u="none" strike="noStrike" dirty="0">
                           <a:effectLst/>
                         </a:rPr>
-                        <a:t>X</a:t>
+                        <a:t>V</a:t>
                       </a:r>
                       <a:endParaRPr lang="en-US" sz="1100" b="0" i="0" u="none" strike="noStrike" dirty="0">
                         <a:solidFill>
@@ -18165,7 +21069,7 @@
                         <a:rPr lang="en-US" sz="1100" u="none" strike="noStrike" dirty="0">
                           <a:effectLst/>
                         </a:rPr>
-                        <a:t>X</a:t>
+                        <a:t>V</a:t>
                       </a:r>
                       <a:endParaRPr lang="en-US" sz="1100" b="0" i="0" u="none" strike="noStrike" dirty="0">
                         <a:solidFill>
@@ -18406,12 +21310,12 @@
                     <a:p>
                       <a:pPr algn="ctr" fontAlgn="ctr"/>
                       <a:r>
-                        <a:rPr lang="en-US" sz="1100" u="none" strike="noStrike">
+                        <a:rPr lang="en-US" sz="1100" u="none" strike="noStrike" dirty="0">
                           <a:effectLst/>
                         </a:rPr>
-                        <a:t>X</a:t>
+                        <a:t>V</a:t>
                       </a:r>
-                      <a:endParaRPr lang="en-US" sz="1100" b="0" i="0" u="none" strike="noStrike">
+                      <a:endParaRPr lang="en-US" sz="1100" b="0" i="0" u="none" strike="noStrike" dirty="0">
                         <a:solidFill>
                           <a:srgbClr val="000000"/>
                         </a:solidFill>
@@ -18437,12 +21341,12 @@
                     <a:p>
                       <a:pPr algn="ctr" fontAlgn="ctr"/>
                       <a:r>
-                        <a:rPr lang="en-US" sz="1100" u="none" strike="noStrike">
+                        <a:rPr lang="en-US" sz="1100" u="none" strike="noStrike" dirty="0">
                           <a:effectLst/>
                         </a:rPr>
-                        <a:t>X</a:t>
+                        <a:t>V</a:t>
                       </a:r>
-                      <a:endParaRPr lang="en-US" sz="1100" b="0" i="0" u="none" strike="noStrike">
+                      <a:endParaRPr lang="en-US" sz="1100" b="0" i="0" u="none" strike="noStrike" dirty="0">
                         <a:solidFill>
                           <a:srgbClr val="000000"/>
                         </a:solidFill>
@@ -18468,12 +21372,12 @@
                     <a:p>
                       <a:pPr algn="ctr" fontAlgn="ctr"/>
                       <a:r>
-                        <a:rPr lang="en-US" sz="1100" u="none" strike="noStrike">
+                        <a:rPr lang="en-US" sz="1100" u="none" strike="noStrike" dirty="0">
                           <a:effectLst/>
                         </a:rPr>
-                        <a:t>X</a:t>
+                        <a:t>V</a:t>
                       </a:r>
-                      <a:endParaRPr lang="en-US" sz="1100" b="0" i="0" u="none" strike="noStrike">
+                      <a:endParaRPr lang="en-US" sz="1100" b="0" i="0" u="none" strike="noStrike" dirty="0">
                         <a:solidFill>
                           <a:srgbClr val="000000"/>
                         </a:solidFill>
@@ -18606,12 +21510,12 @@
                     <a:p>
                       <a:pPr algn="l" fontAlgn="ctr"/>
                       <a:r>
-                        <a:rPr lang="en-US" sz="1100" u="none" strike="noStrike">
+                        <a:rPr lang="en-US" sz="1100" u="none" strike="noStrike" dirty="0" err="1">
                           <a:effectLst/>
                         </a:rPr>
-                        <a:t>uvm_blocking_ peek_port</a:t>
+                        <a:t>uvm_blocking_peek_port</a:t>
                       </a:r>
-                      <a:endParaRPr lang="en-US" sz="1100" b="0" i="0" u="none" strike="noStrike">
+                      <a:endParaRPr lang="en-US" sz="1100" b="0" i="0" u="none" strike="noStrike" dirty="0">
                         <a:solidFill>
                           <a:srgbClr val="000000"/>
                         </a:solidFill>
@@ -18787,12 +21691,12 @@
                     <a:p>
                       <a:pPr algn="ctr" fontAlgn="ctr"/>
                       <a:r>
-                        <a:rPr lang="en-US" sz="1100" u="none" strike="noStrike">
+                        <a:rPr lang="en-US" sz="1100" u="none" strike="noStrike" dirty="0">
                           <a:effectLst/>
                         </a:rPr>
-                        <a:t>X</a:t>
+                        <a:t>V</a:t>
                       </a:r>
-                      <a:endParaRPr lang="en-US" sz="1100" b="0" i="0" u="none" strike="noStrike">
+                      <a:endParaRPr lang="en-US" sz="1100" b="0" i="0" u="none" strike="noStrike" dirty="0">
                         <a:solidFill>
                           <a:srgbClr val="000000"/>
                         </a:solidFill>
@@ -18900,12 +21804,12 @@
                     <a:p>
                       <a:pPr algn="l" fontAlgn="ctr"/>
                       <a:r>
-                        <a:rPr lang="en-US" sz="1100" u="none" strike="noStrike">
+                        <a:rPr lang="en-US" sz="1100" u="none" strike="noStrike" dirty="0" err="1">
                           <a:effectLst/>
                         </a:rPr>
-                        <a:t>uvm_nonblocking_ peek_port</a:t>
+                        <a:t>uvm_nonblocking_peek_port</a:t>
                       </a:r>
-                      <a:endParaRPr lang="en-US" sz="1100" b="0" i="0" u="none" strike="noStrike">
+                      <a:endParaRPr lang="en-US" sz="1100" b="0" i="0" u="none" strike="noStrike" dirty="0">
                         <a:solidFill>
                           <a:srgbClr val="000000"/>
                         </a:solidFill>
@@ -19106,12 +22010,12 @@
                     <a:p>
                       <a:pPr algn="ctr" fontAlgn="ctr"/>
                       <a:r>
-                        <a:rPr lang="en-US" sz="1100" u="none" strike="noStrike">
+                        <a:rPr lang="en-US" sz="1100" u="none" strike="noStrike" dirty="0">
                           <a:effectLst/>
                         </a:rPr>
-                        <a:t>X</a:t>
+                        <a:t>V</a:t>
                       </a:r>
-                      <a:endParaRPr lang="en-US" sz="1100" b="0" i="0" u="none" strike="noStrike">
+                      <a:endParaRPr lang="en-US" sz="1100" b="0" i="0" u="none" strike="noStrike" dirty="0">
                         <a:solidFill>
                           <a:srgbClr val="000000"/>
                         </a:solidFill>
@@ -19140,7 +22044,7 @@
                         <a:rPr lang="en-US" sz="1100" u="none" strike="noStrike" dirty="0">
                           <a:effectLst/>
                         </a:rPr>
-                        <a:t>X</a:t>
+                        <a:t>V</a:t>
                       </a:r>
                       <a:endParaRPr lang="en-US" sz="1100" b="0" i="0" u="none" strike="noStrike" dirty="0">
                         <a:solidFill>
@@ -19381,43 +22285,12 @@
                     <a:p>
                       <a:pPr algn="ctr" fontAlgn="ctr"/>
                       <a:r>
-                        <a:rPr lang="en-US" sz="1100" u="none" strike="noStrike">
+                        <a:rPr lang="en-US" sz="1100" u="none" strike="noStrike" dirty="0">
                           <a:effectLst/>
                         </a:rPr>
-                        <a:t>X</a:t>
+                        <a:t>V</a:t>
                       </a:r>
-                      <a:endParaRPr lang="en-US" sz="1100" b="0" i="0" u="none" strike="noStrike">
-                        <a:solidFill>
-                          <a:srgbClr val="000000"/>
-                        </a:solidFill>
-                        <a:effectLst/>
-                        <a:latin typeface="新細明體" panose="02020500000000000000" pitchFamily="18" charset="-120"/>
-                        <a:ea typeface="新細明體" panose="02020500000000000000" pitchFamily="18" charset="-120"/>
-                      </a:endParaRPr>
-                    </a:p>
-                  </a:txBody>
-                  <a:tcPr marL="72000" marR="72000" marT="0" marB="0" anchor="ctr">
-                    <a:solidFill>
-                      <a:schemeClr val="accent6">
-                        <a:lumMod val="60000"/>
-                        <a:lumOff val="40000"/>
-                      </a:schemeClr>
-                    </a:solidFill>
-                  </a:tcPr>
-                </a:tc>
-                <a:tc>
-                  <a:txBody>
-                    <a:bodyPr/>
-                    <a:lstStyle/>
-                    <a:p>
-                      <a:pPr algn="ctr" fontAlgn="ctr"/>
-                      <a:r>
-                        <a:rPr lang="en-US" sz="1100" u="none" strike="noStrike">
-                          <a:effectLst/>
-                        </a:rPr>
-                        <a:t>X</a:t>
-                      </a:r>
-                      <a:endParaRPr lang="en-US" sz="1100" b="0" i="0" u="none" strike="noStrike">
+                      <a:endParaRPr lang="en-US" sz="1100" b="0" i="0" u="none" strike="noStrike" dirty="0">
                         <a:solidFill>
                           <a:srgbClr val="000000"/>
                         </a:solidFill>
@@ -19446,7 +22319,38 @@
                         <a:rPr lang="en-US" sz="1100" u="none" strike="noStrike" dirty="0">
                           <a:effectLst/>
                         </a:rPr>
-                        <a:t>X</a:t>
+                        <a:t>V</a:t>
+                      </a:r>
+                      <a:endParaRPr lang="en-US" sz="1100" b="0" i="0" u="none" strike="noStrike" dirty="0">
+                        <a:solidFill>
+                          <a:srgbClr val="000000"/>
+                        </a:solidFill>
+                        <a:effectLst/>
+                        <a:latin typeface="新細明體" panose="02020500000000000000" pitchFamily="18" charset="-120"/>
+                        <a:ea typeface="新細明體" panose="02020500000000000000" pitchFamily="18" charset="-120"/>
+                      </a:endParaRPr>
+                    </a:p>
+                  </a:txBody>
+                  <a:tcPr marL="72000" marR="72000" marT="0" marB="0" anchor="ctr">
+                    <a:solidFill>
+                      <a:schemeClr val="accent6">
+                        <a:lumMod val="60000"/>
+                        <a:lumOff val="40000"/>
+                      </a:schemeClr>
+                    </a:solidFill>
+                  </a:tcPr>
+                </a:tc>
+                <a:tc>
+                  <a:txBody>
+                    <a:bodyPr/>
+                    <a:lstStyle/>
+                    <a:p>
+                      <a:pPr algn="ctr" fontAlgn="ctr"/>
+                      <a:r>
+                        <a:rPr lang="en-US" sz="1100" u="none" strike="noStrike" dirty="0">
+                          <a:effectLst/>
+                        </a:rPr>
+                        <a:t>V</a:t>
                       </a:r>
                       <a:endParaRPr lang="en-US" sz="1100" b="0" i="0" u="none" strike="noStrike" dirty="0">
                         <a:solidFill>
@@ -19506,12 +22410,12 @@
                     <a:p>
                       <a:pPr algn="l" fontAlgn="ctr"/>
                       <a:r>
-                        <a:rPr lang="en-US" sz="1100" u="none" strike="noStrike">
+                        <a:rPr lang="en-US" sz="1100" u="none" strike="noStrike" dirty="0" err="1">
                           <a:effectLst/>
                         </a:rPr>
-                        <a:t>uvm_blocking_ get_peek_port</a:t>
+                        <a:t>uvm_blocking_get_peek_port</a:t>
                       </a:r>
-                      <a:endParaRPr lang="en-US" sz="1100" b="0" i="0" u="none" strike="noStrike">
+                      <a:endParaRPr lang="en-US" sz="1100" b="0" i="0" u="none" strike="noStrike" dirty="0">
                         <a:solidFill>
                           <a:srgbClr val="000000"/>
                         </a:solidFill>
@@ -19612,12 +22516,12 @@
                     <a:p>
                       <a:pPr algn="ctr" fontAlgn="ctr"/>
                       <a:r>
-                        <a:rPr lang="en-US" sz="1100" u="none" strike="noStrike">
+                        <a:rPr lang="en-US" sz="1100" u="none" strike="noStrike" dirty="0">
                           <a:effectLst/>
                         </a:rPr>
-                        <a:t>X</a:t>
+                        <a:t>V</a:t>
                       </a:r>
-                      <a:endParaRPr lang="en-US" sz="1100" b="0" i="0" u="none" strike="noStrike">
+                      <a:endParaRPr lang="en-US" sz="1100" b="0" i="0" u="none" strike="noStrike" dirty="0">
                         <a:solidFill>
                           <a:srgbClr val="000000"/>
                         </a:solidFill>
@@ -19693,12 +22597,12 @@
                     <a:p>
                       <a:pPr algn="ctr" fontAlgn="ctr"/>
                       <a:r>
-                        <a:rPr lang="en-US" sz="1100" u="none" strike="noStrike">
+                        <a:rPr lang="en-US" sz="1100" u="none" strike="noStrike" dirty="0">
                           <a:effectLst/>
                         </a:rPr>
-                        <a:t>X</a:t>
+                        <a:t>V</a:t>
                       </a:r>
-                      <a:endParaRPr lang="en-US" sz="1100" b="0" i="0" u="none" strike="noStrike">
+                      <a:endParaRPr lang="en-US" sz="1100" b="0" i="0" u="none" strike="noStrike" dirty="0">
                         <a:solidFill>
                           <a:srgbClr val="000000"/>
                         </a:solidFill>
@@ -19806,12 +22710,12 @@
                     <a:p>
                       <a:pPr algn="l" fontAlgn="ctr"/>
                       <a:r>
-                        <a:rPr lang="en-US" sz="1100" u="none" strike="noStrike">
+                        <a:rPr lang="en-US" sz="1100" u="none" strike="noStrike" dirty="0" err="1">
                           <a:effectLst/>
                         </a:rPr>
-                        <a:t>uvm_nonblocking_ get_peek_port</a:t>
+                        <a:t>uvm_nonblocking_get_peek_port</a:t>
                       </a:r>
-                      <a:endParaRPr lang="en-US" sz="1100" b="0" i="0" u="none" strike="noStrike">
+                      <a:endParaRPr lang="en-US" sz="1100" b="0" i="0" u="none" strike="noStrike" dirty="0">
                         <a:solidFill>
                           <a:srgbClr val="000000"/>
                         </a:solidFill>
@@ -19937,12 +22841,12 @@
                     <a:p>
                       <a:pPr algn="ctr" fontAlgn="ctr"/>
                       <a:r>
-                        <a:rPr lang="en-US" sz="1100" u="none" strike="noStrike">
+                        <a:rPr lang="en-US" sz="1100" u="none" strike="noStrike" dirty="0">
                           <a:effectLst/>
                         </a:rPr>
-                        <a:t>X</a:t>
+                        <a:t>V</a:t>
                       </a:r>
-                      <a:endParaRPr lang="en-US" sz="1100" b="0" i="0" u="none" strike="noStrike">
+                      <a:endParaRPr lang="en-US" sz="1100" b="0" i="0" u="none" strike="noStrike" dirty="0">
                         <a:solidFill>
                           <a:srgbClr val="000000"/>
                         </a:solidFill>
@@ -19968,12 +22872,12 @@
                     <a:p>
                       <a:pPr algn="ctr" fontAlgn="ctr"/>
                       <a:r>
-                        <a:rPr lang="en-US" sz="1100" u="none" strike="noStrike">
+                        <a:rPr lang="en-US" sz="1100" u="none" strike="noStrike" dirty="0">
                           <a:effectLst/>
                         </a:rPr>
-                        <a:t>X</a:t>
+                        <a:t>V</a:t>
                       </a:r>
-                      <a:endParaRPr lang="en-US" sz="1100" b="0" i="0" u="none" strike="noStrike">
+                      <a:endParaRPr lang="en-US" sz="1100" b="0" i="0" u="none" strike="noStrike" dirty="0">
                         <a:solidFill>
                           <a:srgbClr val="000000"/>
                         </a:solidFill>
@@ -20024,12 +22928,12 @@
                     <a:p>
                       <a:pPr algn="ctr" fontAlgn="ctr"/>
                       <a:r>
-                        <a:rPr lang="en-US" sz="1100" u="none" strike="noStrike">
+                        <a:rPr lang="en-US" sz="1100" u="none" strike="noStrike" dirty="0">
                           <a:effectLst/>
                         </a:rPr>
-                        <a:t>X</a:t>
+                        <a:t>V</a:t>
                       </a:r>
-                      <a:endParaRPr lang="en-US" sz="1100" b="0" i="0" u="none" strike="noStrike">
+                      <a:endParaRPr lang="en-US" sz="1100" b="0" i="0" u="none" strike="noStrike" dirty="0">
                         <a:solidFill>
                           <a:srgbClr val="000000"/>
                         </a:solidFill>
@@ -20058,7 +22962,7 @@
                         <a:rPr lang="en-US" sz="1100" u="none" strike="noStrike" dirty="0">
                           <a:effectLst/>
                         </a:rPr>
-                        <a:t>X</a:t>
+                        <a:t>V</a:t>
                       </a:r>
                       <a:endParaRPr lang="en-US" sz="1100" b="0" i="0" u="none" strike="noStrike" dirty="0">
                         <a:solidFill>
@@ -20224,136 +23128,12 @@
                     <a:p>
                       <a:pPr algn="ctr" fontAlgn="ctr"/>
                       <a:r>
-                        <a:rPr lang="en-US" sz="1100" u="none" strike="noStrike">
+                        <a:rPr lang="en-US" sz="1100" u="none" strike="noStrike" dirty="0">
                           <a:effectLst/>
                         </a:rPr>
-                        <a:t>X</a:t>
+                        <a:t>V</a:t>
                       </a:r>
-                      <a:endParaRPr lang="en-US" sz="1100" b="0" i="0" u="none" strike="noStrike">
-                        <a:solidFill>
-                          <a:srgbClr val="000000"/>
-                        </a:solidFill>
-                        <a:effectLst/>
-                        <a:latin typeface="新細明體" panose="02020500000000000000" pitchFamily="18" charset="-120"/>
-                        <a:ea typeface="新細明體" panose="02020500000000000000" pitchFamily="18" charset="-120"/>
-                      </a:endParaRPr>
-                    </a:p>
-                  </a:txBody>
-                  <a:tcPr marL="72000" marR="72000" marT="0" marB="0" anchor="ctr">
-                    <a:solidFill>
-                      <a:schemeClr val="accent6">
-                        <a:lumMod val="60000"/>
-                        <a:lumOff val="40000"/>
-                      </a:schemeClr>
-                    </a:solidFill>
-                  </a:tcPr>
-                </a:tc>
-                <a:tc>
-                  <a:txBody>
-                    <a:bodyPr/>
-                    <a:lstStyle/>
-                    <a:p>
-                      <a:pPr algn="ctr" fontAlgn="ctr"/>
-                      <a:r>
-                        <a:rPr lang="en-US" sz="1100" u="none" strike="noStrike">
-                          <a:effectLst/>
-                        </a:rPr>
-                        <a:t>X</a:t>
-                      </a:r>
-                      <a:endParaRPr lang="en-US" sz="1100" b="0" i="0" u="none" strike="noStrike">
-                        <a:solidFill>
-                          <a:srgbClr val="000000"/>
-                        </a:solidFill>
-                        <a:effectLst/>
-                        <a:latin typeface="新細明體" panose="02020500000000000000" pitchFamily="18" charset="-120"/>
-                        <a:ea typeface="新細明體" panose="02020500000000000000" pitchFamily="18" charset="-120"/>
-                      </a:endParaRPr>
-                    </a:p>
-                  </a:txBody>
-                  <a:tcPr marL="72000" marR="72000" marT="0" marB="0" anchor="ctr">
-                    <a:solidFill>
-                      <a:schemeClr val="accent6">
-                        <a:lumMod val="60000"/>
-                        <a:lumOff val="40000"/>
-                      </a:schemeClr>
-                    </a:solidFill>
-                  </a:tcPr>
-                </a:tc>
-                <a:tc>
-                  <a:txBody>
-                    <a:bodyPr/>
-                    <a:lstStyle/>
-                    <a:p>
-                      <a:pPr algn="ctr" fontAlgn="ctr"/>
-                      <a:r>
-                        <a:rPr lang="en-US" sz="1100" u="none" strike="noStrike">
-                          <a:effectLst/>
-                        </a:rPr>
-                        <a:t>X</a:t>
-                      </a:r>
-                      <a:endParaRPr lang="en-US" sz="1100" b="0" i="0" u="none" strike="noStrike">
-                        <a:solidFill>
-                          <a:srgbClr val="000000"/>
-                        </a:solidFill>
-                        <a:effectLst/>
-                        <a:latin typeface="新細明體" panose="02020500000000000000" pitchFamily="18" charset="-120"/>
-                        <a:ea typeface="新細明體" panose="02020500000000000000" pitchFamily="18" charset="-120"/>
-                      </a:endParaRPr>
-                    </a:p>
-                  </a:txBody>
-                  <a:tcPr marL="72000" marR="72000" marT="0" marB="0" anchor="ctr">
-                    <a:solidFill>
-                      <a:schemeClr val="accent6">
-                        <a:lumMod val="60000"/>
-                        <a:lumOff val="40000"/>
-                      </a:schemeClr>
-                    </a:solidFill>
-                  </a:tcPr>
-                </a:tc>
-                <a:tc>
-                  <a:txBody>
-                    <a:bodyPr/>
-                    <a:lstStyle/>
-                    <a:p>
-                      <a:pPr algn="ctr" fontAlgn="ctr"/>
-                      <a:r>
-                        <a:rPr lang="en-US" sz="1100" u="none" strike="noStrike">
-                          <a:effectLst/>
-                        </a:rPr>
-                        <a:t>X</a:t>
-                      </a:r>
-                      <a:endParaRPr lang="en-US" sz="1100" b="0" i="0" u="none" strike="noStrike">
-                        <a:solidFill>
-                          <a:srgbClr val="000000"/>
-                        </a:solidFill>
-                        <a:effectLst/>
-                        <a:latin typeface="新細明體" panose="02020500000000000000" pitchFamily="18" charset="-120"/>
-                        <a:ea typeface="新細明體" panose="02020500000000000000" pitchFamily="18" charset="-120"/>
-                      </a:endParaRPr>
-                    </a:p>
-                  </a:txBody>
-                  <a:tcPr marL="72000" marR="72000" marT="0" marB="0" anchor="ctr">
-                    <a:solidFill>
-                      <a:schemeClr val="accent6">
-                        <a:lumMod val="60000"/>
-                        <a:lumOff val="40000"/>
-                      </a:schemeClr>
-                    </a:solidFill>
-                  </a:tcPr>
-                </a:tc>
-                <a:tc>
-                  <a:txBody>
-                    <a:bodyPr/>
-                    <a:lstStyle/>
-                    <a:p>
-                      <a:pPr algn="ctr" fontAlgn="ctr"/>
-                      <a:r>
-                        <a:rPr lang="en-US" sz="1100" u="none" strike="noStrike">
-                          <a:effectLst/>
-                        </a:rPr>
-                        <a:t>X</a:t>
-                      </a:r>
-                      <a:endParaRPr lang="en-US" sz="1100" b="0" i="0" u="none" strike="noStrike">
+                      <a:endParaRPr lang="en-US" sz="1100" b="0" i="0" u="none" strike="noStrike" dirty="0">
                         <a:solidFill>
                           <a:srgbClr val="000000"/>
                         </a:solidFill>
@@ -20382,7 +23162,131 @@
                         <a:rPr lang="en-US" sz="1100" u="none" strike="noStrike" dirty="0">
                           <a:effectLst/>
                         </a:rPr>
-                        <a:t>X</a:t>
+                        <a:t>V</a:t>
+                      </a:r>
+                      <a:endParaRPr lang="en-US" sz="1100" b="0" i="0" u="none" strike="noStrike" dirty="0">
+                        <a:solidFill>
+                          <a:srgbClr val="000000"/>
+                        </a:solidFill>
+                        <a:effectLst/>
+                        <a:latin typeface="新細明體" panose="02020500000000000000" pitchFamily="18" charset="-120"/>
+                        <a:ea typeface="新細明體" panose="02020500000000000000" pitchFamily="18" charset="-120"/>
+                      </a:endParaRPr>
+                    </a:p>
+                  </a:txBody>
+                  <a:tcPr marL="72000" marR="72000" marT="0" marB="0" anchor="ctr">
+                    <a:solidFill>
+                      <a:schemeClr val="accent6">
+                        <a:lumMod val="60000"/>
+                        <a:lumOff val="40000"/>
+                      </a:schemeClr>
+                    </a:solidFill>
+                  </a:tcPr>
+                </a:tc>
+                <a:tc>
+                  <a:txBody>
+                    <a:bodyPr/>
+                    <a:lstStyle/>
+                    <a:p>
+                      <a:pPr algn="ctr" fontAlgn="ctr"/>
+                      <a:r>
+                        <a:rPr lang="en-US" sz="1100" u="none" strike="noStrike" dirty="0">
+                          <a:effectLst/>
+                        </a:rPr>
+                        <a:t>V</a:t>
+                      </a:r>
+                      <a:endParaRPr lang="en-US" sz="1100" b="0" i="0" u="none" strike="noStrike" dirty="0">
+                        <a:solidFill>
+                          <a:srgbClr val="000000"/>
+                        </a:solidFill>
+                        <a:effectLst/>
+                        <a:latin typeface="新細明體" panose="02020500000000000000" pitchFamily="18" charset="-120"/>
+                        <a:ea typeface="新細明體" panose="02020500000000000000" pitchFamily="18" charset="-120"/>
+                      </a:endParaRPr>
+                    </a:p>
+                  </a:txBody>
+                  <a:tcPr marL="72000" marR="72000" marT="0" marB="0" anchor="ctr">
+                    <a:solidFill>
+                      <a:schemeClr val="accent6">
+                        <a:lumMod val="60000"/>
+                        <a:lumOff val="40000"/>
+                      </a:schemeClr>
+                    </a:solidFill>
+                  </a:tcPr>
+                </a:tc>
+                <a:tc>
+                  <a:txBody>
+                    <a:bodyPr/>
+                    <a:lstStyle/>
+                    <a:p>
+                      <a:pPr algn="ctr" fontAlgn="ctr"/>
+                      <a:r>
+                        <a:rPr lang="en-US" sz="1100" u="none" strike="noStrike" dirty="0">
+                          <a:effectLst/>
+                        </a:rPr>
+                        <a:t>V</a:t>
+                      </a:r>
+                      <a:endParaRPr lang="en-US" sz="1100" b="0" i="0" u="none" strike="noStrike" dirty="0">
+                        <a:solidFill>
+                          <a:srgbClr val="000000"/>
+                        </a:solidFill>
+                        <a:effectLst/>
+                        <a:latin typeface="新細明體" panose="02020500000000000000" pitchFamily="18" charset="-120"/>
+                        <a:ea typeface="新細明體" panose="02020500000000000000" pitchFamily="18" charset="-120"/>
+                      </a:endParaRPr>
+                    </a:p>
+                  </a:txBody>
+                  <a:tcPr marL="72000" marR="72000" marT="0" marB="0" anchor="ctr">
+                    <a:solidFill>
+                      <a:schemeClr val="accent6">
+                        <a:lumMod val="60000"/>
+                        <a:lumOff val="40000"/>
+                      </a:schemeClr>
+                    </a:solidFill>
+                  </a:tcPr>
+                </a:tc>
+                <a:tc>
+                  <a:txBody>
+                    <a:bodyPr/>
+                    <a:lstStyle/>
+                    <a:p>
+                      <a:pPr algn="ctr" fontAlgn="ctr"/>
+                      <a:r>
+                        <a:rPr lang="en-US" sz="1100" u="none" strike="noStrike" dirty="0">
+                          <a:effectLst/>
+                        </a:rPr>
+                        <a:t>V</a:t>
+                      </a:r>
+                      <a:endParaRPr lang="en-US" sz="1100" b="0" i="0" u="none" strike="noStrike" dirty="0">
+                        <a:solidFill>
+                          <a:srgbClr val="000000"/>
+                        </a:solidFill>
+                        <a:effectLst/>
+                        <a:latin typeface="新細明體" panose="02020500000000000000" pitchFamily="18" charset="-120"/>
+                        <a:ea typeface="新細明體" panose="02020500000000000000" pitchFamily="18" charset="-120"/>
+                      </a:endParaRPr>
+                    </a:p>
+                  </a:txBody>
+                  <a:tcPr marL="72000" marR="72000" marT="0" marB="0" anchor="ctr">
+                    <a:solidFill>
+                      <a:schemeClr val="accent6">
+                        <a:lumMod val="60000"/>
+                        <a:lumOff val="40000"/>
+                      </a:schemeClr>
+                    </a:solidFill>
+                  </a:tcPr>
+                </a:tc>
+                <a:tc>
+                  <a:txBody>
+                    <a:bodyPr/>
+                    <a:lstStyle/>
+                    <a:p>
+                      <a:pPr algn="ctr" fontAlgn="ctr"/>
+                      <a:r>
+                        <a:rPr lang="en-US" sz="1100" u="none" strike="noStrike" dirty="0">
+                          <a:effectLst/>
+                        </a:rPr>
+                        <a:t>V</a:t>
                       </a:r>
                       <a:endParaRPr lang="en-US" sz="1100" b="0" i="0" u="none" strike="noStrike" dirty="0">
                         <a:solidFill>
@@ -20442,12 +23346,12 @@
                     <a:p>
                       <a:pPr algn="l" fontAlgn="ctr"/>
                       <a:r>
-                        <a:rPr lang="en-US" sz="1100" u="none" strike="noStrike">
+                        <a:rPr lang="en-US" sz="1100" u="none" strike="noStrike" dirty="0" err="1">
                           <a:effectLst/>
                         </a:rPr>
-                        <a:t>uvm_blocking_ master_port</a:t>
+                        <a:t>uvm_blocking_master_port</a:t>
                       </a:r>
-                      <a:endParaRPr lang="en-US" sz="1100" b="0" i="0" u="none" strike="noStrike">
+                      <a:endParaRPr lang="en-US" sz="1100" b="0" i="0" u="none" strike="noStrike" dirty="0">
                         <a:solidFill>
                           <a:srgbClr val="000000"/>
                         </a:solidFill>
@@ -20473,12 +23377,12 @@
                     <a:p>
                       <a:pPr algn="ctr" fontAlgn="ctr"/>
                       <a:r>
-                        <a:rPr lang="en-US" sz="1100" u="none" strike="noStrike">
+                        <a:rPr lang="en-US" sz="1100" u="none" strike="noStrike" dirty="0">
                           <a:effectLst/>
                         </a:rPr>
-                        <a:t>X</a:t>
+                        <a:t>V</a:t>
                       </a:r>
-                      <a:endParaRPr lang="en-US" sz="1100" b="0" i="0" u="none" strike="noStrike">
+                      <a:endParaRPr lang="en-US" sz="1100" b="0" i="0" u="none" strike="noStrike" dirty="0">
                         <a:solidFill>
                           <a:srgbClr val="000000"/>
                         </a:solidFill>
@@ -20554,12 +23458,12 @@
                     <a:p>
                       <a:pPr algn="ctr" fontAlgn="ctr"/>
                       <a:r>
-                        <a:rPr lang="en-US" sz="1100" u="none" strike="noStrike">
+                        <a:rPr lang="en-US" sz="1100" u="none" strike="noStrike" dirty="0">
                           <a:effectLst/>
                         </a:rPr>
-                        <a:t>X</a:t>
+                        <a:t>V</a:t>
                       </a:r>
-                      <a:endParaRPr lang="en-US" sz="1100" b="0" i="0" u="none" strike="noStrike">
+                      <a:endParaRPr lang="en-US" sz="1100" b="0" i="0" u="none" strike="noStrike" dirty="0">
                         <a:solidFill>
                           <a:srgbClr val="000000"/>
                         </a:solidFill>
@@ -20635,12 +23539,12 @@
                     <a:p>
                       <a:pPr algn="ctr" fontAlgn="ctr"/>
                       <a:r>
-                        <a:rPr lang="en-US" sz="1100" u="none" strike="noStrike">
+                        <a:rPr lang="en-US" sz="1100" u="none" strike="noStrike" dirty="0">
                           <a:effectLst/>
                         </a:rPr>
-                        <a:t>X</a:t>
+                        <a:t>V</a:t>
                       </a:r>
-                      <a:endParaRPr lang="en-US" sz="1100" b="0" i="0" u="none" strike="noStrike">
+                      <a:endParaRPr lang="en-US" sz="1100" b="0" i="0" u="none" strike="noStrike" dirty="0">
                         <a:solidFill>
                           <a:srgbClr val="000000"/>
                         </a:solidFill>
@@ -20748,12 +23652,12 @@
                     <a:p>
                       <a:pPr algn="l" fontAlgn="ctr"/>
                       <a:r>
-                        <a:rPr lang="en-US" sz="1100" u="none" strike="noStrike">
+                        <a:rPr lang="en-US" sz="1100" u="none" strike="noStrike" dirty="0" err="1">
                           <a:effectLst/>
                         </a:rPr>
-                        <a:t>uvm_nonblocking_ master_port</a:t>
+                        <a:t>uvm_nonblocking_master_port</a:t>
                       </a:r>
-                      <a:endParaRPr lang="en-US" sz="1100" b="0" i="0" u="none" strike="noStrike">
+                      <a:endParaRPr lang="en-US" sz="1100" b="0" i="0" u="none" strike="noStrike" dirty="0">
                         <a:solidFill>
                           <a:srgbClr val="000000"/>
                         </a:solidFill>
@@ -20804,12 +23708,12 @@
                     <a:p>
                       <a:pPr algn="ctr" fontAlgn="ctr"/>
                       <a:r>
-                        <a:rPr lang="en-US" sz="1100" u="none" strike="noStrike">
+                        <a:rPr lang="en-US" sz="1100" u="none" strike="noStrike" dirty="0">
                           <a:effectLst/>
                         </a:rPr>
-                        <a:t>X</a:t>
+                        <a:t>V</a:t>
                       </a:r>
-                      <a:endParaRPr lang="en-US" sz="1100" b="0" i="0" u="none" strike="noStrike">
+                      <a:endParaRPr lang="en-US" sz="1100" b="0" i="0" u="none" strike="noStrike" dirty="0">
                         <a:solidFill>
                           <a:srgbClr val="000000"/>
                         </a:solidFill>
@@ -20835,12 +23739,12 @@
                     <a:p>
                       <a:pPr algn="ctr" fontAlgn="ctr"/>
                       <a:r>
-                        <a:rPr lang="en-US" sz="1100" u="none" strike="noStrike">
+                        <a:rPr lang="en-US" sz="1100" u="none" strike="noStrike" dirty="0">
                           <a:effectLst/>
                         </a:rPr>
-                        <a:t>X</a:t>
+                        <a:t>V</a:t>
                       </a:r>
-                      <a:endParaRPr lang="en-US" sz="1100" b="0" i="0" u="none" strike="noStrike">
+                      <a:endParaRPr lang="en-US" sz="1100" b="0" i="0" u="none" strike="noStrike" dirty="0">
                         <a:solidFill>
                           <a:srgbClr val="000000"/>
                         </a:solidFill>
@@ -20891,12 +23795,12 @@
                     <a:p>
                       <a:pPr algn="ctr" fontAlgn="ctr"/>
                       <a:r>
-                        <a:rPr lang="en-US" sz="1100" u="none" strike="noStrike">
+                        <a:rPr lang="en-US" sz="1100" u="none" strike="noStrike" dirty="0">
                           <a:effectLst/>
                         </a:rPr>
-                        <a:t>X</a:t>
+                        <a:t>V</a:t>
                       </a:r>
-                      <a:endParaRPr lang="en-US" sz="1100" b="0" i="0" u="none" strike="noStrike">
+                      <a:endParaRPr lang="en-US" sz="1100" b="0" i="0" u="none" strike="noStrike" dirty="0">
                         <a:solidFill>
                           <a:srgbClr val="000000"/>
                         </a:solidFill>
@@ -20922,12 +23826,12 @@
                     <a:p>
                       <a:pPr algn="ctr" fontAlgn="ctr"/>
                       <a:r>
-                        <a:rPr lang="en-US" sz="1100" u="none" strike="noStrike">
+                        <a:rPr lang="en-US" sz="1100" u="none" strike="noStrike" dirty="0">
                           <a:effectLst/>
                         </a:rPr>
-                        <a:t>X</a:t>
+                        <a:t>V</a:t>
                       </a:r>
-                      <a:endParaRPr lang="en-US" sz="1100" b="0" i="0" u="none" strike="noStrike">
+                      <a:endParaRPr lang="en-US" sz="1100" b="0" i="0" u="none" strike="noStrike" dirty="0">
                         <a:solidFill>
                           <a:srgbClr val="000000"/>
                         </a:solidFill>
@@ -20978,12 +23882,12 @@
                     <a:p>
                       <a:pPr algn="ctr" fontAlgn="ctr"/>
                       <a:r>
-                        <a:rPr lang="en-US" sz="1100" u="none" strike="noStrike">
+                        <a:rPr lang="en-US" sz="1100" u="none" strike="noStrike" dirty="0">
                           <a:effectLst/>
                         </a:rPr>
-                        <a:t>X</a:t>
+                        <a:t>V</a:t>
                       </a:r>
-                      <a:endParaRPr lang="en-US" sz="1100" b="0" i="0" u="none" strike="noStrike">
+                      <a:endParaRPr lang="en-US" sz="1100" b="0" i="0" u="none" strike="noStrike" dirty="0">
                         <a:solidFill>
                           <a:srgbClr val="000000"/>
                         </a:solidFill>
@@ -21012,7 +23916,7 @@
                         <a:rPr lang="en-US" sz="1100" u="none" strike="noStrike" dirty="0">
                           <a:effectLst/>
                         </a:rPr>
-                        <a:t>X</a:t>
+                        <a:t>V</a:t>
                       </a:r>
                       <a:endParaRPr lang="en-US" sz="1100" b="0" i="0" u="none" strike="noStrike" dirty="0">
                         <a:solidFill>
@@ -21103,229 +24007,12 @@
                     <a:p>
                       <a:pPr algn="ctr" fontAlgn="ctr"/>
                       <a:r>
-                        <a:rPr lang="en-US" sz="1100" u="none" strike="noStrike">
+                        <a:rPr lang="en-US" sz="1100" u="none" strike="noStrike" dirty="0">
                           <a:effectLst/>
                         </a:rPr>
-                        <a:t>X</a:t>
+                        <a:t>V</a:t>
                       </a:r>
-                      <a:endParaRPr lang="en-US" sz="1100" b="0" i="0" u="none" strike="noStrike">
-                        <a:solidFill>
-                          <a:srgbClr val="000000"/>
-                        </a:solidFill>
-                        <a:effectLst/>
-                        <a:latin typeface="新細明體" panose="02020500000000000000" pitchFamily="18" charset="-120"/>
-                        <a:ea typeface="新細明體" panose="02020500000000000000" pitchFamily="18" charset="-120"/>
-                      </a:endParaRPr>
-                    </a:p>
-                  </a:txBody>
-                  <a:tcPr marL="72000" marR="72000" marT="0" marB="0" anchor="ctr">
-                    <a:solidFill>
-                      <a:schemeClr val="accent6">
-                        <a:lumMod val="60000"/>
-                        <a:lumOff val="40000"/>
-                      </a:schemeClr>
-                    </a:solidFill>
-                  </a:tcPr>
-                </a:tc>
-                <a:tc>
-                  <a:txBody>
-                    <a:bodyPr/>
-                    <a:lstStyle/>
-                    <a:p>
-                      <a:pPr algn="ctr" fontAlgn="ctr"/>
-                      <a:r>
-                        <a:rPr lang="en-US" sz="1100" u="none" strike="noStrike">
-                          <a:effectLst/>
-                        </a:rPr>
-                        <a:t>X</a:t>
-                      </a:r>
-                      <a:endParaRPr lang="en-US" sz="1100" b="0" i="0" u="none" strike="noStrike">
-                        <a:solidFill>
-                          <a:srgbClr val="000000"/>
-                        </a:solidFill>
-                        <a:effectLst/>
-                        <a:latin typeface="新細明體" panose="02020500000000000000" pitchFamily="18" charset="-120"/>
-                        <a:ea typeface="新細明體" panose="02020500000000000000" pitchFamily="18" charset="-120"/>
-                      </a:endParaRPr>
-                    </a:p>
-                  </a:txBody>
-                  <a:tcPr marL="72000" marR="72000" marT="0" marB="0" anchor="ctr">
-                    <a:solidFill>
-                      <a:schemeClr val="accent6">
-                        <a:lumMod val="60000"/>
-                        <a:lumOff val="40000"/>
-                      </a:schemeClr>
-                    </a:solidFill>
-                  </a:tcPr>
-                </a:tc>
-                <a:tc>
-                  <a:txBody>
-                    <a:bodyPr/>
-                    <a:lstStyle/>
-                    <a:p>
-                      <a:pPr algn="ctr" fontAlgn="ctr"/>
-                      <a:r>
-                        <a:rPr lang="en-US" sz="1100" u="none" strike="noStrike">
-                          <a:effectLst/>
-                        </a:rPr>
-                        <a:t>X</a:t>
-                      </a:r>
-                      <a:endParaRPr lang="en-US" sz="1100" b="0" i="0" u="none" strike="noStrike">
-                        <a:solidFill>
-                          <a:srgbClr val="000000"/>
-                        </a:solidFill>
-                        <a:effectLst/>
-                        <a:latin typeface="新細明體" panose="02020500000000000000" pitchFamily="18" charset="-120"/>
-                        <a:ea typeface="新細明體" panose="02020500000000000000" pitchFamily="18" charset="-120"/>
-                      </a:endParaRPr>
-                    </a:p>
-                  </a:txBody>
-                  <a:tcPr marL="72000" marR="72000" marT="0" marB="0" anchor="ctr">
-                    <a:solidFill>
-                      <a:schemeClr val="accent6">
-                        <a:lumMod val="60000"/>
-                        <a:lumOff val="40000"/>
-                      </a:schemeClr>
-                    </a:solidFill>
-                  </a:tcPr>
-                </a:tc>
-                <a:tc>
-                  <a:txBody>
-                    <a:bodyPr/>
-                    <a:lstStyle/>
-                    <a:p>
-                      <a:pPr algn="ctr" fontAlgn="ctr"/>
-                      <a:r>
-                        <a:rPr lang="en-US" sz="1100" u="none" strike="noStrike">
-                          <a:effectLst/>
-                        </a:rPr>
-                        <a:t>X</a:t>
-                      </a:r>
-                      <a:endParaRPr lang="en-US" sz="1100" b="0" i="0" u="none" strike="noStrike">
-                        <a:solidFill>
-                          <a:srgbClr val="000000"/>
-                        </a:solidFill>
-                        <a:effectLst/>
-                        <a:latin typeface="新細明體" panose="02020500000000000000" pitchFamily="18" charset="-120"/>
-                        <a:ea typeface="新細明體" panose="02020500000000000000" pitchFamily="18" charset="-120"/>
-                      </a:endParaRPr>
-                    </a:p>
-                  </a:txBody>
-                  <a:tcPr marL="72000" marR="72000" marT="0" marB="0" anchor="ctr">
-                    <a:solidFill>
-                      <a:schemeClr val="accent6">
-                        <a:lumMod val="60000"/>
-                        <a:lumOff val="40000"/>
-                      </a:schemeClr>
-                    </a:solidFill>
-                  </a:tcPr>
-                </a:tc>
-                <a:tc>
-                  <a:txBody>
-                    <a:bodyPr/>
-                    <a:lstStyle/>
-                    <a:p>
-                      <a:pPr algn="ctr" fontAlgn="ctr"/>
-                      <a:r>
-                        <a:rPr lang="en-US" sz="1100" u="none" strike="noStrike">
-                          <a:effectLst/>
-                        </a:rPr>
-                        <a:t>X</a:t>
-                      </a:r>
-                      <a:endParaRPr lang="en-US" sz="1100" b="0" i="0" u="none" strike="noStrike">
-                        <a:solidFill>
-                          <a:srgbClr val="000000"/>
-                        </a:solidFill>
-                        <a:effectLst/>
-                        <a:latin typeface="新細明體" panose="02020500000000000000" pitchFamily="18" charset="-120"/>
-                        <a:ea typeface="新細明體" panose="02020500000000000000" pitchFamily="18" charset="-120"/>
-                      </a:endParaRPr>
-                    </a:p>
-                  </a:txBody>
-                  <a:tcPr marL="72000" marR="72000" marT="0" marB="0" anchor="ctr">
-                    <a:solidFill>
-                      <a:schemeClr val="accent6">
-                        <a:lumMod val="60000"/>
-                        <a:lumOff val="40000"/>
-                      </a:schemeClr>
-                    </a:solidFill>
-                  </a:tcPr>
-                </a:tc>
-                <a:tc>
-                  <a:txBody>
-                    <a:bodyPr/>
-                    <a:lstStyle/>
-                    <a:p>
-                      <a:pPr algn="ctr" fontAlgn="ctr"/>
-                      <a:r>
-                        <a:rPr lang="en-US" sz="1100" u="none" strike="noStrike">
-                          <a:effectLst/>
-                        </a:rPr>
-                        <a:t>X</a:t>
-                      </a:r>
-                      <a:endParaRPr lang="en-US" sz="1100" b="0" i="0" u="none" strike="noStrike">
-                        <a:solidFill>
-                          <a:srgbClr val="000000"/>
-                        </a:solidFill>
-                        <a:effectLst/>
-                        <a:latin typeface="新細明體" panose="02020500000000000000" pitchFamily="18" charset="-120"/>
-                        <a:ea typeface="新細明體" panose="02020500000000000000" pitchFamily="18" charset="-120"/>
-                      </a:endParaRPr>
-                    </a:p>
-                  </a:txBody>
-                  <a:tcPr marL="72000" marR="72000" marT="0" marB="0" anchor="ctr">
-                    <a:solidFill>
-                      <a:schemeClr val="accent6">
-                        <a:lumMod val="60000"/>
-                        <a:lumOff val="40000"/>
-                      </a:schemeClr>
-                    </a:solidFill>
-                  </a:tcPr>
-                </a:tc>
-                <a:tc>
-                  <a:txBody>
-                    <a:bodyPr/>
-                    <a:lstStyle/>
-                    <a:p>
-                      <a:pPr algn="ctr" fontAlgn="ctr"/>
-                      <a:r>
-                        <a:rPr lang="en-US" sz="1100" u="none" strike="noStrike">
-                          <a:effectLst/>
-                        </a:rPr>
-                        <a:t>X</a:t>
-                      </a:r>
-                      <a:endParaRPr lang="en-US" sz="1100" b="0" i="0" u="none" strike="noStrike">
-                        <a:solidFill>
-                          <a:srgbClr val="000000"/>
-                        </a:solidFill>
-                        <a:effectLst/>
-                        <a:latin typeface="新細明體" panose="02020500000000000000" pitchFamily="18" charset="-120"/>
-                        <a:ea typeface="新細明體" panose="02020500000000000000" pitchFamily="18" charset="-120"/>
-                      </a:endParaRPr>
-                    </a:p>
-                  </a:txBody>
-                  <a:tcPr marL="72000" marR="72000" marT="0" marB="0" anchor="ctr">
-                    <a:solidFill>
-                      <a:schemeClr val="accent6">
-                        <a:lumMod val="60000"/>
-                        <a:lumOff val="40000"/>
-                      </a:schemeClr>
-                    </a:solidFill>
-                  </a:tcPr>
-                </a:tc>
-                <a:tc>
-                  <a:txBody>
-                    <a:bodyPr/>
-                    <a:lstStyle/>
-                    <a:p>
-                      <a:pPr algn="ctr" fontAlgn="ctr"/>
-                      <a:r>
-                        <a:rPr lang="en-US" sz="1100" u="none" strike="noStrike">
-                          <a:effectLst/>
-                        </a:rPr>
-                        <a:t>X</a:t>
-                      </a:r>
-                      <a:endParaRPr lang="en-US" sz="1100" b="0" i="0" u="none" strike="noStrike">
+                      <a:endParaRPr lang="en-US" sz="1100" b="0" i="0" u="none" strike="noStrike" dirty="0">
                         <a:solidFill>
                           <a:srgbClr val="000000"/>
                         </a:solidFill>
@@ -21354,7 +24041,224 @@
                         <a:rPr lang="en-US" sz="1100" u="none" strike="noStrike" dirty="0">
                           <a:effectLst/>
                         </a:rPr>
-                        <a:t>X</a:t>
+                        <a:t>V</a:t>
+                      </a:r>
+                      <a:endParaRPr lang="en-US" sz="1100" b="0" i="0" u="none" strike="noStrike" dirty="0">
+                        <a:solidFill>
+                          <a:srgbClr val="000000"/>
+                        </a:solidFill>
+                        <a:effectLst/>
+                        <a:latin typeface="新細明體" panose="02020500000000000000" pitchFamily="18" charset="-120"/>
+                        <a:ea typeface="新細明體" panose="02020500000000000000" pitchFamily="18" charset="-120"/>
+                      </a:endParaRPr>
+                    </a:p>
+                  </a:txBody>
+                  <a:tcPr marL="72000" marR="72000" marT="0" marB="0" anchor="ctr">
+                    <a:solidFill>
+                      <a:schemeClr val="accent6">
+                        <a:lumMod val="60000"/>
+                        <a:lumOff val="40000"/>
+                      </a:schemeClr>
+                    </a:solidFill>
+                  </a:tcPr>
+                </a:tc>
+                <a:tc>
+                  <a:txBody>
+                    <a:bodyPr/>
+                    <a:lstStyle/>
+                    <a:p>
+                      <a:pPr algn="ctr" fontAlgn="ctr"/>
+                      <a:r>
+                        <a:rPr lang="en-US" sz="1100" u="none" strike="noStrike" dirty="0">
+                          <a:effectLst/>
+                        </a:rPr>
+                        <a:t>V</a:t>
+                      </a:r>
+                      <a:endParaRPr lang="en-US" sz="1100" b="0" i="0" u="none" strike="noStrike" dirty="0">
+                        <a:solidFill>
+                          <a:srgbClr val="000000"/>
+                        </a:solidFill>
+                        <a:effectLst/>
+                        <a:latin typeface="新細明體" panose="02020500000000000000" pitchFamily="18" charset="-120"/>
+                        <a:ea typeface="新細明體" panose="02020500000000000000" pitchFamily="18" charset="-120"/>
+                      </a:endParaRPr>
+                    </a:p>
+                  </a:txBody>
+                  <a:tcPr marL="72000" marR="72000" marT="0" marB="0" anchor="ctr">
+                    <a:solidFill>
+                      <a:schemeClr val="accent6">
+                        <a:lumMod val="60000"/>
+                        <a:lumOff val="40000"/>
+                      </a:schemeClr>
+                    </a:solidFill>
+                  </a:tcPr>
+                </a:tc>
+                <a:tc>
+                  <a:txBody>
+                    <a:bodyPr/>
+                    <a:lstStyle/>
+                    <a:p>
+                      <a:pPr algn="ctr" fontAlgn="ctr"/>
+                      <a:r>
+                        <a:rPr lang="en-US" sz="1100" u="none" strike="noStrike" dirty="0">
+                          <a:effectLst/>
+                        </a:rPr>
+                        <a:t>V</a:t>
+                      </a:r>
+                      <a:endParaRPr lang="en-US" sz="1100" b="0" i="0" u="none" strike="noStrike" dirty="0">
+                        <a:solidFill>
+                          <a:srgbClr val="000000"/>
+                        </a:solidFill>
+                        <a:effectLst/>
+                        <a:latin typeface="新細明體" panose="02020500000000000000" pitchFamily="18" charset="-120"/>
+                        <a:ea typeface="新細明體" panose="02020500000000000000" pitchFamily="18" charset="-120"/>
+                      </a:endParaRPr>
+                    </a:p>
+                  </a:txBody>
+                  <a:tcPr marL="72000" marR="72000" marT="0" marB="0" anchor="ctr">
+                    <a:solidFill>
+                      <a:schemeClr val="accent6">
+                        <a:lumMod val="60000"/>
+                        <a:lumOff val="40000"/>
+                      </a:schemeClr>
+                    </a:solidFill>
+                  </a:tcPr>
+                </a:tc>
+                <a:tc>
+                  <a:txBody>
+                    <a:bodyPr/>
+                    <a:lstStyle/>
+                    <a:p>
+                      <a:pPr algn="ctr" fontAlgn="ctr"/>
+                      <a:r>
+                        <a:rPr lang="en-US" sz="1100" u="none" strike="noStrike" dirty="0">
+                          <a:effectLst/>
+                        </a:rPr>
+                        <a:t>V</a:t>
+                      </a:r>
+                      <a:endParaRPr lang="en-US" sz="1100" b="0" i="0" u="none" strike="noStrike" dirty="0">
+                        <a:solidFill>
+                          <a:srgbClr val="000000"/>
+                        </a:solidFill>
+                        <a:effectLst/>
+                        <a:latin typeface="新細明體" panose="02020500000000000000" pitchFamily="18" charset="-120"/>
+                        <a:ea typeface="新細明體" panose="02020500000000000000" pitchFamily="18" charset="-120"/>
+                      </a:endParaRPr>
+                    </a:p>
+                  </a:txBody>
+                  <a:tcPr marL="72000" marR="72000" marT="0" marB="0" anchor="ctr">
+                    <a:solidFill>
+                      <a:schemeClr val="accent6">
+                        <a:lumMod val="60000"/>
+                        <a:lumOff val="40000"/>
+                      </a:schemeClr>
+                    </a:solidFill>
+                  </a:tcPr>
+                </a:tc>
+                <a:tc>
+                  <a:txBody>
+                    <a:bodyPr/>
+                    <a:lstStyle/>
+                    <a:p>
+                      <a:pPr algn="ctr" fontAlgn="ctr"/>
+                      <a:r>
+                        <a:rPr lang="en-US" sz="1100" u="none" strike="noStrike" dirty="0">
+                          <a:effectLst/>
+                        </a:rPr>
+                        <a:t>V</a:t>
+                      </a:r>
+                      <a:endParaRPr lang="en-US" sz="1100" b="0" i="0" u="none" strike="noStrike" dirty="0">
+                        <a:solidFill>
+                          <a:srgbClr val="000000"/>
+                        </a:solidFill>
+                        <a:effectLst/>
+                        <a:latin typeface="新細明體" panose="02020500000000000000" pitchFamily="18" charset="-120"/>
+                        <a:ea typeface="新細明體" panose="02020500000000000000" pitchFamily="18" charset="-120"/>
+                      </a:endParaRPr>
+                    </a:p>
+                  </a:txBody>
+                  <a:tcPr marL="72000" marR="72000" marT="0" marB="0" anchor="ctr">
+                    <a:solidFill>
+                      <a:schemeClr val="accent6">
+                        <a:lumMod val="60000"/>
+                        <a:lumOff val="40000"/>
+                      </a:schemeClr>
+                    </a:solidFill>
+                  </a:tcPr>
+                </a:tc>
+                <a:tc>
+                  <a:txBody>
+                    <a:bodyPr/>
+                    <a:lstStyle/>
+                    <a:p>
+                      <a:pPr algn="ctr" fontAlgn="ctr"/>
+                      <a:r>
+                        <a:rPr lang="en-US" sz="1100" u="none" strike="noStrike" dirty="0">
+                          <a:effectLst/>
+                        </a:rPr>
+                        <a:t>V</a:t>
+                      </a:r>
+                      <a:endParaRPr lang="en-US" sz="1100" b="0" i="0" u="none" strike="noStrike" dirty="0">
+                        <a:solidFill>
+                          <a:srgbClr val="000000"/>
+                        </a:solidFill>
+                        <a:effectLst/>
+                        <a:latin typeface="新細明體" panose="02020500000000000000" pitchFamily="18" charset="-120"/>
+                        <a:ea typeface="新細明體" panose="02020500000000000000" pitchFamily="18" charset="-120"/>
+                      </a:endParaRPr>
+                    </a:p>
+                  </a:txBody>
+                  <a:tcPr marL="72000" marR="72000" marT="0" marB="0" anchor="ctr">
+                    <a:solidFill>
+                      <a:schemeClr val="accent6">
+                        <a:lumMod val="60000"/>
+                        <a:lumOff val="40000"/>
+                      </a:schemeClr>
+                    </a:solidFill>
+                  </a:tcPr>
+                </a:tc>
+                <a:tc>
+                  <a:txBody>
+                    <a:bodyPr/>
+                    <a:lstStyle/>
+                    <a:p>
+                      <a:pPr algn="ctr" fontAlgn="ctr"/>
+                      <a:r>
+                        <a:rPr lang="en-US" sz="1100" u="none" strike="noStrike" dirty="0">
+                          <a:effectLst/>
+                        </a:rPr>
+                        <a:t>V</a:t>
+                      </a:r>
+                      <a:endParaRPr lang="en-US" sz="1100" b="0" i="0" u="none" strike="noStrike" dirty="0">
+                        <a:solidFill>
+                          <a:srgbClr val="000000"/>
+                        </a:solidFill>
+                        <a:effectLst/>
+                        <a:latin typeface="新細明體" panose="02020500000000000000" pitchFamily="18" charset="-120"/>
+                        <a:ea typeface="新細明體" panose="02020500000000000000" pitchFamily="18" charset="-120"/>
+                      </a:endParaRPr>
+                    </a:p>
+                  </a:txBody>
+                  <a:tcPr marL="72000" marR="72000" marT="0" marB="0" anchor="ctr">
+                    <a:solidFill>
+                      <a:schemeClr val="accent6">
+                        <a:lumMod val="60000"/>
+                        <a:lumOff val="40000"/>
+                      </a:schemeClr>
+                    </a:solidFill>
+                  </a:tcPr>
+                </a:tc>
+                <a:tc>
+                  <a:txBody>
+                    <a:bodyPr/>
+                    <a:lstStyle/>
+                    <a:p>
+                      <a:pPr algn="ctr" fontAlgn="ctr"/>
+                      <a:r>
+                        <a:rPr lang="en-US" sz="1100" u="none" strike="noStrike" dirty="0">
+                          <a:effectLst/>
+                        </a:rPr>
+                        <a:t>V</a:t>
                       </a:r>
                       <a:endParaRPr lang="en-US" sz="1100" b="0" i="0" u="none" strike="noStrike" dirty="0">
                         <a:solidFill>
@@ -21414,12 +24318,12 @@
                     <a:p>
                       <a:pPr algn="l" fontAlgn="ctr"/>
                       <a:r>
-                        <a:rPr lang="en-US" sz="1100" u="none" strike="noStrike">
+                        <a:rPr lang="en-US" sz="1100" u="none" strike="noStrike" dirty="0" err="1">
                           <a:effectLst/>
                         </a:rPr>
-                        <a:t>uvm_blocking_ slave_port</a:t>
+                        <a:t>uvm_blocking_slave_port</a:t>
                       </a:r>
-                      <a:endParaRPr lang="en-US" sz="1100" b="0" i="0" u="none" strike="noStrike">
+                      <a:endParaRPr lang="en-US" sz="1100" b="0" i="0" u="none" strike="noStrike" dirty="0">
                         <a:solidFill>
                           <a:srgbClr val="000000"/>
                         </a:solidFill>
@@ -21445,12 +24349,12 @@
                     <a:p>
                       <a:pPr algn="ctr" fontAlgn="ctr"/>
                       <a:r>
-                        <a:rPr lang="en-US" sz="1100" u="none" strike="noStrike">
+                        <a:rPr lang="en-US" sz="1100" u="none" strike="noStrike" dirty="0">
                           <a:effectLst/>
                         </a:rPr>
-                        <a:t>X</a:t>
+                        <a:t>V</a:t>
                       </a:r>
-                      <a:endParaRPr lang="en-US" sz="1100" b="0" i="0" u="none" strike="noStrike">
+                      <a:endParaRPr lang="en-US" sz="1100" b="0" i="0" u="none" strike="noStrike" dirty="0">
                         <a:solidFill>
                           <a:srgbClr val="000000"/>
                         </a:solidFill>
@@ -21526,12 +24430,12 @@
                     <a:p>
                       <a:pPr algn="ctr" fontAlgn="ctr"/>
                       <a:r>
-                        <a:rPr lang="en-US" sz="1100" u="none" strike="noStrike">
+                        <a:rPr lang="en-US" sz="1100" u="none" strike="noStrike" dirty="0">
                           <a:effectLst/>
                         </a:rPr>
-                        <a:t>X</a:t>
+                        <a:t>V</a:t>
                       </a:r>
-                      <a:endParaRPr lang="en-US" sz="1100" b="0" i="0" u="none" strike="noStrike">
+                      <a:endParaRPr lang="en-US" sz="1100" b="0" i="0" u="none" strike="noStrike" dirty="0">
                         <a:solidFill>
                           <a:srgbClr val="000000"/>
                         </a:solidFill>
@@ -21607,12 +24511,12 @@
                     <a:p>
                       <a:pPr algn="ctr" fontAlgn="ctr"/>
                       <a:r>
-                        <a:rPr lang="en-US" sz="1100" u="none" strike="noStrike">
+                        <a:rPr lang="en-US" sz="1100" u="none" strike="noStrike" dirty="0">
                           <a:effectLst/>
                         </a:rPr>
-                        <a:t>X</a:t>
+                        <a:t>V</a:t>
                       </a:r>
-                      <a:endParaRPr lang="en-US" sz="1100" b="0" i="0" u="none" strike="noStrike">
+                      <a:endParaRPr lang="en-US" sz="1100" b="0" i="0" u="none" strike="noStrike" dirty="0">
                         <a:solidFill>
                           <a:srgbClr val="000000"/>
                         </a:solidFill>
@@ -21720,12 +24624,12 @@
                     <a:p>
                       <a:pPr algn="l" fontAlgn="ctr"/>
                       <a:r>
-                        <a:rPr lang="en-US" sz="1100" u="none" strike="noStrike">
+                        <a:rPr lang="en-US" sz="1100" u="none" strike="noStrike" dirty="0" err="1">
                           <a:effectLst/>
                         </a:rPr>
-                        <a:t>uvm_nonblocking_ slave_port</a:t>
+                        <a:t>uvm_nonblocking_slave_port</a:t>
                       </a:r>
-                      <a:endParaRPr lang="en-US" sz="1100" b="0" i="0" u="none" strike="noStrike">
+                      <a:endParaRPr lang="en-US" sz="1100" b="0" i="0" u="none" strike="noStrike" dirty="0">
                         <a:solidFill>
                           <a:srgbClr val="000000"/>
                         </a:solidFill>
@@ -21776,12 +24680,12 @@
                     <a:p>
                       <a:pPr algn="ctr" fontAlgn="ctr"/>
                       <a:r>
-                        <a:rPr lang="en-US" sz="1100" u="none" strike="noStrike">
+                        <a:rPr lang="en-US" sz="1100" u="none" strike="noStrike" dirty="0">
                           <a:effectLst/>
                         </a:rPr>
-                        <a:t>X</a:t>
+                        <a:t>V</a:t>
                       </a:r>
-                      <a:endParaRPr lang="en-US" sz="1100" b="0" i="0" u="none" strike="noStrike">
+                      <a:endParaRPr lang="en-US" sz="1100" b="0" i="0" u="none" strike="noStrike" dirty="0">
                         <a:solidFill>
                           <a:srgbClr val="000000"/>
                         </a:solidFill>
@@ -21807,12 +24711,12 @@
                     <a:p>
                       <a:pPr algn="ctr" fontAlgn="ctr"/>
                       <a:r>
-                        <a:rPr lang="en-US" sz="1100" u="none" strike="noStrike">
+                        <a:rPr lang="en-US" sz="1100" u="none" strike="noStrike" dirty="0">
                           <a:effectLst/>
                         </a:rPr>
-                        <a:t>X</a:t>
+                        <a:t>V</a:t>
                       </a:r>
-                      <a:endParaRPr lang="en-US" sz="1100" b="0" i="0" u="none" strike="noStrike">
+                      <a:endParaRPr lang="en-US" sz="1100" b="0" i="0" u="none" strike="noStrike" dirty="0">
                         <a:solidFill>
                           <a:srgbClr val="000000"/>
                         </a:solidFill>
@@ -21863,12 +24767,12 @@
                     <a:p>
                       <a:pPr algn="ctr" fontAlgn="ctr"/>
                       <a:r>
-                        <a:rPr lang="en-US" sz="1100" u="none" strike="noStrike">
+                        <a:rPr lang="en-US" sz="1100" u="none" strike="noStrike" dirty="0">
                           <a:effectLst/>
                         </a:rPr>
-                        <a:t>X</a:t>
+                        <a:t>V</a:t>
                       </a:r>
-                      <a:endParaRPr lang="en-US" sz="1100" b="0" i="0" u="none" strike="noStrike">
+                      <a:endParaRPr lang="en-US" sz="1100" b="0" i="0" u="none" strike="noStrike" dirty="0">
                         <a:solidFill>
                           <a:srgbClr val="000000"/>
                         </a:solidFill>
@@ -21894,12 +24798,12 @@
                     <a:p>
                       <a:pPr algn="ctr" fontAlgn="ctr"/>
                       <a:r>
-                        <a:rPr lang="en-US" sz="1100" u="none" strike="noStrike">
+                        <a:rPr lang="en-US" sz="1100" u="none" strike="noStrike" dirty="0">
                           <a:effectLst/>
                         </a:rPr>
-                        <a:t>X</a:t>
+                        <a:t>V</a:t>
                       </a:r>
-                      <a:endParaRPr lang="en-US" sz="1100" b="0" i="0" u="none" strike="noStrike">
+                      <a:endParaRPr lang="en-US" sz="1100" b="0" i="0" u="none" strike="noStrike" dirty="0">
                         <a:solidFill>
                           <a:srgbClr val="000000"/>
                         </a:solidFill>
@@ -21950,12 +24854,12 @@
                     <a:p>
                       <a:pPr algn="ctr" fontAlgn="ctr"/>
                       <a:r>
-                        <a:rPr lang="en-US" sz="1100" u="none" strike="noStrike">
+                        <a:rPr lang="en-US" sz="1100" u="none" strike="noStrike" dirty="0">
                           <a:effectLst/>
                         </a:rPr>
-                        <a:t>X</a:t>
+                        <a:t>V</a:t>
                       </a:r>
-                      <a:endParaRPr lang="en-US" sz="1100" b="0" i="0" u="none" strike="noStrike">
+                      <a:endParaRPr lang="en-US" sz="1100" b="0" i="0" u="none" strike="noStrike" dirty="0">
                         <a:solidFill>
                           <a:srgbClr val="000000"/>
                         </a:solidFill>
@@ -21984,7 +24888,7 @@
                         <a:rPr lang="en-US" sz="1100" u="none" strike="noStrike" dirty="0">
                           <a:effectLst/>
                         </a:rPr>
-                        <a:t>X</a:t>
+                        <a:t>V</a:t>
                       </a:r>
                       <a:endParaRPr lang="en-US" sz="1100" b="0" i="0" u="none" strike="noStrike" dirty="0">
                         <a:solidFill>
@@ -22075,229 +24979,12 @@
                     <a:p>
                       <a:pPr algn="ctr" fontAlgn="ctr"/>
                       <a:r>
-                        <a:rPr lang="en-US" sz="1100" u="none" strike="noStrike">
+                        <a:rPr lang="en-US" sz="1100" u="none" strike="noStrike" dirty="0">
                           <a:effectLst/>
                         </a:rPr>
-                        <a:t>X</a:t>
+                        <a:t>V</a:t>
                       </a:r>
-                      <a:endParaRPr lang="en-US" sz="1100" b="0" i="0" u="none" strike="noStrike">
-                        <a:solidFill>
-                          <a:srgbClr val="000000"/>
-                        </a:solidFill>
-                        <a:effectLst/>
-                        <a:latin typeface="新細明體" panose="02020500000000000000" pitchFamily="18" charset="-120"/>
-                        <a:ea typeface="新細明體" panose="02020500000000000000" pitchFamily="18" charset="-120"/>
-                      </a:endParaRPr>
-                    </a:p>
-                  </a:txBody>
-                  <a:tcPr marL="72000" marR="72000" marT="0" marB="0" anchor="ctr">
-                    <a:solidFill>
-                      <a:schemeClr val="accent6">
-                        <a:lumMod val="60000"/>
-                        <a:lumOff val="40000"/>
-                      </a:schemeClr>
-                    </a:solidFill>
-                  </a:tcPr>
-                </a:tc>
-                <a:tc>
-                  <a:txBody>
-                    <a:bodyPr/>
-                    <a:lstStyle/>
-                    <a:p>
-                      <a:pPr algn="ctr" fontAlgn="ctr"/>
-                      <a:r>
-                        <a:rPr lang="en-US" sz="1100" u="none" strike="noStrike">
-                          <a:effectLst/>
-                        </a:rPr>
-                        <a:t>X</a:t>
-                      </a:r>
-                      <a:endParaRPr lang="en-US" sz="1100" b="0" i="0" u="none" strike="noStrike">
-                        <a:solidFill>
-                          <a:srgbClr val="000000"/>
-                        </a:solidFill>
-                        <a:effectLst/>
-                        <a:latin typeface="新細明體" panose="02020500000000000000" pitchFamily="18" charset="-120"/>
-                        <a:ea typeface="新細明體" panose="02020500000000000000" pitchFamily="18" charset="-120"/>
-                      </a:endParaRPr>
-                    </a:p>
-                  </a:txBody>
-                  <a:tcPr marL="72000" marR="72000" marT="0" marB="0" anchor="ctr">
-                    <a:solidFill>
-                      <a:schemeClr val="accent6">
-                        <a:lumMod val="60000"/>
-                        <a:lumOff val="40000"/>
-                      </a:schemeClr>
-                    </a:solidFill>
-                  </a:tcPr>
-                </a:tc>
-                <a:tc>
-                  <a:txBody>
-                    <a:bodyPr/>
-                    <a:lstStyle/>
-                    <a:p>
-                      <a:pPr algn="ctr" fontAlgn="ctr"/>
-                      <a:r>
-                        <a:rPr lang="en-US" sz="1100" u="none" strike="noStrike">
-                          <a:effectLst/>
-                        </a:rPr>
-                        <a:t>X</a:t>
-                      </a:r>
-                      <a:endParaRPr lang="en-US" sz="1100" b="0" i="0" u="none" strike="noStrike">
-                        <a:solidFill>
-                          <a:srgbClr val="000000"/>
-                        </a:solidFill>
-                        <a:effectLst/>
-                        <a:latin typeface="新細明體" panose="02020500000000000000" pitchFamily="18" charset="-120"/>
-                        <a:ea typeface="新細明體" panose="02020500000000000000" pitchFamily="18" charset="-120"/>
-                      </a:endParaRPr>
-                    </a:p>
-                  </a:txBody>
-                  <a:tcPr marL="72000" marR="72000" marT="0" marB="0" anchor="ctr">
-                    <a:solidFill>
-                      <a:schemeClr val="accent6">
-                        <a:lumMod val="60000"/>
-                        <a:lumOff val="40000"/>
-                      </a:schemeClr>
-                    </a:solidFill>
-                  </a:tcPr>
-                </a:tc>
-                <a:tc>
-                  <a:txBody>
-                    <a:bodyPr/>
-                    <a:lstStyle/>
-                    <a:p>
-                      <a:pPr algn="ctr" fontAlgn="ctr"/>
-                      <a:r>
-                        <a:rPr lang="en-US" sz="1100" u="none" strike="noStrike">
-                          <a:effectLst/>
-                        </a:rPr>
-                        <a:t>X</a:t>
-                      </a:r>
-                      <a:endParaRPr lang="en-US" sz="1100" b="0" i="0" u="none" strike="noStrike">
-                        <a:solidFill>
-                          <a:srgbClr val="000000"/>
-                        </a:solidFill>
-                        <a:effectLst/>
-                        <a:latin typeface="新細明體" panose="02020500000000000000" pitchFamily="18" charset="-120"/>
-                        <a:ea typeface="新細明體" panose="02020500000000000000" pitchFamily="18" charset="-120"/>
-                      </a:endParaRPr>
-                    </a:p>
-                  </a:txBody>
-                  <a:tcPr marL="72000" marR="72000" marT="0" marB="0" anchor="ctr">
-                    <a:solidFill>
-                      <a:schemeClr val="accent6">
-                        <a:lumMod val="60000"/>
-                        <a:lumOff val="40000"/>
-                      </a:schemeClr>
-                    </a:solidFill>
-                  </a:tcPr>
-                </a:tc>
-                <a:tc>
-                  <a:txBody>
-                    <a:bodyPr/>
-                    <a:lstStyle/>
-                    <a:p>
-                      <a:pPr algn="ctr" fontAlgn="ctr"/>
-                      <a:r>
-                        <a:rPr lang="en-US" sz="1100" u="none" strike="noStrike">
-                          <a:effectLst/>
-                        </a:rPr>
-                        <a:t>X</a:t>
-                      </a:r>
-                      <a:endParaRPr lang="en-US" sz="1100" b="0" i="0" u="none" strike="noStrike">
-                        <a:solidFill>
-                          <a:srgbClr val="000000"/>
-                        </a:solidFill>
-                        <a:effectLst/>
-                        <a:latin typeface="新細明體" panose="02020500000000000000" pitchFamily="18" charset="-120"/>
-                        <a:ea typeface="新細明體" panose="02020500000000000000" pitchFamily="18" charset="-120"/>
-                      </a:endParaRPr>
-                    </a:p>
-                  </a:txBody>
-                  <a:tcPr marL="72000" marR="72000" marT="0" marB="0" anchor="ctr">
-                    <a:solidFill>
-                      <a:schemeClr val="accent6">
-                        <a:lumMod val="60000"/>
-                        <a:lumOff val="40000"/>
-                      </a:schemeClr>
-                    </a:solidFill>
-                  </a:tcPr>
-                </a:tc>
-                <a:tc>
-                  <a:txBody>
-                    <a:bodyPr/>
-                    <a:lstStyle/>
-                    <a:p>
-                      <a:pPr algn="ctr" fontAlgn="ctr"/>
-                      <a:r>
-                        <a:rPr lang="en-US" sz="1100" u="none" strike="noStrike">
-                          <a:effectLst/>
-                        </a:rPr>
-                        <a:t>X</a:t>
-                      </a:r>
-                      <a:endParaRPr lang="en-US" sz="1100" b="0" i="0" u="none" strike="noStrike">
-                        <a:solidFill>
-                          <a:srgbClr val="000000"/>
-                        </a:solidFill>
-                        <a:effectLst/>
-                        <a:latin typeface="新細明體" panose="02020500000000000000" pitchFamily="18" charset="-120"/>
-                        <a:ea typeface="新細明體" panose="02020500000000000000" pitchFamily="18" charset="-120"/>
-                      </a:endParaRPr>
-                    </a:p>
-                  </a:txBody>
-                  <a:tcPr marL="72000" marR="72000" marT="0" marB="0" anchor="ctr">
-                    <a:solidFill>
-                      <a:schemeClr val="accent6">
-                        <a:lumMod val="60000"/>
-                        <a:lumOff val="40000"/>
-                      </a:schemeClr>
-                    </a:solidFill>
-                  </a:tcPr>
-                </a:tc>
-                <a:tc>
-                  <a:txBody>
-                    <a:bodyPr/>
-                    <a:lstStyle/>
-                    <a:p>
-                      <a:pPr algn="ctr" fontAlgn="ctr"/>
-                      <a:r>
-                        <a:rPr lang="en-US" sz="1100" u="none" strike="noStrike">
-                          <a:effectLst/>
-                        </a:rPr>
-                        <a:t>X</a:t>
-                      </a:r>
-                      <a:endParaRPr lang="en-US" sz="1100" b="0" i="0" u="none" strike="noStrike">
-                        <a:solidFill>
-                          <a:srgbClr val="000000"/>
-                        </a:solidFill>
-                        <a:effectLst/>
-                        <a:latin typeface="新細明體" panose="02020500000000000000" pitchFamily="18" charset="-120"/>
-                        <a:ea typeface="新細明體" panose="02020500000000000000" pitchFamily="18" charset="-120"/>
-                      </a:endParaRPr>
-                    </a:p>
-                  </a:txBody>
-                  <a:tcPr marL="72000" marR="72000" marT="0" marB="0" anchor="ctr">
-                    <a:solidFill>
-                      <a:schemeClr val="accent6">
-                        <a:lumMod val="60000"/>
-                        <a:lumOff val="40000"/>
-                      </a:schemeClr>
-                    </a:solidFill>
-                  </a:tcPr>
-                </a:tc>
-                <a:tc>
-                  <a:txBody>
-                    <a:bodyPr/>
-                    <a:lstStyle/>
-                    <a:p>
-                      <a:pPr algn="ctr" fontAlgn="ctr"/>
-                      <a:r>
-                        <a:rPr lang="en-US" sz="1100" u="none" strike="noStrike">
-                          <a:effectLst/>
-                        </a:rPr>
-                        <a:t>X</a:t>
-                      </a:r>
-                      <a:endParaRPr lang="en-US" sz="1100" b="0" i="0" u="none" strike="noStrike">
+                      <a:endParaRPr lang="en-US" sz="1100" b="0" i="0" u="none" strike="noStrike" dirty="0">
                         <a:solidFill>
                           <a:srgbClr val="000000"/>
                         </a:solidFill>
@@ -22326,7 +25013,224 @@
                         <a:rPr lang="en-US" sz="1100" u="none" strike="noStrike" dirty="0">
                           <a:effectLst/>
                         </a:rPr>
-                        <a:t>X</a:t>
+                        <a:t>V</a:t>
+                      </a:r>
+                      <a:endParaRPr lang="en-US" sz="1100" b="0" i="0" u="none" strike="noStrike" dirty="0">
+                        <a:solidFill>
+                          <a:srgbClr val="000000"/>
+                        </a:solidFill>
+                        <a:effectLst/>
+                        <a:latin typeface="新細明體" panose="02020500000000000000" pitchFamily="18" charset="-120"/>
+                        <a:ea typeface="新細明體" panose="02020500000000000000" pitchFamily="18" charset="-120"/>
+                      </a:endParaRPr>
+                    </a:p>
+                  </a:txBody>
+                  <a:tcPr marL="72000" marR="72000" marT="0" marB="0" anchor="ctr">
+                    <a:solidFill>
+                      <a:schemeClr val="accent6">
+                        <a:lumMod val="60000"/>
+                        <a:lumOff val="40000"/>
+                      </a:schemeClr>
+                    </a:solidFill>
+                  </a:tcPr>
+                </a:tc>
+                <a:tc>
+                  <a:txBody>
+                    <a:bodyPr/>
+                    <a:lstStyle/>
+                    <a:p>
+                      <a:pPr algn="ctr" fontAlgn="ctr"/>
+                      <a:r>
+                        <a:rPr lang="en-US" sz="1100" u="none" strike="noStrike" dirty="0">
+                          <a:effectLst/>
+                        </a:rPr>
+                        <a:t>V</a:t>
+                      </a:r>
+                      <a:endParaRPr lang="en-US" sz="1100" b="0" i="0" u="none" strike="noStrike" dirty="0">
+                        <a:solidFill>
+                          <a:srgbClr val="000000"/>
+                        </a:solidFill>
+                        <a:effectLst/>
+                        <a:latin typeface="新細明體" panose="02020500000000000000" pitchFamily="18" charset="-120"/>
+                        <a:ea typeface="新細明體" panose="02020500000000000000" pitchFamily="18" charset="-120"/>
+                      </a:endParaRPr>
+                    </a:p>
+                  </a:txBody>
+                  <a:tcPr marL="72000" marR="72000" marT="0" marB="0" anchor="ctr">
+                    <a:solidFill>
+                      <a:schemeClr val="accent6">
+                        <a:lumMod val="60000"/>
+                        <a:lumOff val="40000"/>
+                      </a:schemeClr>
+                    </a:solidFill>
+                  </a:tcPr>
+                </a:tc>
+                <a:tc>
+                  <a:txBody>
+                    <a:bodyPr/>
+                    <a:lstStyle/>
+                    <a:p>
+                      <a:pPr algn="ctr" fontAlgn="ctr"/>
+                      <a:r>
+                        <a:rPr lang="en-US" sz="1100" u="none" strike="noStrike" dirty="0">
+                          <a:effectLst/>
+                        </a:rPr>
+                        <a:t>V</a:t>
+                      </a:r>
+                      <a:endParaRPr lang="en-US" sz="1100" b="0" i="0" u="none" strike="noStrike" dirty="0">
+                        <a:solidFill>
+                          <a:srgbClr val="000000"/>
+                        </a:solidFill>
+                        <a:effectLst/>
+                        <a:latin typeface="新細明體" panose="02020500000000000000" pitchFamily="18" charset="-120"/>
+                        <a:ea typeface="新細明體" panose="02020500000000000000" pitchFamily="18" charset="-120"/>
+                      </a:endParaRPr>
+                    </a:p>
+                  </a:txBody>
+                  <a:tcPr marL="72000" marR="72000" marT="0" marB="0" anchor="ctr">
+                    <a:solidFill>
+                      <a:schemeClr val="accent6">
+                        <a:lumMod val="60000"/>
+                        <a:lumOff val="40000"/>
+                      </a:schemeClr>
+                    </a:solidFill>
+                  </a:tcPr>
+                </a:tc>
+                <a:tc>
+                  <a:txBody>
+                    <a:bodyPr/>
+                    <a:lstStyle/>
+                    <a:p>
+                      <a:pPr algn="ctr" fontAlgn="ctr"/>
+                      <a:r>
+                        <a:rPr lang="en-US" sz="1100" u="none" strike="noStrike" dirty="0">
+                          <a:effectLst/>
+                        </a:rPr>
+                        <a:t>V</a:t>
+                      </a:r>
+                      <a:endParaRPr lang="en-US" sz="1100" b="0" i="0" u="none" strike="noStrike" dirty="0">
+                        <a:solidFill>
+                          <a:srgbClr val="000000"/>
+                        </a:solidFill>
+                        <a:effectLst/>
+                        <a:latin typeface="新細明體" panose="02020500000000000000" pitchFamily="18" charset="-120"/>
+                        <a:ea typeface="新細明體" panose="02020500000000000000" pitchFamily="18" charset="-120"/>
+                      </a:endParaRPr>
+                    </a:p>
+                  </a:txBody>
+                  <a:tcPr marL="72000" marR="72000" marT="0" marB="0" anchor="ctr">
+                    <a:solidFill>
+                      <a:schemeClr val="accent6">
+                        <a:lumMod val="60000"/>
+                        <a:lumOff val="40000"/>
+                      </a:schemeClr>
+                    </a:solidFill>
+                  </a:tcPr>
+                </a:tc>
+                <a:tc>
+                  <a:txBody>
+                    <a:bodyPr/>
+                    <a:lstStyle/>
+                    <a:p>
+                      <a:pPr algn="ctr" fontAlgn="ctr"/>
+                      <a:r>
+                        <a:rPr lang="en-US" sz="1100" u="none" strike="noStrike" dirty="0">
+                          <a:effectLst/>
+                        </a:rPr>
+                        <a:t>V</a:t>
+                      </a:r>
+                      <a:endParaRPr lang="en-US" sz="1100" b="0" i="0" u="none" strike="noStrike" dirty="0">
+                        <a:solidFill>
+                          <a:srgbClr val="000000"/>
+                        </a:solidFill>
+                        <a:effectLst/>
+                        <a:latin typeface="新細明體" panose="02020500000000000000" pitchFamily="18" charset="-120"/>
+                        <a:ea typeface="新細明體" panose="02020500000000000000" pitchFamily="18" charset="-120"/>
+                      </a:endParaRPr>
+                    </a:p>
+                  </a:txBody>
+                  <a:tcPr marL="72000" marR="72000" marT="0" marB="0" anchor="ctr">
+                    <a:solidFill>
+                      <a:schemeClr val="accent6">
+                        <a:lumMod val="60000"/>
+                        <a:lumOff val="40000"/>
+                      </a:schemeClr>
+                    </a:solidFill>
+                  </a:tcPr>
+                </a:tc>
+                <a:tc>
+                  <a:txBody>
+                    <a:bodyPr/>
+                    <a:lstStyle/>
+                    <a:p>
+                      <a:pPr algn="ctr" fontAlgn="ctr"/>
+                      <a:r>
+                        <a:rPr lang="en-US" sz="1100" u="none" strike="noStrike" dirty="0">
+                          <a:effectLst/>
+                        </a:rPr>
+                        <a:t>V</a:t>
+                      </a:r>
+                      <a:endParaRPr lang="en-US" sz="1100" b="0" i="0" u="none" strike="noStrike" dirty="0">
+                        <a:solidFill>
+                          <a:srgbClr val="000000"/>
+                        </a:solidFill>
+                        <a:effectLst/>
+                        <a:latin typeface="新細明體" panose="02020500000000000000" pitchFamily="18" charset="-120"/>
+                        <a:ea typeface="新細明體" panose="02020500000000000000" pitchFamily="18" charset="-120"/>
+                      </a:endParaRPr>
+                    </a:p>
+                  </a:txBody>
+                  <a:tcPr marL="72000" marR="72000" marT="0" marB="0" anchor="ctr">
+                    <a:solidFill>
+                      <a:schemeClr val="accent6">
+                        <a:lumMod val="60000"/>
+                        <a:lumOff val="40000"/>
+                      </a:schemeClr>
+                    </a:solidFill>
+                  </a:tcPr>
+                </a:tc>
+                <a:tc>
+                  <a:txBody>
+                    <a:bodyPr/>
+                    <a:lstStyle/>
+                    <a:p>
+                      <a:pPr algn="ctr" fontAlgn="ctr"/>
+                      <a:r>
+                        <a:rPr lang="en-US" sz="1100" u="none" strike="noStrike" dirty="0">
+                          <a:effectLst/>
+                        </a:rPr>
+                        <a:t>V</a:t>
+                      </a:r>
+                      <a:endParaRPr lang="en-US" sz="1100" b="0" i="0" u="none" strike="noStrike" dirty="0">
+                        <a:solidFill>
+                          <a:srgbClr val="000000"/>
+                        </a:solidFill>
+                        <a:effectLst/>
+                        <a:latin typeface="新細明體" panose="02020500000000000000" pitchFamily="18" charset="-120"/>
+                        <a:ea typeface="新細明體" panose="02020500000000000000" pitchFamily="18" charset="-120"/>
+                      </a:endParaRPr>
+                    </a:p>
+                  </a:txBody>
+                  <a:tcPr marL="72000" marR="72000" marT="0" marB="0" anchor="ctr">
+                    <a:solidFill>
+                      <a:schemeClr val="accent6">
+                        <a:lumMod val="60000"/>
+                        <a:lumOff val="40000"/>
+                      </a:schemeClr>
+                    </a:solidFill>
+                  </a:tcPr>
+                </a:tc>
+                <a:tc>
+                  <a:txBody>
+                    <a:bodyPr/>
+                    <a:lstStyle/>
+                    <a:p>
+                      <a:pPr algn="ctr" fontAlgn="ctr"/>
+                      <a:r>
+                        <a:rPr lang="en-US" sz="1100" u="none" strike="noStrike" dirty="0">
+                          <a:effectLst/>
+                        </a:rPr>
+                        <a:t>V</a:t>
                       </a:r>
                       <a:endParaRPr lang="en-US" sz="1100" b="0" i="0" u="none" strike="noStrike" dirty="0">
                         <a:solidFill>
@@ -22386,7 +25290,7 @@
                     <a:p>
                       <a:pPr algn="l" fontAlgn="ctr"/>
                       <a:r>
-                        <a:rPr lang="en-US" sz="1100" u="none" strike="noStrike" dirty="0" err="1">
+                        <a:rPr lang="en-US" sz="1100" u="none" strike="noStrike" dirty="0">
                           <a:effectLst/>
                         </a:rPr>
                         <a:t>uvm_analysis_port</a:t>
@@ -22645,7 +25549,7 @@
                         <a:rPr lang="en-US" sz="1100" u="none" strike="noStrike" dirty="0">
                           <a:effectLst/>
                         </a:rPr>
-                        <a:t>X</a:t>
+                        <a:t>V</a:t>
                       </a:r>
                       <a:endParaRPr lang="en-US" sz="1100" b="0" i="0" u="none" strike="noStrike" dirty="0">
                         <a:solidFill>
